--- a/Proyecto/Presentaciones/SSanchez_Avance_3.pptx
+++ b/Proyecto/Presentaciones/SSanchez_Avance_3.pptx
@@ -11,13 +11,13 @@
     <p:sldId id="256" r:id="rId2"/>
     <p:sldId id="257" r:id="rId3"/>
     <p:sldId id="268" r:id="rId4"/>
-    <p:sldId id="287" r:id="rId5"/>
-    <p:sldId id="279" r:id="rId6"/>
-    <p:sldId id="281" r:id="rId7"/>
-    <p:sldId id="282" r:id="rId8"/>
-    <p:sldId id="280" r:id="rId9"/>
-    <p:sldId id="283" r:id="rId10"/>
-    <p:sldId id="286" r:id="rId11"/>
+    <p:sldId id="290" r:id="rId5"/>
+    <p:sldId id="281" r:id="rId6"/>
+    <p:sldId id="288" r:id="rId7"/>
+    <p:sldId id="292" r:id="rId8"/>
+    <p:sldId id="293" r:id="rId9"/>
+    <p:sldId id="287" r:id="rId10"/>
+    <p:sldId id="280" r:id="rId11"/>
   </p:sldIdLst>
   <p:sldSz cx="12192000" cy="6858000"/>
   <p:notesSz cx="6858000" cy="9144000"/>
@@ -206,7 +206,7 @@
           <a:p>
             <a:fld id="{2FA9350F-2939-4458-8D71-3F15E74601A9}" type="datetimeFigureOut">
               <a:rPr lang="es-ES" smtClean="0"/>
-              <a:t>04/05/2026</a:t>
+              <a:t>05/05/2026</a:t>
             </a:fld>
             <a:endParaRPr lang="es-ES"/>
           </a:p>
@@ -659,7 +659,7 @@
           <a:p>
             <a:fld id="{BE56174E-6725-4DA7-9A8F-10708BCA6C53}" type="datetime1">
               <a:rPr lang="es-ES" smtClean="0"/>
-              <a:t>04/05/2026</a:t>
+              <a:t>05/05/2026</a:t>
             </a:fld>
             <a:endParaRPr lang="es-ES"/>
           </a:p>
@@ -934,7 +934,7 @@
           <a:p>
             <a:fld id="{BC451DC3-5264-44C7-A3E4-CFD509EBEA33}" type="datetime1">
               <a:rPr lang="es-ES" smtClean="0"/>
-              <a:t>04/05/2026</a:t>
+              <a:t>05/05/2026</a:t>
             </a:fld>
             <a:endParaRPr lang="es-ES"/>
           </a:p>
@@ -1128,7 +1128,7 @@
           <a:p>
             <a:fld id="{62777A52-5768-40D1-BC8B-CF7AA6FE6FAE}" type="datetime1">
               <a:rPr lang="es-ES" smtClean="0"/>
-              <a:t>04/05/2026</a:t>
+              <a:t>05/05/2026</a:t>
             </a:fld>
             <a:endParaRPr lang="es-ES"/>
           </a:p>
@@ -1401,7 +1401,7 @@
           <a:p>
             <a:fld id="{9C062928-AC8C-432A-97A6-2FD35C4358B6}" type="datetime1">
               <a:rPr lang="es-ES" smtClean="0"/>
-              <a:t>04/05/2026</a:t>
+              <a:t>05/05/2026</a:t>
             </a:fld>
             <a:endParaRPr lang="es-ES"/>
           </a:p>
@@ -1742,7 +1742,7 @@
           <a:p>
             <a:fld id="{C02D28E7-65C2-4A97-A3E3-4276DB320591}" type="datetime1">
               <a:rPr lang="es-ES" smtClean="0"/>
-              <a:t>04/05/2026</a:t>
+              <a:t>05/05/2026</a:t>
             </a:fld>
             <a:endParaRPr lang="es-ES"/>
           </a:p>
@@ -2365,7 +2365,7 @@
           <a:p>
             <a:fld id="{8EA4C196-43F4-4D9F-AE7A-CB11FBCCE685}" type="datetime1">
               <a:rPr lang="es-ES" smtClean="0"/>
-              <a:t>04/05/2026</a:t>
+              <a:t>05/05/2026</a:t>
             </a:fld>
             <a:endParaRPr lang="es-ES"/>
           </a:p>
@@ -3225,7 +3225,7 @@
           <a:p>
             <a:fld id="{0BFD7ACA-758E-4EA2-90F8-B36D5DB85761}" type="datetime1">
               <a:rPr lang="es-ES" smtClean="0"/>
-              <a:t>04/05/2026</a:t>
+              <a:t>05/05/2026</a:t>
             </a:fld>
             <a:endParaRPr lang="es-ES"/>
           </a:p>
@@ -3395,7 +3395,7 @@
           <a:p>
             <a:fld id="{D936CC12-3AAD-493A-B056-FC6E58CED972}" type="datetime1">
               <a:rPr lang="es-ES" smtClean="0"/>
-              <a:t>04/05/2026</a:t>
+              <a:t>05/05/2026</a:t>
             </a:fld>
             <a:endParaRPr lang="es-ES"/>
           </a:p>
@@ -3575,7 +3575,7 @@
           <a:p>
             <a:fld id="{64C15989-7D34-4CB0-BE8D-094F4093C5BE}" type="datetime1">
               <a:rPr lang="es-ES" smtClean="0"/>
-              <a:t>04/05/2026</a:t>
+              <a:t>05/05/2026</a:t>
             </a:fld>
             <a:endParaRPr lang="es-ES"/>
           </a:p>
@@ -3745,7 +3745,7 @@
           <a:p>
             <a:fld id="{C8E6AE57-678C-4474-BCAF-A1C1D01D9923}" type="datetime1">
               <a:rPr lang="es-ES" smtClean="0"/>
-              <a:t>04/05/2026</a:t>
+              <a:t>05/05/2026</a:t>
             </a:fld>
             <a:endParaRPr lang="es-ES"/>
           </a:p>
@@ -3992,7 +3992,7 @@
           <a:p>
             <a:fld id="{B65444EE-D81E-4C7F-A938-20181987BA6B}" type="datetime1">
               <a:rPr lang="es-ES" smtClean="0"/>
-              <a:t>04/05/2026</a:t>
+              <a:t>05/05/2026</a:t>
             </a:fld>
             <a:endParaRPr lang="es-ES"/>
           </a:p>
@@ -4284,7 +4284,7 @@
           <a:p>
             <a:fld id="{DB7FAF70-6DC3-49DB-8469-3FD7C3DF5C2E}" type="datetime1">
               <a:rPr lang="es-ES" smtClean="0"/>
-              <a:t>04/05/2026</a:t>
+              <a:t>05/05/2026</a:t>
             </a:fld>
             <a:endParaRPr lang="es-ES"/>
           </a:p>
@@ -4728,7 +4728,7 @@
           <a:p>
             <a:fld id="{18FABBE8-6FAC-4BD3-965B-CE24F796E336}" type="datetime1">
               <a:rPr lang="es-ES" smtClean="0"/>
-              <a:t>04/05/2026</a:t>
+              <a:t>05/05/2026</a:t>
             </a:fld>
             <a:endParaRPr lang="es-ES"/>
           </a:p>
@@ -4846,7 +4846,7 @@
           <a:p>
             <a:fld id="{B7DC02F9-238F-4FB1-8B2A-D4A4337555AF}" type="datetime1">
               <a:rPr lang="es-ES" smtClean="0"/>
-              <a:t>04/05/2026</a:t>
+              <a:t>05/05/2026</a:t>
             </a:fld>
             <a:endParaRPr lang="es-ES"/>
           </a:p>
@@ -4941,7 +4941,7 @@
           <a:p>
             <a:fld id="{0198BAA2-4E3A-4749-9C95-C97D8416C792}" type="datetime1">
               <a:rPr lang="es-ES" smtClean="0"/>
-              <a:t>04/05/2026</a:t>
+              <a:t>05/05/2026</a:t>
             </a:fld>
             <a:endParaRPr lang="es-ES"/>
           </a:p>
@@ -5220,7 +5220,7 @@
           <a:p>
             <a:fld id="{37BCFCA8-6CCF-4D46-B1C6-78E050CA5BBC}" type="datetime1">
               <a:rPr lang="es-ES" smtClean="0"/>
-              <a:t>04/05/2026</a:t>
+              <a:t>05/05/2026</a:t>
             </a:fld>
             <a:endParaRPr lang="es-ES"/>
           </a:p>
@@ -5495,7 +5495,7 @@
           <a:p>
             <a:fld id="{8AA2B887-773C-4083-9C59-A03E7CE6E670}" type="datetime1">
               <a:rPr lang="es-ES" smtClean="0"/>
-              <a:t>04/05/2026</a:t>
+              <a:t>05/05/2026</a:t>
             </a:fld>
             <a:endParaRPr lang="es-ES"/>
           </a:p>
@@ -5938,7 +5938,7 @@
           <a:p>
             <a:fld id="{34307928-303A-499E-B86C-8D170FB3D7EF}" type="datetime1">
               <a:rPr lang="es-ES" smtClean="0"/>
-              <a:t>04/05/2026</a:t>
+              <a:t>05/05/2026</a:t>
             </a:fld>
             <a:endParaRPr lang="es-ES"/>
           </a:p>
@@ -6611,23 +6611,9 @@
 <file path=ppt/slides/slide10.xml><?xml version="1.0" encoding="utf-8"?>
 <p:sld xmlns:a="http://schemas.openxmlformats.org/drawingml/2006/main" xmlns:r="http://schemas.openxmlformats.org/officeDocument/2006/relationships" xmlns:p="http://schemas.openxmlformats.org/presentationml/2006/main">
   <p:cSld>
-    <p:bg>
-      <p:bgPr>
-        <a:solidFill>
-          <a:schemeClr val="bg2"/>
-        </a:solidFill>
-        <a:effectLst/>
-      </p:bgPr>
-    </p:bg>
     <p:spTree>
       <p:nvGrpSpPr>
-        <p:cNvPr id="1" name="">
-          <a:extLst>
-            <a:ext uri="{FF2B5EF4-FFF2-40B4-BE49-F238E27FC236}">
-              <a16:creationId xmlns:a16="http://schemas.microsoft.com/office/drawing/2014/main" id="{0994FE4A-5FAF-C8E1-047F-F286CFF0F4A6}"/>
-            </a:ext>
-          </a:extLst>
-        </p:cNvPr>
+        <p:cNvPr id="1" name=""/>
         <p:cNvGrpSpPr/>
         <p:nvPr/>
       </p:nvGrpSpPr>
@@ -6639,12 +6625,493 @@
           <a:chExt cx="0" cy="0"/>
         </a:xfrm>
       </p:grpSpPr>
-      <p:sp useBgFill="1">
-        <p:nvSpPr>
-          <p:cNvPr id="9" name="Rectangle 8">
+      <p:sp>
+        <p:nvSpPr>
+          <p:cNvPr id="2" name="Título 1">
             <a:extLst>
               <a:ext uri="{FF2B5EF4-FFF2-40B4-BE49-F238E27FC236}">
-                <a16:creationId xmlns:a16="http://schemas.microsoft.com/office/drawing/2014/main" id="{052BEFF1-896C-45B1-B02C-96A6A1BC389A}"/>
+                <a16:creationId xmlns:a16="http://schemas.microsoft.com/office/drawing/2014/main" id="{982FD4D4-1630-BD6B-986B-4139BF3626BA}"/>
+              </a:ext>
+            </a:extLst>
+          </p:cNvPr>
+          <p:cNvSpPr>
+            <a:spLocks noGrp="1"/>
+          </p:cNvSpPr>
+          <p:nvPr>
+            <p:ph type="title"/>
+          </p:nvPr>
+        </p:nvSpPr>
+        <p:spPr/>
+        <p:txBody>
+          <a:bodyPr/>
+          <a:lstStyle/>
+          <a:p>
+            <a:r>
+              <a:rPr lang="es-ES" dirty="0"/>
+              <a:t>Pendiente:</a:t>
+            </a:r>
+          </a:p>
+        </p:txBody>
+      </p:sp>
+      <p:sp>
+        <p:nvSpPr>
+          <p:cNvPr id="3" name="Marcador de contenido 2">
+            <a:extLst>
+              <a:ext uri="{FF2B5EF4-FFF2-40B4-BE49-F238E27FC236}">
+                <a16:creationId xmlns:a16="http://schemas.microsoft.com/office/drawing/2014/main" id="{CE3E2757-F2D6-69A2-97E1-A2E35FB650B3}"/>
+              </a:ext>
+            </a:extLst>
+          </p:cNvPr>
+          <p:cNvSpPr>
+            <a:spLocks noGrp="1"/>
+          </p:cNvSpPr>
+          <p:nvPr>
+            <p:ph idx="1"/>
+          </p:nvPr>
+        </p:nvSpPr>
+        <p:spPr/>
+        <p:txBody>
+          <a:bodyPr/>
+          <a:lstStyle/>
+          <a:p>
+            <a:pPr marL="457200" indent="-457200">
+              <a:buFont typeface="+mj-lt"/>
+              <a:buAutoNum type="arabicPeriod"/>
+            </a:pPr>
+            <a:r>
+              <a:rPr lang="es-ES" dirty="0"/>
+              <a:t>Métricas del ADC del ESP32</a:t>
+            </a:r>
+          </a:p>
+          <a:p>
+            <a:pPr marL="457200" indent="-457200">
+              <a:buFont typeface="+mj-lt"/>
+              <a:buAutoNum type="arabicPeriod"/>
+            </a:pPr>
+            <a:r>
+              <a:rPr lang="es-ES" dirty="0"/>
+              <a:t>Métricas AC de todos los periféricos</a:t>
+            </a:r>
+          </a:p>
+          <a:p>
+            <a:pPr marL="457200" indent="-457200">
+              <a:buFont typeface="+mj-lt"/>
+              <a:buAutoNum type="arabicPeriod"/>
+            </a:pPr>
+            <a:r>
+              <a:rPr lang="es-ES" dirty="0"/>
+              <a:t>Mejorar el equipamiento para realizar mediciones</a:t>
+            </a:r>
+          </a:p>
+          <a:p>
+            <a:pPr marL="457200" indent="-457200">
+              <a:buFont typeface="+mj-lt"/>
+              <a:buAutoNum type="arabicPeriod"/>
+            </a:pPr>
+            <a:endParaRPr lang="es-ES" dirty="0"/>
+          </a:p>
+        </p:txBody>
+      </p:sp>
+      <p:sp>
+        <p:nvSpPr>
+          <p:cNvPr id="4" name="Marcador de número de diapositiva 3">
+            <a:extLst>
+              <a:ext uri="{FF2B5EF4-FFF2-40B4-BE49-F238E27FC236}">
+                <a16:creationId xmlns:a16="http://schemas.microsoft.com/office/drawing/2014/main" id="{40594688-77A8-CF7D-B7E6-86304696C97D}"/>
+              </a:ext>
+            </a:extLst>
+          </p:cNvPr>
+          <p:cNvSpPr>
+            <a:spLocks noGrp="1"/>
+          </p:cNvSpPr>
+          <p:nvPr>
+            <p:ph type="sldNum" sz="quarter" idx="12"/>
+          </p:nvPr>
+        </p:nvSpPr>
+        <p:spPr/>
+        <p:txBody>
+          <a:bodyPr/>
+          <a:lstStyle/>
+          <a:p>
+            <a:fld id="{E725A04B-6C01-430F-BBE6-0BFF217C666F}" type="slidenum">
+              <a:rPr lang="es-ES" smtClean="0"/>
+              <a:t>10</a:t>
+            </a:fld>
+            <a:endParaRPr lang="es-ES"/>
+          </a:p>
+        </p:txBody>
+      </p:sp>
+      <p:sp>
+        <p:nvSpPr>
+          <p:cNvPr id="5" name="Marcador de pie de página 4">
+            <a:extLst>
+              <a:ext uri="{FF2B5EF4-FFF2-40B4-BE49-F238E27FC236}">
+                <a16:creationId xmlns:a16="http://schemas.microsoft.com/office/drawing/2014/main" id="{EEB44F07-3C2A-B0E4-FB53-62549C39DFE9}"/>
+              </a:ext>
+            </a:extLst>
+          </p:cNvPr>
+          <p:cNvSpPr>
+            <a:spLocks noGrp="1"/>
+          </p:cNvSpPr>
+          <p:nvPr>
+            <p:ph type="ftr" sz="quarter" idx="11"/>
+          </p:nvPr>
+        </p:nvSpPr>
+        <p:spPr/>
+        <p:txBody>
+          <a:bodyPr/>
+          <a:lstStyle/>
+          <a:p>
+            <a:endParaRPr lang="es-ES"/>
+          </a:p>
+        </p:txBody>
+      </p:sp>
+    </p:spTree>
+    <p:extLst>
+      <p:ext uri="{BB962C8B-B14F-4D97-AF65-F5344CB8AC3E}">
+        <p14:creationId xmlns:p14="http://schemas.microsoft.com/office/powerpoint/2010/main" val="3666413951"/>
+      </p:ext>
+    </p:extLst>
+  </p:cSld>
+  <p:clrMapOvr>
+    <a:masterClrMapping/>
+  </p:clrMapOvr>
+</p:sld>
+</file>
+
+<file path=ppt/slides/slide2.xml><?xml version="1.0" encoding="utf-8"?>
+<p:sld xmlns:a="http://schemas.openxmlformats.org/drawingml/2006/main" xmlns:r="http://schemas.openxmlformats.org/officeDocument/2006/relationships" xmlns:p="http://schemas.openxmlformats.org/presentationml/2006/main">
+  <p:cSld>
+    <p:spTree>
+      <p:nvGrpSpPr>
+        <p:cNvPr id="1" name=""/>
+        <p:cNvGrpSpPr/>
+        <p:nvPr/>
+      </p:nvGrpSpPr>
+      <p:grpSpPr>
+        <a:xfrm>
+          <a:off x="0" y="0"/>
+          <a:ext cx="0" cy="0"/>
+          <a:chOff x="0" y="0"/>
+          <a:chExt cx="0" cy="0"/>
+        </a:xfrm>
+      </p:grpSpPr>
+      <p:sp>
+        <p:nvSpPr>
+          <p:cNvPr id="2" name="Título 1">
+            <a:extLst>
+              <a:ext uri="{FF2B5EF4-FFF2-40B4-BE49-F238E27FC236}">
+                <a16:creationId xmlns:a16="http://schemas.microsoft.com/office/drawing/2014/main" id="{EE3CBD45-D414-D162-B961-410B924DAB7D}"/>
+              </a:ext>
+            </a:extLst>
+          </p:cNvPr>
+          <p:cNvSpPr>
+            <a:spLocks noGrp="1"/>
+          </p:cNvSpPr>
+          <p:nvPr>
+            <p:ph type="title"/>
+          </p:nvPr>
+        </p:nvSpPr>
+        <p:spPr/>
+        <p:txBody>
+          <a:bodyPr/>
+          <a:lstStyle/>
+          <a:p>
+            <a:r>
+              <a:rPr lang="es-ES"/>
+              <a:t>Objetivo General</a:t>
+            </a:r>
+            <a:endParaRPr lang="es-ES" dirty="0"/>
+          </a:p>
+        </p:txBody>
+      </p:sp>
+      <p:sp>
+        <p:nvSpPr>
+          <p:cNvPr id="3" name="Marcador de contenido 2">
+            <a:extLst>
+              <a:ext uri="{FF2B5EF4-FFF2-40B4-BE49-F238E27FC236}">
+                <a16:creationId xmlns:a16="http://schemas.microsoft.com/office/drawing/2014/main" id="{F92E922B-3F90-83DE-4C42-543B57B10DF8}"/>
+              </a:ext>
+            </a:extLst>
+          </p:cNvPr>
+          <p:cNvSpPr>
+            <a:spLocks noGrp="1"/>
+          </p:cNvSpPr>
+          <p:nvPr>
+            <p:ph idx="1"/>
+          </p:nvPr>
+        </p:nvSpPr>
+        <p:spPr/>
+        <p:txBody>
+          <a:bodyPr>
+            <a:normAutofit/>
+          </a:bodyPr>
+          <a:lstStyle/>
+          <a:p>
+            <a:r>
+              <a:rPr lang="es-ES" sz="2400" dirty="0"/>
+              <a:t>Validar métricas de desempeño de periféricos análogos de los microcontroladores STM32 l476RG y ESP32 S3 mini</a:t>
+            </a:r>
+          </a:p>
+        </p:txBody>
+      </p:sp>
+      <p:sp>
+        <p:nvSpPr>
+          <p:cNvPr id="4" name="Marcador de número de diapositiva 3">
+            <a:extLst>
+              <a:ext uri="{FF2B5EF4-FFF2-40B4-BE49-F238E27FC236}">
+                <a16:creationId xmlns:a16="http://schemas.microsoft.com/office/drawing/2014/main" id="{6071B0C7-5901-5031-36A8-C793F31531DB}"/>
+              </a:ext>
+            </a:extLst>
+          </p:cNvPr>
+          <p:cNvSpPr>
+            <a:spLocks noGrp="1"/>
+          </p:cNvSpPr>
+          <p:nvPr>
+            <p:ph type="sldNum" sz="quarter" idx="12"/>
+          </p:nvPr>
+        </p:nvSpPr>
+        <p:spPr/>
+        <p:txBody>
+          <a:bodyPr/>
+          <a:lstStyle/>
+          <a:p>
+            <a:fld id="{E725A04B-6C01-430F-BBE6-0BFF217C666F}" type="slidenum">
+              <a:rPr lang="es-ES" smtClean="0"/>
+              <a:t>2</a:t>
+            </a:fld>
+            <a:endParaRPr lang="es-ES"/>
+          </a:p>
+        </p:txBody>
+      </p:sp>
+      <p:sp>
+        <p:nvSpPr>
+          <p:cNvPr id="5" name="Marcador de pie de página 4">
+            <a:extLst>
+              <a:ext uri="{FF2B5EF4-FFF2-40B4-BE49-F238E27FC236}">
+                <a16:creationId xmlns:a16="http://schemas.microsoft.com/office/drawing/2014/main" id="{D8968DD1-EE3B-6005-1EF2-6D727F098B38}"/>
+              </a:ext>
+            </a:extLst>
+          </p:cNvPr>
+          <p:cNvSpPr>
+            <a:spLocks noGrp="1"/>
+          </p:cNvSpPr>
+          <p:nvPr>
+            <p:ph type="ftr" sz="quarter" idx="11"/>
+          </p:nvPr>
+        </p:nvSpPr>
+        <p:spPr/>
+        <p:txBody>
+          <a:bodyPr/>
+          <a:lstStyle/>
+          <a:p>
+            <a:endParaRPr lang="es-ES"/>
+          </a:p>
+        </p:txBody>
+      </p:sp>
+    </p:spTree>
+    <p:extLst>
+      <p:ext uri="{BB962C8B-B14F-4D97-AF65-F5344CB8AC3E}">
+        <p14:creationId xmlns:p14="http://schemas.microsoft.com/office/powerpoint/2010/main" val="3510310545"/>
+      </p:ext>
+    </p:extLst>
+  </p:cSld>
+  <p:clrMapOvr>
+    <a:masterClrMapping/>
+  </p:clrMapOvr>
+</p:sld>
+</file>
+
+<file path=ppt/slides/slide3.xml><?xml version="1.0" encoding="utf-8"?>
+<p:sld xmlns:a="http://schemas.openxmlformats.org/drawingml/2006/main" xmlns:r="http://schemas.openxmlformats.org/officeDocument/2006/relationships" xmlns:p="http://schemas.openxmlformats.org/presentationml/2006/main">
+  <p:cSld>
+    <p:spTree>
+      <p:nvGrpSpPr>
+        <p:cNvPr id="1" name=""/>
+        <p:cNvGrpSpPr/>
+        <p:nvPr/>
+      </p:nvGrpSpPr>
+      <p:grpSpPr>
+        <a:xfrm>
+          <a:off x="0" y="0"/>
+          <a:ext cx="0" cy="0"/>
+          <a:chOff x="0" y="0"/>
+          <a:chExt cx="0" cy="0"/>
+        </a:xfrm>
+      </p:grpSpPr>
+      <p:sp>
+        <p:nvSpPr>
+          <p:cNvPr id="2" name="Título 1">
+            <a:extLst>
+              <a:ext uri="{FF2B5EF4-FFF2-40B4-BE49-F238E27FC236}">
+                <a16:creationId xmlns:a16="http://schemas.microsoft.com/office/drawing/2014/main" id="{961379EA-C185-2BEC-536D-F60FF85E27AF}"/>
+              </a:ext>
+            </a:extLst>
+          </p:cNvPr>
+          <p:cNvSpPr>
+            <a:spLocks noGrp="1"/>
+          </p:cNvSpPr>
+          <p:nvPr>
+            <p:ph type="title"/>
+          </p:nvPr>
+        </p:nvSpPr>
+        <p:spPr/>
+        <p:txBody>
+          <a:bodyPr/>
+          <a:lstStyle/>
+          <a:p>
+            <a:r>
+              <a:rPr lang="es-ES" dirty="0"/>
+              <a:t>Objetivos específicos</a:t>
+            </a:r>
+          </a:p>
+        </p:txBody>
+      </p:sp>
+      <p:sp>
+        <p:nvSpPr>
+          <p:cNvPr id="3" name="Marcador de contenido 2">
+            <a:extLst>
+              <a:ext uri="{FF2B5EF4-FFF2-40B4-BE49-F238E27FC236}">
+                <a16:creationId xmlns:a16="http://schemas.microsoft.com/office/drawing/2014/main" id="{B35CD2E8-12E3-785F-E414-3D85C3753DA0}"/>
+              </a:ext>
+            </a:extLst>
+          </p:cNvPr>
+          <p:cNvSpPr>
+            <a:spLocks noGrp="1"/>
+          </p:cNvSpPr>
+          <p:nvPr>
+            <p:ph idx="1"/>
+          </p:nvPr>
+        </p:nvSpPr>
+        <p:spPr>
+          <a:xfrm>
+            <a:off x="677334" y="2160589"/>
+            <a:ext cx="8596668" cy="2629125"/>
+          </a:xfrm>
+        </p:spPr>
+        <p:txBody>
+          <a:bodyPr>
+            <a:normAutofit/>
+          </a:bodyPr>
+          <a:lstStyle/>
+          <a:p>
+            <a:r>
+              <a:rPr lang="es-ES" sz="2400" dirty="0"/>
+              <a:t>Caracterizar el ADC de la SMT32 L476RG y ESP32 S3 mini</a:t>
+            </a:r>
+          </a:p>
+          <a:p>
+            <a:r>
+              <a:rPr lang="es-ES" sz="2400" dirty="0"/>
+              <a:t>Caracterizar el DAC de la STM32 L476RG y ESP32 S3 mini</a:t>
+            </a:r>
+          </a:p>
+          <a:p>
+            <a:r>
+              <a:rPr lang="es-ES" sz="2400" dirty="0"/>
+              <a:t>Generar tabla comparativa de periféricos análogos entre estos microcontroladores</a:t>
+            </a:r>
+          </a:p>
+        </p:txBody>
+      </p:sp>
+      <p:sp>
+        <p:nvSpPr>
+          <p:cNvPr id="4" name="Marcador de número de diapositiva 3">
+            <a:extLst>
+              <a:ext uri="{FF2B5EF4-FFF2-40B4-BE49-F238E27FC236}">
+                <a16:creationId xmlns:a16="http://schemas.microsoft.com/office/drawing/2014/main" id="{CDA493EF-472F-56C4-85B9-DF4F5D44B403}"/>
+              </a:ext>
+            </a:extLst>
+          </p:cNvPr>
+          <p:cNvSpPr>
+            <a:spLocks noGrp="1"/>
+          </p:cNvSpPr>
+          <p:nvPr>
+            <p:ph type="sldNum" sz="quarter" idx="12"/>
+          </p:nvPr>
+        </p:nvSpPr>
+        <p:spPr/>
+        <p:txBody>
+          <a:bodyPr/>
+          <a:lstStyle/>
+          <a:p>
+            <a:fld id="{E725A04B-6C01-430F-BBE6-0BFF217C666F}" type="slidenum">
+              <a:rPr lang="es-ES" smtClean="0"/>
+              <a:t>3</a:t>
+            </a:fld>
+            <a:endParaRPr lang="es-ES"/>
+          </a:p>
+        </p:txBody>
+      </p:sp>
+      <p:sp>
+        <p:nvSpPr>
+          <p:cNvPr id="5" name="Marcador de pie de página 4">
+            <a:extLst>
+              <a:ext uri="{FF2B5EF4-FFF2-40B4-BE49-F238E27FC236}">
+                <a16:creationId xmlns:a16="http://schemas.microsoft.com/office/drawing/2014/main" id="{642FA5DB-F33F-A69D-3A6C-4FEF5780A4AA}"/>
+              </a:ext>
+            </a:extLst>
+          </p:cNvPr>
+          <p:cNvSpPr>
+            <a:spLocks noGrp="1"/>
+          </p:cNvSpPr>
+          <p:nvPr>
+            <p:ph type="ftr" sz="quarter" idx="11"/>
+          </p:nvPr>
+        </p:nvSpPr>
+        <p:spPr/>
+        <p:txBody>
+          <a:bodyPr/>
+          <a:lstStyle/>
+          <a:p>
+            <a:endParaRPr lang="es-ES"/>
+          </a:p>
+        </p:txBody>
+      </p:sp>
+    </p:spTree>
+    <p:extLst>
+      <p:ext uri="{BB962C8B-B14F-4D97-AF65-F5344CB8AC3E}">
+        <p14:creationId xmlns:p14="http://schemas.microsoft.com/office/powerpoint/2010/main" val="3178295506"/>
+      </p:ext>
+    </p:extLst>
+  </p:cSld>
+  <p:clrMapOvr>
+    <a:masterClrMapping/>
+  </p:clrMapOvr>
+</p:sld>
+</file>
+
+<file path=ppt/slides/slide4.xml><?xml version="1.0" encoding="utf-8"?>
+<p:sld xmlns:a="http://schemas.openxmlformats.org/drawingml/2006/main" xmlns:r="http://schemas.openxmlformats.org/officeDocument/2006/relationships" xmlns:p="http://schemas.openxmlformats.org/presentationml/2006/main">
+  <p:cSld>
+    <p:bg>
+      <p:bgPr>
+        <a:solidFill>
+          <a:schemeClr val="bg1"/>
+        </a:solidFill>
+        <a:effectLst/>
+      </p:bgPr>
+    </p:bg>
+    <p:spTree>
+      <p:nvGrpSpPr>
+        <p:cNvPr id="1" name=""/>
+        <p:cNvGrpSpPr/>
+        <p:nvPr/>
+      </p:nvGrpSpPr>
+      <p:grpSpPr>
+        <a:xfrm>
+          <a:off x="0" y="0"/>
+          <a:ext cx="0" cy="0"/>
+          <a:chOff x="0" y="0"/>
+          <a:chExt cx="0" cy="0"/>
+        </a:xfrm>
+      </p:grpSpPr>
+      <p:sp>
+        <p:nvSpPr>
+          <p:cNvPr id="25" name="Rectangle 24">
+            <a:extLst>
+              <a:ext uri="{FF2B5EF4-FFF2-40B4-BE49-F238E27FC236}">
+                <a16:creationId xmlns:a16="http://schemas.microsoft.com/office/drawing/2014/main" id="{C8A3C342-1D03-412F-8DD3-BF519E8E0AE9}"/>
               </a:ext>
               <a:ext uri="{C183D7F6-B498-43B3-948B-1728B52AA6E4}">
                 <adec:decorative xmlns:adec="http://schemas.microsoft.com/office/drawing/2017/decorative" val="1"/>
@@ -6664,7 +7131,7 @@
         </p:nvSpPr>
         <p:spPr>
           <a:xfrm>
-            <a:off x="1" y="0"/>
+            <a:off x="0" y="0"/>
             <a:ext cx="12192000" cy="6858000"/>
           </a:xfrm>
           <a:prstGeom prst="rect">
@@ -6701,10 +7168,49 @@
       </p:sp>
       <p:sp>
         <p:nvSpPr>
-          <p:cNvPr id="11" name="Freeform 36">
+          <p:cNvPr id="2" name="Título 1">
             <a:extLst>
               <a:ext uri="{FF2B5EF4-FFF2-40B4-BE49-F238E27FC236}">
-                <a16:creationId xmlns:a16="http://schemas.microsoft.com/office/drawing/2014/main" id="{BB237A14-61B1-4C00-A670-5D8D68A8668E}"/>
+                <a16:creationId xmlns:a16="http://schemas.microsoft.com/office/drawing/2014/main" id="{297791F4-2847-08F5-0A1D-D97DAAA9AE41}"/>
+              </a:ext>
+            </a:extLst>
+          </p:cNvPr>
+          <p:cNvSpPr>
+            <a:spLocks noGrp="1"/>
+          </p:cNvSpPr>
+          <p:nvPr>
+            <p:ph type="title"/>
+          </p:nvPr>
+        </p:nvSpPr>
+        <p:spPr>
+          <a:xfrm>
+            <a:off x="648930" y="629266"/>
+            <a:ext cx="6188190" cy="1622321"/>
+          </a:xfrm>
+        </p:spPr>
+        <p:txBody>
+          <a:bodyPr>
+            <a:normAutofit/>
+          </a:bodyPr>
+          <a:lstStyle/>
+          <a:p>
+            <a:r>
+              <a:rPr lang="es-ES" dirty="0">
+                <a:solidFill>
+                  <a:srgbClr val="EBEBEB"/>
+                </a:solidFill>
+              </a:rPr>
+              <a:t>Entorno de trabajo ADC</a:t>
+            </a:r>
+          </a:p>
+        </p:txBody>
+      </p:sp>
+      <p:sp>
+        <p:nvSpPr>
+          <p:cNvPr id="27" name="Freeform 31">
+            <a:extLst>
+              <a:ext uri="{FF2B5EF4-FFF2-40B4-BE49-F238E27FC236}">
+                <a16:creationId xmlns:a16="http://schemas.microsoft.com/office/drawing/2014/main" id="{81CC9B02-E087-4350-AEBD-2C3CF001AF01}"/>
               </a:ext>
               <a:ext uri="{C183D7F6-B498-43B3-948B-1728B52AA6E4}">
                 <adec:decorative xmlns:adec="http://schemas.microsoft.com/office/drawing/2017/decorative" val="1"/>
@@ -6723,8 +7229,8 @@
           </p:nvPr>
         </p:nvSpPr>
         <p:spPr>
-          <a:xfrm flipH="1">
-            <a:off x="4644637" y="0"/>
+          <a:xfrm>
+            <a:off x="7015974" y="-1"/>
             <a:ext cx="559472" cy="3709642"/>
           </a:xfrm>
           <a:custGeom>
@@ -7034,7 +7540,7 @@
             </a:pathLst>
           </a:custGeom>
           <a:solidFill>
-            <a:schemeClr val="tx2">
+            <a:schemeClr val="bg1">
               <a:alpha val="20000"/>
             </a:schemeClr>
           </a:solidFill>
@@ -7051,12 +7557,12 @@
           </a:p>
         </p:txBody>
       </p:sp>
-      <p:sp>
-        <p:nvSpPr>
-          <p:cNvPr id="13" name="Freeform: Shape 12">
+      <p:sp useBgFill="1">
+        <p:nvSpPr>
+          <p:cNvPr id="29" name="Freeform: Shape 28">
             <a:extLst>
               <a:ext uri="{FF2B5EF4-FFF2-40B4-BE49-F238E27FC236}">
-                <a16:creationId xmlns:a16="http://schemas.microsoft.com/office/drawing/2014/main" id="{8598F259-6F54-47A3-8D13-1603D786A328}"/>
+                <a16:creationId xmlns:a16="http://schemas.microsoft.com/office/drawing/2014/main" id="{AC3BF0FA-36FA-4CE9-840E-F7C3A8F168B5}"/>
               </a:ext>
               <a:ext uri="{C183D7F6-B498-43B3-948B-1728B52AA6E4}">
                 <adec:decorative xmlns:adec="http://schemas.microsoft.com/office/drawing/2017/decorative" val="1"/>
@@ -7074,118 +7580,118 @@
             </p:extLst>
           </p:nvPr>
         </p:nvSpPr>
-        <p:spPr>
-          <a:xfrm>
-            <a:off x="1" y="1"/>
-            <a:ext cx="4990911" cy="6858001"/>
+        <p:spPr bwMode="gray">
+          <a:xfrm rot="16200000">
+            <a:off x="6281796" y="947378"/>
+            <a:ext cx="6858001" cy="4963245"/>
           </a:xfrm>
           <a:custGeom>
             <a:avLst/>
             <a:gdLst>
-              <a:gd name="connsiteX0" fmla="*/ 3646196 w 4990911"/>
-              <a:gd name="connsiteY0" fmla="*/ 0 h 6858001"/>
-              <a:gd name="connsiteX1" fmla="*/ 4989734 w 4990911"/>
-              <a:gd name="connsiteY1" fmla="*/ 0 h 6858001"/>
-              <a:gd name="connsiteX2" fmla="*/ 4964689 w 4990911"/>
-              <a:gd name="connsiteY2" fmla="*/ 155677 h 6858001"/>
-              <a:gd name="connsiteX3" fmla="*/ 4940820 w 4990911"/>
-              <a:gd name="connsiteY3" fmla="*/ 310668 h 6858001"/>
-              <a:gd name="connsiteX4" fmla="*/ 4917456 w 4990911"/>
-              <a:gd name="connsiteY4" fmla="*/ 466344 h 6858001"/>
-              <a:gd name="connsiteX5" fmla="*/ 4897453 w 4990911"/>
-              <a:gd name="connsiteY5" fmla="*/ 622707 h 6858001"/>
-              <a:gd name="connsiteX6" fmla="*/ 4877282 w 4990911"/>
-              <a:gd name="connsiteY6" fmla="*/ 778383 h 6858001"/>
-              <a:gd name="connsiteX7" fmla="*/ 4858456 w 4990911"/>
-              <a:gd name="connsiteY7" fmla="*/ 934746 h 6858001"/>
-              <a:gd name="connsiteX8" fmla="*/ 4842320 w 4990911"/>
-              <a:gd name="connsiteY8" fmla="*/ 1089051 h 6858001"/>
-              <a:gd name="connsiteX9" fmla="*/ 4827024 w 4990911"/>
-              <a:gd name="connsiteY9" fmla="*/ 1245413 h 6858001"/>
-              <a:gd name="connsiteX10" fmla="*/ 4813072 w 4990911"/>
-              <a:gd name="connsiteY10" fmla="*/ 1401090 h 6858001"/>
-              <a:gd name="connsiteX11" fmla="*/ 4800970 w 4990911"/>
-              <a:gd name="connsiteY11" fmla="*/ 1554023 h 6858001"/>
-              <a:gd name="connsiteX12" fmla="*/ 4788867 w 4990911"/>
-              <a:gd name="connsiteY12" fmla="*/ 1709014 h 6858001"/>
-              <a:gd name="connsiteX13" fmla="*/ 4778782 w 4990911"/>
-              <a:gd name="connsiteY13" fmla="*/ 1861947 h 6858001"/>
-              <a:gd name="connsiteX14" fmla="*/ 4770882 w 4990911"/>
-              <a:gd name="connsiteY14" fmla="*/ 2014881 h 6858001"/>
-              <a:gd name="connsiteX15" fmla="*/ 4762645 w 4990911"/>
-              <a:gd name="connsiteY15" fmla="*/ 2167128 h 6858001"/>
-              <a:gd name="connsiteX16" fmla="*/ 4755754 w 4990911"/>
-              <a:gd name="connsiteY16" fmla="*/ 2318004 h 6858001"/>
-              <a:gd name="connsiteX17" fmla="*/ 4750879 w 4990911"/>
-              <a:gd name="connsiteY17" fmla="*/ 2467509 h 6858001"/>
-              <a:gd name="connsiteX18" fmla="*/ 4746677 w 4990911"/>
-              <a:gd name="connsiteY18" fmla="*/ 2617013 h 6858001"/>
-              <a:gd name="connsiteX19" fmla="*/ 4742643 w 4990911"/>
-              <a:gd name="connsiteY19" fmla="*/ 2765146 h 6858001"/>
-              <a:gd name="connsiteX20" fmla="*/ 4740794 w 4990911"/>
-              <a:gd name="connsiteY20" fmla="*/ 2911221 h 6858001"/>
-              <a:gd name="connsiteX21" fmla="*/ 4738777 w 4990911"/>
-              <a:gd name="connsiteY21" fmla="*/ 3057297 h 6858001"/>
-              <a:gd name="connsiteX22" fmla="*/ 4737768 w 4990911"/>
-              <a:gd name="connsiteY22" fmla="*/ 3201315 h 6858001"/>
-              <a:gd name="connsiteX23" fmla="*/ 4738777 w 4990911"/>
-              <a:gd name="connsiteY23" fmla="*/ 3343961 h 6858001"/>
-              <a:gd name="connsiteX24" fmla="*/ 4738777 w 4990911"/>
-              <a:gd name="connsiteY24" fmla="*/ 3485236 h 6858001"/>
-              <a:gd name="connsiteX25" fmla="*/ 4740794 w 4990911"/>
-              <a:gd name="connsiteY25" fmla="*/ 3625139 h 6858001"/>
-              <a:gd name="connsiteX26" fmla="*/ 4743819 w 4990911"/>
-              <a:gd name="connsiteY26" fmla="*/ 3762299 h 6858001"/>
-              <a:gd name="connsiteX27" fmla="*/ 4746677 w 4990911"/>
-              <a:gd name="connsiteY27" fmla="*/ 3898087 h 6858001"/>
-              <a:gd name="connsiteX28" fmla="*/ 4749871 w 4990911"/>
-              <a:gd name="connsiteY28" fmla="*/ 4031133 h 6858001"/>
-              <a:gd name="connsiteX29" fmla="*/ 4754745 w 4990911"/>
-              <a:gd name="connsiteY29" fmla="*/ 4163492 h 6858001"/>
-              <a:gd name="connsiteX30" fmla="*/ 4759956 w 4990911"/>
-              <a:gd name="connsiteY30" fmla="*/ 4293793 h 6858001"/>
-              <a:gd name="connsiteX31" fmla="*/ 4764662 w 4990911"/>
-              <a:gd name="connsiteY31" fmla="*/ 4421352 h 6858001"/>
-              <a:gd name="connsiteX32" fmla="*/ 4777942 w 4990911"/>
-              <a:gd name="connsiteY32" fmla="*/ 4670298 h 6858001"/>
-              <a:gd name="connsiteX33" fmla="*/ 4792061 w 4990911"/>
-              <a:gd name="connsiteY33" fmla="*/ 4908956 h 6858001"/>
-              <a:gd name="connsiteX34" fmla="*/ 4806853 w 4990911"/>
-              <a:gd name="connsiteY34" fmla="*/ 5138013 h 6858001"/>
-              <a:gd name="connsiteX35" fmla="*/ 4823158 w 4990911"/>
-              <a:gd name="connsiteY35" fmla="*/ 5354726 h 6858001"/>
-              <a:gd name="connsiteX36" fmla="*/ 4840135 w 4990911"/>
-              <a:gd name="connsiteY36" fmla="*/ 5561838 h 6858001"/>
-              <a:gd name="connsiteX37" fmla="*/ 4858456 w 4990911"/>
-              <a:gd name="connsiteY37" fmla="*/ 5753862 h 6858001"/>
-              <a:gd name="connsiteX38" fmla="*/ 4876442 w 4990911"/>
-              <a:gd name="connsiteY38" fmla="*/ 5934227 h 6858001"/>
-              <a:gd name="connsiteX39" fmla="*/ 4894427 w 4990911"/>
-              <a:gd name="connsiteY39" fmla="*/ 6100191 h 6858001"/>
-              <a:gd name="connsiteX40" fmla="*/ 4911404 w 4990911"/>
-              <a:gd name="connsiteY40" fmla="*/ 6252438 h 6858001"/>
-              <a:gd name="connsiteX41" fmla="*/ 4927541 w 4990911"/>
-              <a:gd name="connsiteY41" fmla="*/ 6387541 h 6858001"/>
-              <a:gd name="connsiteX42" fmla="*/ 4942837 w 4990911"/>
-              <a:gd name="connsiteY42" fmla="*/ 6509613 h 6858001"/>
-              <a:gd name="connsiteX43" fmla="*/ 4955612 w 4990911"/>
-              <a:gd name="connsiteY43" fmla="*/ 6612483 h 6858001"/>
-              <a:gd name="connsiteX44" fmla="*/ 4967714 w 4990911"/>
-              <a:gd name="connsiteY44" fmla="*/ 6698894 h 6858001"/>
-              <a:gd name="connsiteX45" fmla="*/ 4985028 w 4990911"/>
-              <a:gd name="connsiteY45" fmla="*/ 6817538 h 6858001"/>
-              <a:gd name="connsiteX46" fmla="*/ 4990911 w 4990911"/>
-              <a:gd name="connsiteY46" fmla="*/ 6858000 h 6858001"/>
-              <a:gd name="connsiteX47" fmla="*/ 4085557 w 4990911"/>
-              <a:gd name="connsiteY47" fmla="*/ 6858000 h 6858001"/>
-              <a:gd name="connsiteX48" fmla="*/ 4085557 w 4990911"/>
-              <a:gd name="connsiteY48" fmla="*/ 6858001 h 6858001"/>
-              <a:gd name="connsiteX49" fmla="*/ 0 w 4990911"/>
-              <a:gd name="connsiteY49" fmla="*/ 6858001 h 6858001"/>
-              <a:gd name="connsiteX50" fmla="*/ 0 w 4990911"/>
-              <a:gd name="connsiteY50" fmla="*/ 1 h 6858001"/>
-              <a:gd name="connsiteX51" fmla="*/ 3646196 w 4990911"/>
-              <a:gd name="connsiteY51" fmla="*/ 1 h 6858001"/>
+              <a:gd name="connsiteX0" fmla="*/ 6858001 w 6858001"/>
+              <a:gd name="connsiteY0" fmla="*/ 1177 h 4963245"/>
+              <a:gd name="connsiteX1" fmla="*/ 6858001 w 6858001"/>
+              <a:gd name="connsiteY1" fmla="*/ 1344715 h 4963245"/>
+              <a:gd name="connsiteX2" fmla="*/ 6858000 w 6858001"/>
+              <a:gd name="connsiteY2" fmla="*/ 1344715 h 4963245"/>
+              <a:gd name="connsiteX3" fmla="*/ 6858000 w 6858001"/>
+              <a:gd name="connsiteY3" fmla="*/ 4963245 h 4963245"/>
+              <a:gd name="connsiteX4" fmla="*/ 0 w 6858001"/>
+              <a:gd name="connsiteY4" fmla="*/ 4963244 h 4963245"/>
+              <a:gd name="connsiteX5" fmla="*/ 0 w 6858001"/>
+              <a:gd name="connsiteY5" fmla="*/ 900697 h 4963245"/>
+              <a:gd name="connsiteX6" fmla="*/ 1 w 6858001"/>
+              <a:gd name="connsiteY6" fmla="*/ 900697 h 4963245"/>
+              <a:gd name="connsiteX7" fmla="*/ 1 w 6858001"/>
+              <a:gd name="connsiteY7" fmla="*/ 0 h 4963245"/>
+              <a:gd name="connsiteX8" fmla="*/ 40463 w 6858001"/>
+              <a:gd name="connsiteY8" fmla="*/ 5883 h 4963245"/>
+              <a:gd name="connsiteX9" fmla="*/ 159107 w 6858001"/>
+              <a:gd name="connsiteY9" fmla="*/ 23196 h 4963245"/>
+              <a:gd name="connsiteX10" fmla="*/ 245518 w 6858001"/>
+              <a:gd name="connsiteY10" fmla="*/ 35299 h 4963245"/>
+              <a:gd name="connsiteX11" fmla="*/ 348388 w 6858001"/>
+              <a:gd name="connsiteY11" fmla="*/ 48073 h 4963245"/>
+              <a:gd name="connsiteX12" fmla="*/ 470460 w 6858001"/>
+              <a:gd name="connsiteY12" fmla="*/ 63369 h 4963245"/>
+              <a:gd name="connsiteX13" fmla="*/ 605563 w 6858001"/>
+              <a:gd name="connsiteY13" fmla="*/ 79506 h 4963245"/>
+              <a:gd name="connsiteX14" fmla="*/ 757810 w 6858001"/>
+              <a:gd name="connsiteY14" fmla="*/ 96483 h 4963245"/>
+              <a:gd name="connsiteX15" fmla="*/ 923774 w 6858001"/>
+              <a:gd name="connsiteY15" fmla="*/ 114469 h 4963245"/>
+              <a:gd name="connsiteX16" fmla="*/ 1104139 w 6858001"/>
+              <a:gd name="connsiteY16" fmla="*/ 132454 h 4963245"/>
+              <a:gd name="connsiteX17" fmla="*/ 1296163 w 6858001"/>
+              <a:gd name="connsiteY17" fmla="*/ 150776 h 4963245"/>
+              <a:gd name="connsiteX18" fmla="*/ 1503275 w 6858001"/>
+              <a:gd name="connsiteY18" fmla="*/ 167753 h 4963245"/>
+              <a:gd name="connsiteX19" fmla="*/ 1719988 w 6858001"/>
+              <a:gd name="connsiteY19" fmla="*/ 184058 h 4963245"/>
+              <a:gd name="connsiteX20" fmla="*/ 1949045 w 6858001"/>
+              <a:gd name="connsiteY20" fmla="*/ 198849 h 4963245"/>
+              <a:gd name="connsiteX21" fmla="*/ 2187703 w 6858001"/>
+              <a:gd name="connsiteY21" fmla="*/ 212969 h 4963245"/>
+              <a:gd name="connsiteX22" fmla="*/ 2436649 w 6858001"/>
+              <a:gd name="connsiteY22" fmla="*/ 226248 h 4963245"/>
+              <a:gd name="connsiteX23" fmla="*/ 2564208 w 6858001"/>
+              <a:gd name="connsiteY23" fmla="*/ 230955 h 4963245"/>
+              <a:gd name="connsiteX24" fmla="*/ 2694509 w 6858001"/>
+              <a:gd name="connsiteY24" fmla="*/ 236165 h 4963245"/>
+              <a:gd name="connsiteX25" fmla="*/ 2826868 w 6858001"/>
+              <a:gd name="connsiteY25" fmla="*/ 241040 h 4963245"/>
+              <a:gd name="connsiteX26" fmla="*/ 2959914 w 6858001"/>
+              <a:gd name="connsiteY26" fmla="*/ 244234 h 4963245"/>
+              <a:gd name="connsiteX27" fmla="*/ 3095702 w 6858001"/>
+              <a:gd name="connsiteY27" fmla="*/ 247091 h 4963245"/>
+              <a:gd name="connsiteX28" fmla="*/ 3232862 w 6858001"/>
+              <a:gd name="connsiteY28" fmla="*/ 250117 h 4963245"/>
+              <a:gd name="connsiteX29" fmla="*/ 3372765 w 6858001"/>
+              <a:gd name="connsiteY29" fmla="*/ 252134 h 4963245"/>
+              <a:gd name="connsiteX30" fmla="*/ 3514040 w 6858001"/>
+              <a:gd name="connsiteY30" fmla="*/ 252134 h 4963245"/>
+              <a:gd name="connsiteX31" fmla="*/ 3656686 w 6858001"/>
+              <a:gd name="connsiteY31" fmla="*/ 253142 h 4963245"/>
+              <a:gd name="connsiteX32" fmla="*/ 3800704 w 6858001"/>
+              <a:gd name="connsiteY32" fmla="*/ 252134 h 4963245"/>
+              <a:gd name="connsiteX33" fmla="*/ 3946780 w 6858001"/>
+              <a:gd name="connsiteY33" fmla="*/ 250117 h 4963245"/>
+              <a:gd name="connsiteX34" fmla="*/ 4092855 w 6858001"/>
+              <a:gd name="connsiteY34" fmla="*/ 248268 h 4963245"/>
+              <a:gd name="connsiteX35" fmla="*/ 4240988 w 6858001"/>
+              <a:gd name="connsiteY35" fmla="*/ 244234 h 4963245"/>
+              <a:gd name="connsiteX36" fmla="*/ 4390492 w 6858001"/>
+              <a:gd name="connsiteY36" fmla="*/ 240032 h 4963245"/>
+              <a:gd name="connsiteX37" fmla="*/ 4539997 w 6858001"/>
+              <a:gd name="connsiteY37" fmla="*/ 235157 h 4963245"/>
+              <a:gd name="connsiteX38" fmla="*/ 4690873 w 6858001"/>
+              <a:gd name="connsiteY38" fmla="*/ 228266 h 4963245"/>
+              <a:gd name="connsiteX39" fmla="*/ 4843120 w 6858001"/>
+              <a:gd name="connsiteY39" fmla="*/ 220029 h 4963245"/>
+              <a:gd name="connsiteX40" fmla="*/ 4996054 w 6858001"/>
+              <a:gd name="connsiteY40" fmla="*/ 212129 h 4963245"/>
+              <a:gd name="connsiteX41" fmla="*/ 5148987 w 6858001"/>
+              <a:gd name="connsiteY41" fmla="*/ 202044 h 4963245"/>
+              <a:gd name="connsiteX42" fmla="*/ 5303978 w 6858001"/>
+              <a:gd name="connsiteY42" fmla="*/ 189941 h 4963245"/>
+              <a:gd name="connsiteX43" fmla="*/ 5456911 w 6858001"/>
+              <a:gd name="connsiteY43" fmla="*/ 177839 h 4963245"/>
+              <a:gd name="connsiteX44" fmla="*/ 5612588 w 6858001"/>
+              <a:gd name="connsiteY44" fmla="*/ 163887 h 4963245"/>
+              <a:gd name="connsiteX45" fmla="*/ 5768950 w 6858001"/>
+              <a:gd name="connsiteY45" fmla="*/ 148591 h 4963245"/>
+              <a:gd name="connsiteX46" fmla="*/ 5923255 w 6858001"/>
+              <a:gd name="connsiteY46" fmla="*/ 132455 h 4963245"/>
+              <a:gd name="connsiteX47" fmla="*/ 6079618 w 6858001"/>
+              <a:gd name="connsiteY47" fmla="*/ 113629 h 4963245"/>
+              <a:gd name="connsiteX48" fmla="*/ 6235294 w 6858001"/>
+              <a:gd name="connsiteY48" fmla="*/ 93458 h 4963245"/>
+              <a:gd name="connsiteX49" fmla="*/ 6391657 w 6858001"/>
+              <a:gd name="connsiteY49" fmla="*/ 73455 h 4963245"/>
+              <a:gd name="connsiteX50" fmla="*/ 6547333 w 6858001"/>
+              <a:gd name="connsiteY50" fmla="*/ 50091 h 4963245"/>
+              <a:gd name="connsiteX51" fmla="*/ 6702324 w 6858001"/>
+              <a:gd name="connsiteY51" fmla="*/ 26222 h 4963245"/>
             </a:gdLst>
             <a:ahLst/>
             <a:cxnLst>
@@ -7348,162 +7854,162 @@
             </a:cxnLst>
             <a:rect l="l" t="t" r="r" b="b"/>
             <a:pathLst>
-              <a:path w="4990911" h="6858001">
+              <a:path w="6858001" h="4963245">
                 <a:moveTo>
-                  <a:pt x="3646196" y="0"/>
+                  <a:pt x="6858001" y="1177"/>
                 </a:moveTo>
                 <a:lnTo>
-                  <a:pt x="4989734" y="0"/>
-                </a:lnTo>
-                <a:lnTo>
-                  <a:pt x="4964689" y="155677"/>
-                </a:lnTo>
-                <a:lnTo>
-                  <a:pt x="4940820" y="310668"/>
-                </a:lnTo>
-                <a:lnTo>
-                  <a:pt x="4917456" y="466344"/>
-                </a:lnTo>
-                <a:lnTo>
-                  <a:pt x="4897453" y="622707"/>
-                </a:lnTo>
-                <a:lnTo>
-                  <a:pt x="4877282" y="778383"/>
-                </a:lnTo>
-                <a:lnTo>
-                  <a:pt x="4858456" y="934746"/>
-                </a:lnTo>
-                <a:lnTo>
-                  <a:pt x="4842320" y="1089051"/>
-                </a:lnTo>
-                <a:lnTo>
-                  <a:pt x="4827024" y="1245413"/>
-                </a:lnTo>
-                <a:lnTo>
-                  <a:pt x="4813072" y="1401090"/>
-                </a:lnTo>
-                <a:lnTo>
-                  <a:pt x="4800970" y="1554023"/>
-                </a:lnTo>
-                <a:lnTo>
-                  <a:pt x="4788867" y="1709014"/>
-                </a:lnTo>
-                <a:lnTo>
-                  <a:pt x="4778782" y="1861947"/>
-                </a:lnTo>
-                <a:lnTo>
-                  <a:pt x="4770882" y="2014881"/>
-                </a:lnTo>
-                <a:lnTo>
-                  <a:pt x="4762645" y="2167128"/>
-                </a:lnTo>
-                <a:lnTo>
-                  <a:pt x="4755754" y="2318004"/>
-                </a:lnTo>
-                <a:lnTo>
-                  <a:pt x="4750879" y="2467509"/>
-                </a:lnTo>
-                <a:lnTo>
-                  <a:pt x="4746677" y="2617013"/>
-                </a:lnTo>
-                <a:lnTo>
-                  <a:pt x="4742643" y="2765146"/>
-                </a:lnTo>
-                <a:lnTo>
-                  <a:pt x="4740794" y="2911221"/>
-                </a:lnTo>
-                <a:lnTo>
-                  <a:pt x="4738777" y="3057297"/>
-                </a:lnTo>
-                <a:lnTo>
-                  <a:pt x="4737768" y="3201315"/>
-                </a:lnTo>
-                <a:lnTo>
-                  <a:pt x="4738777" y="3343961"/>
-                </a:lnTo>
-                <a:lnTo>
-                  <a:pt x="4738777" y="3485236"/>
-                </a:lnTo>
-                <a:lnTo>
-                  <a:pt x="4740794" y="3625139"/>
-                </a:lnTo>
-                <a:lnTo>
-                  <a:pt x="4743819" y="3762299"/>
-                </a:lnTo>
-                <a:lnTo>
-                  <a:pt x="4746677" y="3898087"/>
-                </a:lnTo>
-                <a:lnTo>
-                  <a:pt x="4749871" y="4031133"/>
-                </a:lnTo>
-                <a:lnTo>
-                  <a:pt x="4754745" y="4163492"/>
-                </a:lnTo>
-                <a:lnTo>
-                  <a:pt x="4759956" y="4293793"/>
-                </a:lnTo>
-                <a:lnTo>
-                  <a:pt x="4764662" y="4421352"/>
-                </a:lnTo>
-                <a:lnTo>
-                  <a:pt x="4777942" y="4670298"/>
-                </a:lnTo>
-                <a:lnTo>
-                  <a:pt x="4792061" y="4908956"/>
-                </a:lnTo>
-                <a:lnTo>
-                  <a:pt x="4806853" y="5138013"/>
-                </a:lnTo>
-                <a:lnTo>
-                  <a:pt x="4823158" y="5354726"/>
-                </a:lnTo>
-                <a:lnTo>
-                  <a:pt x="4840135" y="5561838"/>
-                </a:lnTo>
-                <a:lnTo>
-                  <a:pt x="4858456" y="5753862"/>
-                </a:lnTo>
-                <a:lnTo>
-                  <a:pt x="4876442" y="5934227"/>
-                </a:lnTo>
-                <a:lnTo>
-                  <a:pt x="4894427" y="6100191"/>
-                </a:lnTo>
-                <a:lnTo>
-                  <a:pt x="4911404" y="6252438"/>
-                </a:lnTo>
-                <a:lnTo>
-                  <a:pt x="4927541" y="6387541"/>
-                </a:lnTo>
-                <a:lnTo>
-                  <a:pt x="4942837" y="6509613"/>
-                </a:lnTo>
-                <a:lnTo>
-                  <a:pt x="4955612" y="6612483"/>
-                </a:lnTo>
-                <a:lnTo>
-                  <a:pt x="4967714" y="6698894"/>
-                </a:lnTo>
-                <a:lnTo>
-                  <a:pt x="4985028" y="6817538"/>
-                </a:lnTo>
-                <a:lnTo>
-                  <a:pt x="4990911" y="6858000"/>
-                </a:lnTo>
-                <a:lnTo>
-                  <a:pt x="4085557" y="6858000"/>
-                </a:lnTo>
-                <a:lnTo>
-                  <a:pt x="4085557" y="6858001"/>
-                </a:lnTo>
-                <a:lnTo>
-                  <a:pt x="0" y="6858001"/>
-                </a:lnTo>
-                <a:lnTo>
-                  <a:pt x="0" y="1"/>
-                </a:lnTo>
-                <a:lnTo>
-                  <a:pt x="3646196" y="1"/>
+                  <a:pt x="6858001" y="1344715"/>
+                </a:lnTo>
+                <a:lnTo>
+                  <a:pt x="6858000" y="1344715"/>
+                </a:lnTo>
+                <a:lnTo>
+                  <a:pt x="6858000" y="4963245"/>
+                </a:lnTo>
+                <a:lnTo>
+                  <a:pt x="0" y="4963244"/>
+                </a:lnTo>
+                <a:lnTo>
+                  <a:pt x="0" y="900697"/>
+                </a:lnTo>
+                <a:lnTo>
+                  <a:pt x="1" y="900697"/>
+                </a:lnTo>
+                <a:lnTo>
+                  <a:pt x="1" y="0"/>
+                </a:lnTo>
+                <a:lnTo>
+                  <a:pt x="40463" y="5883"/>
+                </a:lnTo>
+                <a:lnTo>
+                  <a:pt x="159107" y="23196"/>
+                </a:lnTo>
+                <a:lnTo>
+                  <a:pt x="245518" y="35299"/>
+                </a:lnTo>
+                <a:lnTo>
+                  <a:pt x="348388" y="48073"/>
+                </a:lnTo>
+                <a:lnTo>
+                  <a:pt x="470460" y="63369"/>
+                </a:lnTo>
+                <a:lnTo>
+                  <a:pt x="605563" y="79506"/>
+                </a:lnTo>
+                <a:lnTo>
+                  <a:pt x="757810" y="96483"/>
+                </a:lnTo>
+                <a:lnTo>
+                  <a:pt x="923774" y="114469"/>
+                </a:lnTo>
+                <a:lnTo>
+                  <a:pt x="1104139" y="132454"/>
+                </a:lnTo>
+                <a:lnTo>
+                  <a:pt x="1296163" y="150776"/>
+                </a:lnTo>
+                <a:lnTo>
+                  <a:pt x="1503275" y="167753"/>
+                </a:lnTo>
+                <a:lnTo>
+                  <a:pt x="1719988" y="184058"/>
+                </a:lnTo>
+                <a:lnTo>
+                  <a:pt x="1949045" y="198849"/>
+                </a:lnTo>
+                <a:lnTo>
+                  <a:pt x="2187703" y="212969"/>
+                </a:lnTo>
+                <a:lnTo>
+                  <a:pt x="2436649" y="226248"/>
+                </a:lnTo>
+                <a:lnTo>
+                  <a:pt x="2564208" y="230955"/>
+                </a:lnTo>
+                <a:lnTo>
+                  <a:pt x="2694509" y="236165"/>
+                </a:lnTo>
+                <a:lnTo>
+                  <a:pt x="2826868" y="241040"/>
+                </a:lnTo>
+                <a:lnTo>
+                  <a:pt x="2959914" y="244234"/>
+                </a:lnTo>
+                <a:lnTo>
+                  <a:pt x="3095702" y="247091"/>
+                </a:lnTo>
+                <a:lnTo>
+                  <a:pt x="3232862" y="250117"/>
+                </a:lnTo>
+                <a:lnTo>
+                  <a:pt x="3372765" y="252134"/>
+                </a:lnTo>
+                <a:lnTo>
+                  <a:pt x="3514040" y="252134"/>
+                </a:lnTo>
+                <a:lnTo>
+                  <a:pt x="3656686" y="253142"/>
+                </a:lnTo>
+                <a:lnTo>
+                  <a:pt x="3800704" y="252134"/>
+                </a:lnTo>
+                <a:lnTo>
+                  <a:pt x="3946780" y="250117"/>
+                </a:lnTo>
+                <a:lnTo>
+                  <a:pt x="4092855" y="248268"/>
+                </a:lnTo>
+                <a:lnTo>
+                  <a:pt x="4240988" y="244234"/>
+                </a:lnTo>
+                <a:lnTo>
+                  <a:pt x="4390492" y="240032"/>
+                </a:lnTo>
+                <a:lnTo>
+                  <a:pt x="4539997" y="235157"/>
+                </a:lnTo>
+                <a:lnTo>
+                  <a:pt x="4690873" y="228266"/>
+                </a:lnTo>
+                <a:lnTo>
+                  <a:pt x="4843120" y="220029"/>
+                </a:lnTo>
+                <a:lnTo>
+                  <a:pt x="4996054" y="212129"/>
+                </a:lnTo>
+                <a:lnTo>
+                  <a:pt x="5148987" y="202044"/>
+                </a:lnTo>
+                <a:lnTo>
+                  <a:pt x="5303978" y="189941"/>
+                </a:lnTo>
+                <a:lnTo>
+                  <a:pt x="5456911" y="177839"/>
+                </a:lnTo>
+                <a:lnTo>
+                  <a:pt x="5612588" y="163887"/>
+                </a:lnTo>
+                <a:lnTo>
+                  <a:pt x="5768950" y="148591"/>
+                </a:lnTo>
+                <a:lnTo>
+                  <a:pt x="5923255" y="132455"/>
+                </a:lnTo>
+                <a:lnTo>
+                  <a:pt x="6079618" y="113629"/>
+                </a:lnTo>
+                <a:lnTo>
+                  <a:pt x="6235294" y="93458"/>
+                </a:lnTo>
+                <a:lnTo>
+                  <a:pt x="6391657" y="73455"/>
+                </a:lnTo>
+                <a:lnTo>
+                  <a:pt x="6547333" y="50091"/>
+                </a:lnTo>
+                <a:lnTo>
+                  <a:pt x="6702324" y="26222"/>
                 </a:lnTo>
                 <a:close/>
               </a:path>
@@ -7513,37 +8019,57 @@
             <a:noFill/>
           </a:ln>
         </p:spPr>
-        <p:style>
-          <a:lnRef idx="2">
-            <a:schemeClr val="accent1">
-              <a:shade val="50000"/>
-            </a:schemeClr>
-          </a:lnRef>
-          <a:fillRef idx="1003">
-            <a:schemeClr val="dk2"/>
-          </a:fillRef>
-          <a:effectRef idx="0">
-            <a:schemeClr val="accent1"/>
-          </a:effectRef>
-          <a:fontRef idx="minor">
-            <a:schemeClr val="lt1"/>
-          </a:fontRef>
-        </p:style>
-        <p:txBody>
-          <a:bodyPr rtlCol="0" anchor="ctr"/>
+        <p:txBody>
+          <a:bodyPr/>
           <a:lstStyle/>
           <a:p>
-            <a:pPr algn="ctr"/>
-            <a:endParaRPr lang="en-US"/>
-          </a:p>
-        </p:txBody>
-      </p:sp>
-      <p:sp>
-        <p:nvSpPr>
-          <p:cNvPr id="15" name="Rectangle 14">
+            <a:endParaRPr lang="es-ES"/>
+          </a:p>
+        </p:txBody>
+      </p:sp>
+      <p:pic>
+        <p:nvPicPr>
+          <p:cNvPr id="7" name="Marcador de contenido 6">
             <a:extLst>
               <a:ext uri="{FF2B5EF4-FFF2-40B4-BE49-F238E27FC236}">
-                <a16:creationId xmlns:a16="http://schemas.microsoft.com/office/drawing/2014/main" id="{0BA768A8-4FED-4ED8-9E46-6BE72188ECD2}"/>
+                <a16:creationId xmlns:a16="http://schemas.microsoft.com/office/drawing/2014/main" id="{978A56BC-EF1F-8538-4FCA-8132143BE9AF}"/>
+              </a:ext>
+            </a:extLst>
+          </p:cNvPr>
+          <p:cNvPicPr>
+            <a:picLocks noChangeAspect="1"/>
+          </p:cNvPicPr>
+          <p:nvPr/>
+        </p:nvPicPr>
+        <p:blipFill>
+          <a:blip r:embed="rId2">
+            <a:extLst>
+              <a:ext uri="{28A0092B-C50C-407E-A947-70E740481C1C}">
+                <a14:useLocalDpi xmlns:a14="http://schemas.microsoft.com/office/drawing/2010/main" val="0"/>
+              </a:ext>
+            </a:extLst>
+          </a:blip>
+          <a:stretch>
+            <a:fillRect/>
+          </a:stretch>
+        </p:blipFill>
+        <p:spPr>
+          <a:xfrm>
+            <a:off x="8129871" y="1408874"/>
+            <a:ext cx="3414010" cy="4040249"/>
+          </a:xfrm>
+          <a:prstGeom prst="rect">
+            <a:avLst/>
+          </a:prstGeom>
+          <a:effectLst/>
+        </p:spPr>
+      </p:pic>
+      <p:sp>
+        <p:nvSpPr>
+          <p:cNvPr id="31" name="Rectangle 30">
+            <a:extLst>
+              <a:ext uri="{FF2B5EF4-FFF2-40B4-BE49-F238E27FC236}">
+                <a16:creationId xmlns:a16="http://schemas.microsoft.com/office/drawing/2014/main" id="{D6F18ACE-6E82-4ADC-8A2F-A1771B309B16}"/>
               </a:ext>
               <a:ext uri="{C183D7F6-B498-43B3-948B-1728B52AA6E4}">
                 <adec:decorative xmlns:adec="http://schemas.microsoft.com/office/drawing/2017/decorative" val="1"/>
@@ -7563,7 +8089,7 @@
         </p:nvSpPr>
         <p:spPr>
           <a:xfrm>
-            <a:off x="10437812" y="0"/>
+            <a:off x="10442448" y="0"/>
             <a:ext cx="685800" cy="1143000"/>
           </a:xfrm>
           <a:prstGeom prst="rect">
@@ -7600,10 +8126,10 @@
       </p:sp>
       <p:sp>
         <p:nvSpPr>
-          <p:cNvPr id="4" name="Marcador de número de diapositiva 3">
+          <p:cNvPr id="5" name="Marcador de número de diapositiva 4">
             <a:extLst>
               <a:ext uri="{FF2B5EF4-FFF2-40B4-BE49-F238E27FC236}">
-                <a16:creationId xmlns:a16="http://schemas.microsoft.com/office/drawing/2014/main" id="{0B5FA015-940B-1D6D-DCA1-0E52705E5382}"/>
+                <a16:creationId xmlns:a16="http://schemas.microsoft.com/office/drawing/2014/main" id="{B7ECE9DD-0011-C742-C739-50D4DA29881D}"/>
               </a:ext>
             </a:extLst>
           </p:cNvPr>
@@ -7642,7 +8168,7 @@
                   <a:spcPts val="600"/>
                 </a:spcAft>
               </a:pPr>
-              <a:t>10</a:t>
+              <a:t>4</a:t>
             </a:fld>
             <a:endParaRPr lang="es-ES">
               <a:solidFill>
@@ -7654,10 +8180,10 @@
       </p:sp>
       <p:sp>
         <p:nvSpPr>
-          <p:cNvPr id="2" name="Título 1">
+          <p:cNvPr id="11" name="Content Placeholder 10">
             <a:extLst>
               <a:ext uri="{FF2B5EF4-FFF2-40B4-BE49-F238E27FC236}">
-                <a16:creationId xmlns:a16="http://schemas.microsoft.com/office/drawing/2014/main" id="{A3A660C6-ABA4-D591-3502-B368A16BEB7E}"/>
+                <a16:creationId xmlns:a16="http://schemas.microsoft.com/office/drawing/2014/main" id="{FE70A74E-5A00-6D9D-1773-81A16CA60224}"/>
               </a:ext>
             </a:extLst>
           </p:cNvPr>
@@ -7665,13 +8191,13 @@
             <a:spLocks noGrp="1"/>
           </p:cNvSpPr>
           <p:nvPr>
-            <p:ph type="title"/>
+            <p:ph idx="1"/>
           </p:nvPr>
         </p:nvSpPr>
         <p:spPr>
           <a:xfrm>
-            <a:off x="653143" y="1645920"/>
-            <a:ext cx="3522879" cy="4470821"/>
+            <a:off x="648930" y="2438400"/>
+            <a:ext cx="6188189" cy="3785419"/>
           </a:xfrm>
         </p:spPr>
         <p:txBody>
@@ -7680,24 +8206,340 @@
           </a:bodyPr>
           <a:lstStyle/>
           <a:p>
-            <a:pPr algn="r"/>
-            <a:r>
-              <a:rPr lang="es-ES" dirty="0">
+            <a:pPr marL="457200" indent="-457200">
+              <a:buFont typeface="+mj-lt"/>
+              <a:buAutoNum type="arabicPeriod"/>
+            </a:pPr>
+            <a:r>
+              <a:rPr lang="en-US" dirty="0">
                 <a:solidFill>
                   <a:srgbClr val="FFFFFF"/>
                 </a:solidFill>
               </a:rPr>
-              <a:t>Código no probado ADC</a:t>
-            </a:r>
-          </a:p>
-        </p:txBody>
-      </p:sp>
-      <p:sp>
-        <p:nvSpPr>
-          <p:cNvPr id="3" name="Marcador de contenido 2">
+              <a:t>Envio de </a:t>
+            </a:r>
+            <a:r>
+              <a:rPr lang="en-US" dirty="0" err="1">
+                <a:solidFill>
+                  <a:srgbClr val="FFFFFF"/>
+                </a:solidFill>
+              </a:rPr>
+              <a:t>dato</a:t>
+            </a:r>
+            <a:r>
+              <a:rPr lang="en-US" dirty="0">
+                <a:solidFill>
+                  <a:srgbClr val="FFFFFF"/>
+                </a:solidFill>
+              </a:rPr>
+              <a:t> start </a:t>
+            </a:r>
+            <a:r>
+              <a:rPr lang="en-US" dirty="0" err="1">
+                <a:solidFill>
+                  <a:srgbClr val="FFFFFF"/>
+                </a:solidFill>
+              </a:rPr>
+              <a:t>por</a:t>
+            </a:r>
+            <a:r>
+              <a:rPr lang="en-US" dirty="0">
+                <a:solidFill>
+                  <a:srgbClr val="FFFFFF"/>
+                </a:solidFill>
+              </a:rPr>
+              <a:t> UART</a:t>
+            </a:r>
+          </a:p>
+          <a:p>
+            <a:pPr marL="457200" indent="-457200">
+              <a:buFont typeface="+mj-lt"/>
+              <a:buAutoNum type="arabicPeriod"/>
+            </a:pPr>
+            <a:r>
+              <a:rPr lang="en-US" dirty="0">
+                <a:solidFill>
+                  <a:srgbClr val="FFFFFF"/>
+                </a:solidFill>
+              </a:rPr>
+              <a:t>Timer </a:t>
+            </a:r>
+            <a:r>
+              <a:rPr lang="en-US" dirty="0" err="1">
+                <a:solidFill>
+                  <a:srgbClr val="FFFFFF"/>
+                </a:solidFill>
+              </a:rPr>
+              <a:t>inicia</a:t>
+            </a:r>
+            <a:r>
+              <a:rPr lang="en-US" dirty="0">
+                <a:solidFill>
+                  <a:srgbClr val="FFFFFF"/>
+                </a:solidFill>
+              </a:rPr>
+              <a:t> PC0, </a:t>
+            </a:r>
+            <a:r>
+              <a:rPr lang="en-US" dirty="0" err="1">
+                <a:solidFill>
+                  <a:srgbClr val="FFFFFF"/>
+                </a:solidFill>
+              </a:rPr>
+              <a:t>el</a:t>
+            </a:r>
+            <a:r>
+              <a:rPr lang="en-US" dirty="0">
+                <a:solidFill>
+                  <a:srgbClr val="FFFFFF"/>
+                </a:solidFill>
+              </a:rPr>
+              <a:t> </a:t>
+            </a:r>
+            <a:r>
+              <a:rPr lang="en-US" dirty="0" err="1">
+                <a:solidFill>
+                  <a:srgbClr val="FFFFFF"/>
+                </a:solidFill>
+              </a:rPr>
+              <a:t>cual</a:t>
+            </a:r>
+            <a:r>
+              <a:rPr lang="en-US" dirty="0">
+                <a:solidFill>
+                  <a:srgbClr val="FFFFFF"/>
+                </a:solidFill>
+              </a:rPr>
+              <a:t> </a:t>
+            </a:r>
+            <a:r>
+              <a:rPr lang="en-US" dirty="0" err="1">
+                <a:solidFill>
+                  <a:srgbClr val="FFFFFF"/>
+                </a:solidFill>
+              </a:rPr>
+              <a:t>actua</a:t>
+            </a:r>
+            <a:r>
+              <a:rPr lang="en-US" dirty="0">
+                <a:solidFill>
+                  <a:srgbClr val="FFFFFF"/>
+                </a:solidFill>
+              </a:rPr>
+              <a:t> de trigger para </a:t>
+            </a:r>
+            <a:r>
+              <a:rPr lang="en-US" dirty="0" err="1">
+                <a:solidFill>
+                  <a:srgbClr val="FFFFFF"/>
+                </a:solidFill>
+              </a:rPr>
+              <a:t>iniciar</a:t>
+            </a:r>
+            <a:r>
+              <a:rPr lang="en-US" dirty="0">
+                <a:solidFill>
+                  <a:srgbClr val="FFFFFF"/>
+                </a:solidFill>
+              </a:rPr>
+              <a:t> la forma de </a:t>
+            </a:r>
+            <a:r>
+              <a:rPr lang="en-US" dirty="0" err="1">
+                <a:solidFill>
+                  <a:srgbClr val="FFFFFF"/>
+                </a:solidFill>
+              </a:rPr>
+              <a:t>onda</a:t>
+            </a:r>
+            <a:endParaRPr lang="en-US" dirty="0">
+              <a:solidFill>
+                <a:srgbClr val="FFFFFF"/>
+              </a:solidFill>
+            </a:endParaRPr>
+          </a:p>
+          <a:p>
+            <a:pPr marL="457200" indent="-457200">
+              <a:buFont typeface="+mj-lt"/>
+              <a:buAutoNum type="arabicPeriod"/>
+            </a:pPr>
+            <a:r>
+              <a:rPr lang="en-US" dirty="0">
+                <a:solidFill>
+                  <a:srgbClr val="FFFFFF"/>
+                </a:solidFill>
+              </a:rPr>
+              <a:t>Timer </a:t>
+            </a:r>
+            <a:r>
+              <a:rPr lang="en-US" dirty="0" err="1">
+                <a:solidFill>
+                  <a:srgbClr val="FFFFFF"/>
+                </a:solidFill>
+              </a:rPr>
+              <a:t>inicia</a:t>
+            </a:r>
+            <a:r>
+              <a:rPr lang="en-US" dirty="0">
+                <a:solidFill>
+                  <a:srgbClr val="FFFFFF"/>
+                </a:solidFill>
+              </a:rPr>
+              <a:t> ADC para </a:t>
+            </a:r>
+            <a:r>
+              <a:rPr lang="en-US" dirty="0" err="1">
+                <a:solidFill>
+                  <a:srgbClr val="FFFFFF"/>
+                </a:solidFill>
+              </a:rPr>
+              <a:t>empezar</a:t>
+            </a:r>
+            <a:r>
+              <a:rPr lang="en-US" dirty="0">
+                <a:solidFill>
+                  <a:srgbClr val="FFFFFF"/>
+                </a:solidFill>
+              </a:rPr>
+              <a:t> a </a:t>
+            </a:r>
+            <a:r>
+              <a:rPr lang="en-US" dirty="0" err="1">
+                <a:solidFill>
+                  <a:srgbClr val="FFFFFF"/>
+                </a:solidFill>
+              </a:rPr>
+              <a:t>capturar</a:t>
+            </a:r>
+            <a:r>
+              <a:rPr lang="en-US" dirty="0">
+                <a:solidFill>
+                  <a:srgbClr val="FFFFFF"/>
+                </a:solidFill>
+              </a:rPr>
+              <a:t> </a:t>
+            </a:r>
+            <a:r>
+              <a:rPr lang="en-US" dirty="0" err="1">
+                <a:solidFill>
+                  <a:srgbClr val="FFFFFF"/>
+                </a:solidFill>
+              </a:rPr>
+              <a:t>datos</a:t>
+            </a:r>
+            <a:endParaRPr lang="en-US" dirty="0">
+              <a:solidFill>
+                <a:srgbClr val="FFFFFF"/>
+              </a:solidFill>
+            </a:endParaRPr>
+          </a:p>
+          <a:p>
+            <a:pPr marL="457200" indent="-457200">
+              <a:buFont typeface="+mj-lt"/>
+              <a:buAutoNum type="arabicPeriod"/>
+            </a:pPr>
+            <a:r>
+              <a:rPr lang="en-US" dirty="0" err="1">
+                <a:solidFill>
+                  <a:srgbClr val="FFFFFF"/>
+                </a:solidFill>
+              </a:rPr>
+              <a:t>Términa</a:t>
+            </a:r>
+            <a:r>
+              <a:rPr lang="en-US" dirty="0">
+                <a:solidFill>
+                  <a:srgbClr val="FFFFFF"/>
+                </a:solidFill>
+              </a:rPr>
+              <a:t> la </a:t>
+            </a:r>
+            <a:r>
+              <a:rPr lang="en-US" dirty="0" err="1">
+                <a:solidFill>
+                  <a:srgbClr val="FFFFFF"/>
+                </a:solidFill>
+              </a:rPr>
+              <a:t>medición</a:t>
+            </a:r>
+            <a:r>
+              <a:rPr lang="en-US" dirty="0">
+                <a:solidFill>
+                  <a:srgbClr val="FFFFFF"/>
+                </a:solidFill>
+              </a:rPr>
+              <a:t> y se </a:t>
+            </a:r>
+            <a:r>
+              <a:rPr lang="en-US" dirty="0" err="1">
+                <a:solidFill>
+                  <a:srgbClr val="FFFFFF"/>
+                </a:solidFill>
+              </a:rPr>
+              <a:t>envían</a:t>
+            </a:r>
+            <a:r>
+              <a:rPr lang="en-US" dirty="0">
+                <a:solidFill>
+                  <a:srgbClr val="FFFFFF"/>
+                </a:solidFill>
+              </a:rPr>
+              <a:t> </a:t>
+            </a:r>
+            <a:r>
+              <a:rPr lang="en-US" dirty="0" err="1">
+                <a:solidFill>
+                  <a:srgbClr val="FFFFFF"/>
+                </a:solidFill>
+              </a:rPr>
+              <a:t>datos</a:t>
+            </a:r>
+            <a:r>
+              <a:rPr lang="en-US" dirty="0">
+                <a:solidFill>
+                  <a:srgbClr val="FFFFFF"/>
+                </a:solidFill>
+              </a:rPr>
+              <a:t> </a:t>
+            </a:r>
+            <a:r>
+              <a:rPr lang="en-US" dirty="0" err="1">
+                <a:solidFill>
+                  <a:srgbClr val="FFFFFF"/>
+                </a:solidFill>
+              </a:rPr>
+              <a:t>por</a:t>
+            </a:r>
+            <a:r>
+              <a:rPr lang="en-US" dirty="0">
+                <a:solidFill>
+                  <a:srgbClr val="FFFFFF"/>
+                </a:solidFill>
+              </a:rPr>
+              <a:t> UART para </a:t>
+            </a:r>
+            <a:r>
+              <a:rPr lang="en-US" dirty="0" err="1">
+                <a:solidFill>
+                  <a:srgbClr val="FFFFFF"/>
+                </a:solidFill>
+              </a:rPr>
+              <a:t>procesado</a:t>
+            </a:r>
+            <a:endParaRPr lang="en-US" dirty="0">
+              <a:solidFill>
+                <a:srgbClr val="FFFFFF"/>
+              </a:solidFill>
+            </a:endParaRPr>
+          </a:p>
+        </p:txBody>
+      </p:sp>
+      <p:sp>
+        <p:nvSpPr>
+          <p:cNvPr id="4" name="Marcador de pie de página 3">
             <a:extLst>
               <a:ext uri="{FF2B5EF4-FFF2-40B4-BE49-F238E27FC236}">
-                <a16:creationId xmlns:a16="http://schemas.microsoft.com/office/drawing/2014/main" id="{83743018-A569-A279-9B2B-B6C49360B055}"/>
+                <a16:creationId xmlns:a16="http://schemas.microsoft.com/office/drawing/2014/main" id="{BA1963FF-19E6-2BB6-671F-595961170D85}"/>
               </a:ext>
             </a:extLst>
           </p:cNvPr>
@@ -7705,13 +8547,13 @@
             <a:spLocks noGrp="1"/>
           </p:cNvSpPr>
           <p:nvPr>
-            <p:ph idx="1"/>
+            <p:ph type="ftr" sz="quarter" idx="11"/>
           </p:nvPr>
         </p:nvSpPr>
         <p:spPr>
           <a:xfrm>
-            <a:off x="5204109" y="1645920"/>
-            <a:ext cx="5919503" cy="4470821"/>
+            <a:off x="636915" y="6355080"/>
+            <a:ext cx="3859795" cy="304801"/>
           </a:xfrm>
         </p:spPr>
         <p:txBody>
@@ -7720,107 +8562,20 @@
           </a:bodyPr>
           <a:lstStyle/>
           <a:p>
-            <a:pPr marL="0" indent="0">
-              <a:buNone/>
-            </a:pPr>
-            <a:endParaRPr lang="es-ES" dirty="0"/>
-          </a:p>
-        </p:txBody>
-      </p:sp>
-      <p:pic>
-        <p:nvPicPr>
-          <p:cNvPr id="8" name="Imagen 7">
-            <a:extLst>
-              <a:ext uri="{FF2B5EF4-FFF2-40B4-BE49-F238E27FC236}">
-                <a16:creationId xmlns:a16="http://schemas.microsoft.com/office/drawing/2014/main" id="{16397848-6E1A-89D3-96CD-FAA16EF0F2B4}"/>
-              </a:ext>
-            </a:extLst>
-          </p:cNvPr>
-          <p:cNvPicPr>
-            <a:picLocks noChangeAspect="1"/>
-          </p:cNvPicPr>
-          <p:nvPr/>
-        </p:nvPicPr>
-        <p:blipFill>
-          <a:blip r:embed="rId2"/>
-          <a:stretch>
-            <a:fillRect/>
-          </a:stretch>
-        </p:blipFill>
-        <p:spPr>
-          <a:xfrm>
-            <a:off x="5297034" y="1450116"/>
-            <a:ext cx="5738357" cy="4519052"/>
-          </a:xfrm>
-          <a:prstGeom prst="rect">
-            <a:avLst/>
-          </a:prstGeom>
-        </p:spPr>
-      </p:pic>
-      <p:sp>
-        <p:nvSpPr>
-          <p:cNvPr id="10" name="CuadroTexto 9">
-            <a:extLst>
-              <a:ext uri="{FF2B5EF4-FFF2-40B4-BE49-F238E27FC236}">
-                <a16:creationId xmlns:a16="http://schemas.microsoft.com/office/drawing/2014/main" id="{F5EE06E9-4F12-3C82-E740-E78F0E230990}"/>
-              </a:ext>
-            </a:extLst>
-          </p:cNvPr>
-          <p:cNvSpPr txBox="1"/>
-          <p:nvPr/>
-        </p:nvSpPr>
-        <p:spPr>
-          <a:xfrm>
-            <a:off x="5200353" y="6116741"/>
-            <a:ext cx="5919503" cy="369332"/>
-          </a:xfrm>
-          <a:prstGeom prst="rect">
-            <a:avLst/>
-          </a:prstGeom>
-          <a:noFill/>
-        </p:spPr>
-        <p:txBody>
-          <a:bodyPr wrap="square" rtlCol="0">
-            <a:spAutoFit/>
-          </a:bodyPr>
-          <a:lstStyle/>
-          <a:p>
-            <a:r>
-              <a:rPr lang="es-ES" dirty="0"/>
-              <a:t> Señal de entrada dada por AD2</a:t>
-            </a:r>
-          </a:p>
-        </p:txBody>
-      </p:sp>
-      <p:sp>
-        <p:nvSpPr>
-          <p:cNvPr id="12" name="Marcador de pie de página 11">
-            <a:extLst>
-              <a:ext uri="{FF2B5EF4-FFF2-40B4-BE49-F238E27FC236}">
-                <a16:creationId xmlns:a16="http://schemas.microsoft.com/office/drawing/2014/main" id="{57DCB20D-7656-8242-3647-72816EF93C8F}"/>
-              </a:ext>
-            </a:extLst>
-          </p:cNvPr>
-          <p:cNvSpPr>
-            <a:spLocks noGrp="1"/>
-          </p:cNvSpPr>
-          <p:nvPr>
-            <p:ph type="ftr" sz="quarter" idx="11"/>
-          </p:nvPr>
-        </p:nvSpPr>
-        <p:spPr/>
-        <p:txBody>
-          <a:bodyPr/>
-          <a:lstStyle/>
-          <a:p>
-            <a:endParaRPr lang="es-ES"/>
+            <a:endParaRPr lang="es-ES">
+              <a:solidFill>
+                <a:srgbClr val="FFFFFF">
+                  <a:alpha val="60000"/>
+                </a:srgbClr>
+              </a:solidFill>
+            </a:endParaRPr>
           </a:p>
         </p:txBody>
       </p:sp>
     </p:spTree>
     <p:extLst>
       <p:ext uri="{BB962C8B-B14F-4D97-AF65-F5344CB8AC3E}">
-        <p14:creationId xmlns:p14="http://schemas.microsoft.com/office/powerpoint/2010/main" val="703871967"/>
+        <p14:creationId xmlns:p14="http://schemas.microsoft.com/office/powerpoint/2010/main" val="1663212239"/>
       </p:ext>
     </p:extLst>
   </p:cSld>
@@ -7830,1089 +8585,30 @@
 </p:sld>
 </file>
 
-<file path=ppt/slides/slide2.xml><?xml version="1.0" encoding="utf-8"?>
-<p:sld xmlns:a="http://schemas.openxmlformats.org/drawingml/2006/main" xmlns:r="http://schemas.openxmlformats.org/officeDocument/2006/relationships" xmlns:p="http://schemas.openxmlformats.org/presentationml/2006/main">
-  <p:cSld>
-    <p:spTree>
-      <p:nvGrpSpPr>
-        <p:cNvPr id="1" name=""/>
-        <p:cNvGrpSpPr/>
-        <p:nvPr/>
-      </p:nvGrpSpPr>
-      <p:grpSpPr>
-        <a:xfrm>
-          <a:off x="0" y="0"/>
-          <a:ext cx="0" cy="0"/>
-          <a:chOff x="0" y="0"/>
-          <a:chExt cx="0" cy="0"/>
-        </a:xfrm>
-      </p:grpSpPr>
-      <p:sp>
-        <p:nvSpPr>
-          <p:cNvPr id="2" name="Título 1">
-            <a:extLst>
-              <a:ext uri="{FF2B5EF4-FFF2-40B4-BE49-F238E27FC236}">
-                <a16:creationId xmlns:a16="http://schemas.microsoft.com/office/drawing/2014/main" id="{EE3CBD45-D414-D162-B961-410B924DAB7D}"/>
-              </a:ext>
-            </a:extLst>
-          </p:cNvPr>
-          <p:cNvSpPr>
-            <a:spLocks noGrp="1"/>
-          </p:cNvSpPr>
-          <p:nvPr>
-            <p:ph type="title"/>
-          </p:nvPr>
-        </p:nvSpPr>
-        <p:spPr/>
-        <p:txBody>
-          <a:bodyPr/>
-          <a:lstStyle/>
-          <a:p>
-            <a:r>
-              <a:rPr lang="es-ES"/>
-              <a:t>Objetivo General</a:t>
-            </a:r>
-            <a:endParaRPr lang="es-ES" dirty="0"/>
-          </a:p>
-        </p:txBody>
-      </p:sp>
-      <p:sp>
-        <p:nvSpPr>
-          <p:cNvPr id="3" name="Marcador de contenido 2">
-            <a:extLst>
-              <a:ext uri="{FF2B5EF4-FFF2-40B4-BE49-F238E27FC236}">
-                <a16:creationId xmlns:a16="http://schemas.microsoft.com/office/drawing/2014/main" id="{F92E922B-3F90-83DE-4C42-543B57B10DF8}"/>
-              </a:ext>
-            </a:extLst>
-          </p:cNvPr>
-          <p:cNvSpPr>
-            <a:spLocks noGrp="1"/>
-          </p:cNvSpPr>
-          <p:nvPr>
-            <p:ph idx="1"/>
-          </p:nvPr>
-        </p:nvSpPr>
-        <p:spPr/>
-        <p:txBody>
-          <a:bodyPr>
-            <a:normAutofit/>
-          </a:bodyPr>
-          <a:lstStyle/>
-          <a:p>
-            <a:r>
-              <a:rPr lang="es-ES" sz="2400" dirty="0"/>
-              <a:t>Validar métricas de desempeño de periféricos análogos de los microcontroladores STM32 l476RG y ESP32 S3 mini</a:t>
-            </a:r>
-          </a:p>
-        </p:txBody>
-      </p:sp>
-      <p:sp>
-        <p:nvSpPr>
-          <p:cNvPr id="4" name="Marcador de número de diapositiva 3">
-            <a:extLst>
-              <a:ext uri="{FF2B5EF4-FFF2-40B4-BE49-F238E27FC236}">
-                <a16:creationId xmlns:a16="http://schemas.microsoft.com/office/drawing/2014/main" id="{6071B0C7-5901-5031-36A8-C793F31531DB}"/>
-              </a:ext>
-            </a:extLst>
-          </p:cNvPr>
-          <p:cNvSpPr>
-            <a:spLocks noGrp="1"/>
-          </p:cNvSpPr>
-          <p:nvPr>
-            <p:ph type="sldNum" sz="quarter" idx="12"/>
-          </p:nvPr>
-        </p:nvSpPr>
-        <p:spPr/>
-        <p:txBody>
-          <a:bodyPr/>
-          <a:lstStyle/>
-          <a:p>
-            <a:fld id="{E725A04B-6C01-430F-BBE6-0BFF217C666F}" type="slidenum">
-              <a:rPr lang="es-ES" smtClean="0"/>
-              <a:t>2</a:t>
-            </a:fld>
-            <a:endParaRPr lang="es-ES"/>
-          </a:p>
-        </p:txBody>
-      </p:sp>
-      <p:sp>
-        <p:nvSpPr>
-          <p:cNvPr id="5" name="Marcador de pie de página 4">
-            <a:extLst>
-              <a:ext uri="{FF2B5EF4-FFF2-40B4-BE49-F238E27FC236}">
-                <a16:creationId xmlns:a16="http://schemas.microsoft.com/office/drawing/2014/main" id="{D8968DD1-EE3B-6005-1EF2-6D727F098B38}"/>
-              </a:ext>
-            </a:extLst>
-          </p:cNvPr>
-          <p:cNvSpPr>
-            <a:spLocks noGrp="1"/>
-          </p:cNvSpPr>
-          <p:nvPr>
-            <p:ph type="ftr" sz="quarter" idx="11"/>
-          </p:nvPr>
-        </p:nvSpPr>
-        <p:spPr/>
-        <p:txBody>
-          <a:bodyPr/>
-          <a:lstStyle/>
-          <a:p>
-            <a:endParaRPr lang="es-ES"/>
-          </a:p>
-        </p:txBody>
-      </p:sp>
-    </p:spTree>
-    <p:extLst>
-      <p:ext uri="{BB962C8B-B14F-4D97-AF65-F5344CB8AC3E}">
-        <p14:creationId xmlns:p14="http://schemas.microsoft.com/office/powerpoint/2010/main" val="3510310545"/>
-      </p:ext>
-    </p:extLst>
-  </p:cSld>
-  <p:clrMapOvr>
-    <a:masterClrMapping/>
-  </p:clrMapOvr>
-</p:sld>
-</file>
-
-<file path=ppt/slides/slide3.xml><?xml version="1.0" encoding="utf-8"?>
-<p:sld xmlns:a="http://schemas.openxmlformats.org/drawingml/2006/main" xmlns:r="http://schemas.openxmlformats.org/officeDocument/2006/relationships" xmlns:p="http://schemas.openxmlformats.org/presentationml/2006/main">
-  <p:cSld>
-    <p:spTree>
-      <p:nvGrpSpPr>
-        <p:cNvPr id="1" name=""/>
-        <p:cNvGrpSpPr/>
-        <p:nvPr/>
-      </p:nvGrpSpPr>
-      <p:grpSpPr>
-        <a:xfrm>
-          <a:off x="0" y="0"/>
-          <a:ext cx="0" cy="0"/>
-          <a:chOff x="0" y="0"/>
-          <a:chExt cx="0" cy="0"/>
-        </a:xfrm>
-      </p:grpSpPr>
-      <p:sp>
-        <p:nvSpPr>
-          <p:cNvPr id="2" name="Título 1">
-            <a:extLst>
-              <a:ext uri="{FF2B5EF4-FFF2-40B4-BE49-F238E27FC236}">
-                <a16:creationId xmlns:a16="http://schemas.microsoft.com/office/drawing/2014/main" id="{961379EA-C185-2BEC-536D-F60FF85E27AF}"/>
-              </a:ext>
-            </a:extLst>
-          </p:cNvPr>
-          <p:cNvSpPr>
-            <a:spLocks noGrp="1"/>
-          </p:cNvSpPr>
-          <p:nvPr>
-            <p:ph type="title"/>
-          </p:nvPr>
-        </p:nvSpPr>
-        <p:spPr/>
-        <p:txBody>
-          <a:bodyPr/>
-          <a:lstStyle/>
-          <a:p>
-            <a:r>
-              <a:rPr lang="es-ES" dirty="0"/>
-              <a:t>Objetivos específicos</a:t>
-            </a:r>
-          </a:p>
-        </p:txBody>
-      </p:sp>
-      <p:sp>
-        <p:nvSpPr>
-          <p:cNvPr id="3" name="Marcador de contenido 2">
-            <a:extLst>
-              <a:ext uri="{FF2B5EF4-FFF2-40B4-BE49-F238E27FC236}">
-                <a16:creationId xmlns:a16="http://schemas.microsoft.com/office/drawing/2014/main" id="{B35CD2E8-12E3-785F-E414-3D85C3753DA0}"/>
-              </a:ext>
-            </a:extLst>
-          </p:cNvPr>
-          <p:cNvSpPr>
-            <a:spLocks noGrp="1"/>
-          </p:cNvSpPr>
-          <p:nvPr>
-            <p:ph idx="1"/>
-          </p:nvPr>
-        </p:nvSpPr>
-        <p:spPr>
-          <a:xfrm>
-            <a:off x="677334" y="2160589"/>
-            <a:ext cx="8596668" cy="2629125"/>
-          </a:xfrm>
-        </p:spPr>
-        <p:txBody>
-          <a:bodyPr>
-            <a:normAutofit/>
-          </a:bodyPr>
-          <a:lstStyle/>
-          <a:p>
-            <a:r>
-              <a:rPr lang="es-ES" sz="2400" dirty="0"/>
-              <a:t>Caracterizar el ADC de la SMT32 L476RG y ESP32 S3 mini</a:t>
-            </a:r>
-          </a:p>
-          <a:p>
-            <a:r>
-              <a:rPr lang="es-ES" sz="2400" dirty="0"/>
-              <a:t>Caracterizar el DAC de la STM32 L476RG y ESP32 S3 mini</a:t>
-            </a:r>
-          </a:p>
-          <a:p>
-            <a:r>
-              <a:rPr lang="es-ES" sz="2400" dirty="0"/>
-              <a:t>Generar tabla comparativa de periféricos análogos entre estos microcontroladores</a:t>
-            </a:r>
-          </a:p>
-        </p:txBody>
-      </p:sp>
-      <p:sp>
-        <p:nvSpPr>
-          <p:cNvPr id="4" name="Marcador de número de diapositiva 3">
-            <a:extLst>
-              <a:ext uri="{FF2B5EF4-FFF2-40B4-BE49-F238E27FC236}">
-                <a16:creationId xmlns:a16="http://schemas.microsoft.com/office/drawing/2014/main" id="{CDA493EF-472F-56C4-85B9-DF4F5D44B403}"/>
-              </a:ext>
-            </a:extLst>
-          </p:cNvPr>
-          <p:cNvSpPr>
-            <a:spLocks noGrp="1"/>
-          </p:cNvSpPr>
-          <p:nvPr>
-            <p:ph type="sldNum" sz="quarter" idx="12"/>
-          </p:nvPr>
-        </p:nvSpPr>
-        <p:spPr/>
-        <p:txBody>
-          <a:bodyPr/>
-          <a:lstStyle/>
-          <a:p>
-            <a:fld id="{E725A04B-6C01-430F-BBE6-0BFF217C666F}" type="slidenum">
-              <a:rPr lang="es-ES" smtClean="0"/>
-              <a:t>3</a:t>
-            </a:fld>
-            <a:endParaRPr lang="es-ES"/>
-          </a:p>
-        </p:txBody>
-      </p:sp>
-      <p:sp>
-        <p:nvSpPr>
-          <p:cNvPr id="5" name="Marcador de pie de página 4">
-            <a:extLst>
-              <a:ext uri="{FF2B5EF4-FFF2-40B4-BE49-F238E27FC236}">
-                <a16:creationId xmlns:a16="http://schemas.microsoft.com/office/drawing/2014/main" id="{642FA5DB-F33F-A69D-3A6C-4FEF5780A4AA}"/>
-              </a:ext>
-            </a:extLst>
-          </p:cNvPr>
-          <p:cNvSpPr>
-            <a:spLocks noGrp="1"/>
-          </p:cNvSpPr>
-          <p:nvPr>
-            <p:ph type="ftr" sz="quarter" idx="11"/>
-          </p:nvPr>
-        </p:nvSpPr>
-        <p:spPr/>
-        <p:txBody>
-          <a:bodyPr/>
-          <a:lstStyle/>
-          <a:p>
-            <a:endParaRPr lang="es-ES"/>
-          </a:p>
-        </p:txBody>
-      </p:sp>
-    </p:spTree>
-    <p:extLst>
-      <p:ext uri="{BB962C8B-B14F-4D97-AF65-F5344CB8AC3E}">
-        <p14:creationId xmlns:p14="http://schemas.microsoft.com/office/powerpoint/2010/main" val="3178295506"/>
-      </p:ext>
-    </p:extLst>
-  </p:cSld>
-  <p:clrMapOvr>
-    <a:masterClrMapping/>
-  </p:clrMapOvr>
-</p:sld>
-</file>
-
-<file path=ppt/slides/slide4.xml><?xml version="1.0" encoding="utf-8"?>
-<p:sld xmlns:a="http://schemas.openxmlformats.org/drawingml/2006/main" xmlns:r="http://schemas.openxmlformats.org/officeDocument/2006/relationships" xmlns:p="http://schemas.openxmlformats.org/presentationml/2006/main">
-  <p:cSld>
-    <p:spTree>
-      <p:nvGrpSpPr>
-        <p:cNvPr id="1" name=""/>
-        <p:cNvGrpSpPr/>
-        <p:nvPr/>
-      </p:nvGrpSpPr>
-      <p:grpSpPr>
-        <a:xfrm>
-          <a:off x="0" y="0"/>
-          <a:ext cx="0" cy="0"/>
-          <a:chOff x="0" y="0"/>
-          <a:chExt cx="0" cy="0"/>
-        </a:xfrm>
-      </p:grpSpPr>
-      <p:sp>
-        <p:nvSpPr>
-          <p:cNvPr id="2" name="Título 1">
-            <a:extLst>
-              <a:ext uri="{FF2B5EF4-FFF2-40B4-BE49-F238E27FC236}">
-                <a16:creationId xmlns:a16="http://schemas.microsoft.com/office/drawing/2014/main" id="{4B9C531D-9FB3-F33E-2597-DF8C8F3134C4}"/>
-              </a:ext>
-            </a:extLst>
-          </p:cNvPr>
-          <p:cNvSpPr>
-            <a:spLocks noGrp="1"/>
-          </p:cNvSpPr>
-          <p:nvPr>
-            <p:ph type="title"/>
-          </p:nvPr>
-        </p:nvSpPr>
-        <p:spPr/>
-        <p:txBody>
-          <a:bodyPr/>
-          <a:lstStyle/>
-          <a:p>
-            <a:r>
-              <a:rPr lang="es-ES" dirty="0" err="1"/>
-              <a:t>Analog</a:t>
-            </a:r>
-            <a:r>
-              <a:rPr lang="es-ES" dirty="0"/>
-              <a:t> Discovery 2</a:t>
-            </a:r>
-          </a:p>
-        </p:txBody>
-      </p:sp>
-      <p:sp>
-        <p:nvSpPr>
-          <p:cNvPr id="3" name="Marcador de contenido 2">
-            <a:extLst>
-              <a:ext uri="{FF2B5EF4-FFF2-40B4-BE49-F238E27FC236}">
-                <a16:creationId xmlns:a16="http://schemas.microsoft.com/office/drawing/2014/main" id="{56B49FC1-71E8-C158-8CBC-1BB1859E75B4}"/>
-              </a:ext>
-            </a:extLst>
-          </p:cNvPr>
-          <p:cNvSpPr>
-            <a:spLocks noGrp="1"/>
-          </p:cNvSpPr>
-          <p:nvPr>
-            <p:ph idx="1"/>
-          </p:nvPr>
-        </p:nvSpPr>
-        <p:spPr/>
-        <p:txBody>
-          <a:bodyPr/>
-          <a:lstStyle/>
-          <a:p>
-            <a:r>
-              <a:rPr lang="es-ES" dirty="0" err="1"/>
-              <a:t>Wavegen</a:t>
-            </a:r>
-            <a:r>
-              <a:rPr lang="es-ES" dirty="0"/>
-              <a:t> offset =  4,6mV (sin considerar offset del </a:t>
-            </a:r>
-            <a:r>
-              <a:rPr lang="es-ES" dirty="0" err="1"/>
-              <a:t>scope</a:t>
-            </a:r>
-            <a:r>
-              <a:rPr lang="es-ES" dirty="0"/>
-              <a:t>)</a:t>
-            </a:r>
-          </a:p>
-          <a:p>
-            <a:r>
-              <a:rPr lang="es-ES" dirty="0"/>
-              <a:t>Scope offset = -900µV (4LSB de sus 14  bits)</a:t>
-            </a:r>
-          </a:p>
-        </p:txBody>
-      </p:sp>
-      <p:sp>
-        <p:nvSpPr>
-          <p:cNvPr id="4" name="Marcador de pie de página 3">
-            <a:extLst>
-              <a:ext uri="{FF2B5EF4-FFF2-40B4-BE49-F238E27FC236}">
-                <a16:creationId xmlns:a16="http://schemas.microsoft.com/office/drawing/2014/main" id="{4CADADBA-9CE7-A1F7-ED29-28977AC112E6}"/>
-              </a:ext>
-            </a:extLst>
-          </p:cNvPr>
-          <p:cNvSpPr>
-            <a:spLocks noGrp="1"/>
-          </p:cNvSpPr>
-          <p:nvPr>
-            <p:ph type="ftr" sz="quarter" idx="11"/>
-          </p:nvPr>
-        </p:nvSpPr>
-        <p:spPr/>
-        <p:txBody>
-          <a:bodyPr/>
-          <a:lstStyle/>
-          <a:p>
-            <a:endParaRPr lang="es-ES"/>
-          </a:p>
-        </p:txBody>
-      </p:sp>
-      <p:sp>
-        <p:nvSpPr>
-          <p:cNvPr id="5" name="Marcador de número de diapositiva 4">
-            <a:extLst>
-              <a:ext uri="{FF2B5EF4-FFF2-40B4-BE49-F238E27FC236}">
-                <a16:creationId xmlns:a16="http://schemas.microsoft.com/office/drawing/2014/main" id="{91DAA484-DA2D-536E-C9ED-2ECB3D2543D2}"/>
-              </a:ext>
-            </a:extLst>
-          </p:cNvPr>
-          <p:cNvSpPr>
-            <a:spLocks noGrp="1"/>
-          </p:cNvSpPr>
-          <p:nvPr>
-            <p:ph type="sldNum" sz="quarter" idx="12"/>
-          </p:nvPr>
-        </p:nvSpPr>
-        <p:spPr/>
-        <p:txBody>
-          <a:bodyPr/>
-          <a:lstStyle/>
-          <a:p>
-            <a:fld id="{E725A04B-6C01-430F-BBE6-0BFF217C666F}" type="slidenum">
-              <a:rPr lang="es-ES" smtClean="0"/>
-              <a:t>4</a:t>
-            </a:fld>
-            <a:endParaRPr lang="es-ES"/>
-          </a:p>
-        </p:txBody>
-      </p:sp>
-    </p:spTree>
-    <p:extLst>
-      <p:ext uri="{BB962C8B-B14F-4D97-AF65-F5344CB8AC3E}">
-        <p14:creationId xmlns:p14="http://schemas.microsoft.com/office/powerpoint/2010/main" val="775836065"/>
-      </p:ext>
-    </p:extLst>
-  </p:cSld>
-  <p:clrMapOvr>
-    <a:masterClrMapping/>
-  </p:clrMapOvr>
-</p:sld>
-</file>
-
 <file path=ppt/slides/slide5.xml><?xml version="1.0" encoding="utf-8"?>
-<p:sld xmlns:a="http://schemas.openxmlformats.org/drawingml/2006/main" xmlns:r="http://schemas.openxmlformats.org/officeDocument/2006/relationships" xmlns:p="http://schemas.openxmlformats.org/presentationml/2006/main">
-  <p:cSld>
-    <p:spTree>
-      <p:nvGrpSpPr>
-        <p:cNvPr id="1" name=""/>
-        <p:cNvGrpSpPr/>
-        <p:nvPr/>
-      </p:nvGrpSpPr>
-      <p:grpSpPr>
-        <a:xfrm>
-          <a:off x="0" y="0"/>
-          <a:ext cx="0" cy="0"/>
-          <a:chOff x="0" y="0"/>
-          <a:chExt cx="0" cy="0"/>
-        </a:xfrm>
-      </p:grpSpPr>
-      <p:sp>
-        <p:nvSpPr>
-          <p:cNvPr id="2" name="Título 1">
-            <a:extLst>
-              <a:ext uri="{FF2B5EF4-FFF2-40B4-BE49-F238E27FC236}">
-                <a16:creationId xmlns:a16="http://schemas.microsoft.com/office/drawing/2014/main" id="{5E46F7BE-B250-F7C6-8165-11708767D13A}"/>
-              </a:ext>
-            </a:extLst>
-          </p:cNvPr>
-          <p:cNvSpPr>
-            <a:spLocks noGrp="1"/>
-          </p:cNvSpPr>
-          <p:nvPr>
-            <p:ph type="title"/>
-          </p:nvPr>
-        </p:nvSpPr>
-        <p:spPr/>
-        <p:txBody>
-          <a:bodyPr/>
-          <a:lstStyle/>
-          <a:p>
-            <a:r>
-              <a:rPr lang="es-ES" dirty="0"/>
-              <a:t>Métricas obtenidas DAC STM</a:t>
-            </a:r>
-          </a:p>
-        </p:txBody>
-      </p:sp>
-      <p:sp>
-        <p:nvSpPr>
-          <p:cNvPr id="3" name="Marcador de contenido 2">
-            <a:extLst>
-              <a:ext uri="{FF2B5EF4-FFF2-40B4-BE49-F238E27FC236}">
-                <a16:creationId xmlns:a16="http://schemas.microsoft.com/office/drawing/2014/main" id="{F0FF0390-46AF-10C0-0B7D-9CE354F09470}"/>
-              </a:ext>
-            </a:extLst>
-          </p:cNvPr>
-          <p:cNvSpPr>
-            <a:spLocks noGrp="1"/>
-          </p:cNvSpPr>
-          <p:nvPr>
-            <p:ph idx="1"/>
-          </p:nvPr>
-        </p:nvSpPr>
-        <p:spPr/>
-        <p:txBody>
-          <a:bodyPr/>
-          <a:lstStyle/>
-          <a:p>
-            <a:endParaRPr lang="es-ES" dirty="0"/>
-          </a:p>
-        </p:txBody>
-      </p:sp>
-      <p:sp>
-        <p:nvSpPr>
-          <p:cNvPr id="4" name="Marcador de número de diapositiva 3">
-            <a:extLst>
-              <a:ext uri="{FF2B5EF4-FFF2-40B4-BE49-F238E27FC236}">
-                <a16:creationId xmlns:a16="http://schemas.microsoft.com/office/drawing/2014/main" id="{2343B38D-E440-3D3A-7917-EFEB1C821F02}"/>
-              </a:ext>
-            </a:extLst>
-          </p:cNvPr>
-          <p:cNvSpPr>
-            <a:spLocks noGrp="1"/>
-          </p:cNvSpPr>
-          <p:nvPr>
-            <p:ph type="sldNum" sz="quarter" idx="12"/>
-          </p:nvPr>
-        </p:nvSpPr>
-        <p:spPr/>
-        <p:txBody>
-          <a:bodyPr/>
-          <a:lstStyle/>
-          <a:p>
-            <a:fld id="{E725A04B-6C01-430F-BBE6-0BFF217C666F}" type="slidenum">
-              <a:rPr lang="es-ES" smtClean="0"/>
-              <a:t>5</a:t>
-            </a:fld>
-            <a:endParaRPr lang="es-ES"/>
-          </a:p>
-        </p:txBody>
-      </p:sp>
-      <p:sp>
-        <p:nvSpPr>
-          <p:cNvPr id="5" name="CuadroTexto 4">
-            <a:extLst>
-              <a:ext uri="{FF2B5EF4-FFF2-40B4-BE49-F238E27FC236}">
-                <a16:creationId xmlns:a16="http://schemas.microsoft.com/office/drawing/2014/main" id="{A0E4F287-C6C8-C699-13FE-89BD00DAB5E2}"/>
-              </a:ext>
-            </a:extLst>
-          </p:cNvPr>
-          <p:cNvSpPr txBox="1"/>
-          <p:nvPr/>
-        </p:nvSpPr>
-        <p:spPr>
-          <a:xfrm>
-            <a:off x="650239" y="6441440"/>
-            <a:ext cx="9111827" cy="307777"/>
-          </a:xfrm>
-          <a:prstGeom prst="rect">
-            <a:avLst/>
-          </a:prstGeom>
-          <a:noFill/>
-        </p:spPr>
-        <p:txBody>
-          <a:bodyPr wrap="square" rtlCol="0">
-            <a:spAutoFit/>
-          </a:bodyPr>
-          <a:lstStyle/>
-          <a:p>
-            <a:r>
-              <a:rPr lang="es-ES" sz="1400" dirty="0"/>
-              <a:t>Imagen sacada de https://www.wemos.cc/en/latest/s3/s3_mini.html</a:t>
-            </a:r>
-          </a:p>
-        </p:txBody>
-      </p:sp>
-      <p:sp>
-        <p:nvSpPr>
-          <p:cNvPr id="6" name="Marcador de pie de página 5">
-            <a:extLst>
-              <a:ext uri="{FF2B5EF4-FFF2-40B4-BE49-F238E27FC236}">
-                <a16:creationId xmlns:a16="http://schemas.microsoft.com/office/drawing/2014/main" id="{1F13C552-C699-1B9F-75DB-02639A8007FE}"/>
-              </a:ext>
-            </a:extLst>
-          </p:cNvPr>
-          <p:cNvSpPr>
-            <a:spLocks noGrp="1"/>
-          </p:cNvSpPr>
-          <p:nvPr>
-            <p:ph type="ftr" sz="quarter" idx="11"/>
-          </p:nvPr>
-        </p:nvSpPr>
-        <p:spPr/>
-        <p:txBody>
-          <a:bodyPr/>
-          <a:lstStyle/>
-          <a:p>
-            <a:endParaRPr lang="es-ES"/>
-          </a:p>
-        </p:txBody>
-      </p:sp>
-    </p:spTree>
-    <p:extLst>
-      <p:ext uri="{BB962C8B-B14F-4D97-AF65-F5344CB8AC3E}">
-        <p14:creationId xmlns:p14="http://schemas.microsoft.com/office/powerpoint/2010/main" val="457395567"/>
-      </p:ext>
-    </p:extLst>
-  </p:cSld>
-  <p:clrMapOvr>
-    <a:masterClrMapping/>
-  </p:clrMapOvr>
-</p:sld>
-</file>
-
-<file path=ppt/slides/slide6.xml><?xml version="1.0" encoding="utf-8"?>
-<p:sld xmlns:a="http://schemas.openxmlformats.org/drawingml/2006/main" xmlns:r="http://schemas.openxmlformats.org/officeDocument/2006/relationships" xmlns:p="http://schemas.openxmlformats.org/presentationml/2006/main">
-  <p:cSld>
-    <p:spTree>
-      <p:nvGrpSpPr>
-        <p:cNvPr id="1" name=""/>
-        <p:cNvGrpSpPr/>
-        <p:nvPr/>
-      </p:nvGrpSpPr>
-      <p:grpSpPr>
-        <a:xfrm>
-          <a:off x="0" y="0"/>
-          <a:ext cx="0" cy="0"/>
-          <a:chOff x="0" y="0"/>
-          <a:chExt cx="0" cy="0"/>
-        </a:xfrm>
-      </p:grpSpPr>
-      <p:sp>
-        <p:nvSpPr>
-          <p:cNvPr id="2" name="Título 1">
-            <a:extLst>
-              <a:ext uri="{FF2B5EF4-FFF2-40B4-BE49-F238E27FC236}">
-                <a16:creationId xmlns:a16="http://schemas.microsoft.com/office/drawing/2014/main" id="{9878FCEF-8711-DFBA-306F-BB3C84E7AE82}"/>
-              </a:ext>
-            </a:extLst>
-          </p:cNvPr>
-          <p:cNvSpPr>
-            <a:spLocks noGrp="1"/>
-          </p:cNvSpPr>
-          <p:nvPr>
-            <p:ph type="title"/>
-          </p:nvPr>
-        </p:nvSpPr>
-        <p:spPr/>
-        <p:txBody>
-          <a:bodyPr/>
-          <a:lstStyle/>
-          <a:p>
-            <a:r>
-              <a:rPr lang="es-ES" dirty="0"/>
-              <a:t>Métricas obtenidas ADC STM</a:t>
-            </a:r>
-          </a:p>
-        </p:txBody>
-      </p:sp>
-      <p:sp>
-        <p:nvSpPr>
-          <p:cNvPr id="3" name="Marcador de contenido 2">
-            <a:extLst>
-              <a:ext uri="{FF2B5EF4-FFF2-40B4-BE49-F238E27FC236}">
-                <a16:creationId xmlns:a16="http://schemas.microsoft.com/office/drawing/2014/main" id="{49002DD3-36D8-B9EF-BBA6-EB66D322B7A1}"/>
-              </a:ext>
-            </a:extLst>
-          </p:cNvPr>
-          <p:cNvSpPr>
-            <a:spLocks noGrp="1"/>
-          </p:cNvSpPr>
-          <p:nvPr>
-            <p:ph idx="1"/>
-          </p:nvPr>
-        </p:nvSpPr>
-        <p:spPr/>
-        <p:txBody>
-          <a:bodyPr/>
-          <a:lstStyle/>
-          <a:p>
-            <a:endParaRPr lang="es-ES" dirty="0"/>
-          </a:p>
-        </p:txBody>
-      </p:sp>
-      <p:sp>
-        <p:nvSpPr>
-          <p:cNvPr id="4" name="Marcador de número de diapositiva 3">
-            <a:extLst>
-              <a:ext uri="{FF2B5EF4-FFF2-40B4-BE49-F238E27FC236}">
-                <a16:creationId xmlns:a16="http://schemas.microsoft.com/office/drawing/2014/main" id="{BC0CD45E-B865-011A-79FE-D62613981CAA}"/>
-              </a:ext>
-            </a:extLst>
-          </p:cNvPr>
-          <p:cNvSpPr>
-            <a:spLocks noGrp="1"/>
-          </p:cNvSpPr>
-          <p:nvPr>
-            <p:ph type="sldNum" sz="quarter" idx="12"/>
-          </p:nvPr>
-        </p:nvSpPr>
-        <p:spPr/>
-        <p:txBody>
-          <a:bodyPr/>
-          <a:lstStyle/>
-          <a:p>
-            <a:fld id="{E725A04B-6C01-430F-BBE6-0BFF217C666F}" type="slidenum">
-              <a:rPr lang="es-ES" smtClean="0"/>
-              <a:t>6</a:t>
-            </a:fld>
-            <a:endParaRPr lang="es-ES"/>
-          </a:p>
-        </p:txBody>
-      </p:sp>
-      <p:sp>
-        <p:nvSpPr>
-          <p:cNvPr id="5" name="Marcador de pie de página 4">
-            <a:extLst>
-              <a:ext uri="{FF2B5EF4-FFF2-40B4-BE49-F238E27FC236}">
-                <a16:creationId xmlns:a16="http://schemas.microsoft.com/office/drawing/2014/main" id="{C7DE88F8-6861-FB79-C79A-BF4E78215D2E}"/>
-              </a:ext>
-            </a:extLst>
-          </p:cNvPr>
-          <p:cNvSpPr>
-            <a:spLocks noGrp="1"/>
-          </p:cNvSpPr>
-          <p:nvPr>
-            <p:ph type="ftr" sz="quarter" idx="11"/>
-          </p:nvPr>
-        </p:nvSpPr>
-        <p:spPr/>
-        <p:txBody>
-          <a:bodyPr/>
-          <a:lstStyle/>
-          <a:p>
-            <a:endParaRPr lang="es-ES"/>
-          </a:p>
-        </p:txBody>
-      </p:sp>
-    </p:spTree>
-    <p:extLst>
-      <p:ext uri="{BB962C8B-B14F-4D97-AF65-F5344CB8AC3E}">
-        <p14:creationId xmlns:p14="http://schemas.microsoft.com/office/powerpoint/2010/main" val="2699555877"/>
-      </p:ext>
-    </p:extLst>
-  </p:cSld>
-  <p:clrMapOvr>
-    <a:masterClrMapping/>
-  </p:clrMapOvr>
-</p:sld>
-</file>
-
-<file path=ppt/slides/slide7.xml><?xml version="1.0" encoding="utf-8"?>
-<p:sld xmlns:a="http://schemas.openxmlformats.org/drawingml/2006/main" xmlns:r="http://schemas.openxmlformats.org/officeDocument/2006/relationships" xmlns:p="http://schemas.openxmlformats.org/presentationml/2006/main">
-  <p:cSld>
-    <p:spTree>
-      <p:nvGrpSpPr>
-        <p:cNvPr id="1" name=""/>
-        <p:cNvGrpSpPr/>
-        <p:nvPr/>
-      </p:nvGrpSpPr>
-      <p:grpSpPr>
-        <a:xfrm>
-          <a:off x="0" y="0"/>
-          <a:ext cx="0" cy="0"/>
-          <a:chOff x="0" y="0"/>
-          <a:chExt cx="0" cy="0"/>
-        </a:xfrm>
-      </p:grpSpPr>
-      <p:sp>
-        <p:nvSpPr>
-          <p:cNvPr id="2" name="Título 1">
-            <a:extLst>
-              <a:ext uri="{FF2B5EF4-FFF2-40B4-BE49-F238E27FC236}">
-                <a16:creationId xmlns:a16="http://schemas.microsoft.com/office/drawing/2014/main" id="{A2FAF8B6-4F8E-FC44-11C1-C602E9588778}"/>
-              </a:ext>
-            </a:extLst>
-          </p:cNvPr>
-          <p:cNvSpPr>
-            <a:spLocks noGrp="1"/>
-          </p:cNvSpPr>
-          <p:nvPr>
-            <p:ph type="title"/>
-          </p:nvPr>
-        </p:nvSpPr>
-        <p:spPr/>
-        <p:txBody>
-          <a:bodyPr/>
-          <a:lstStyle/>
-          <a:p>
-            <a:r>
-              <a:rPr lang="es-ES" dirty="0"/>
-              <a:t>Métricas obtenidas ADC ESP32</a:t>
-            </a:r>
-          </a:p>
-        </p:txBody>
-      </p:sp>
-      <p:sp>
-        <p:nvSpPr>
-          <p:cNvPr id="3" name="Marcador de contenido 2">
-            <a:extLst>
-              <a:ext uri="{FF2B5EF4-FFF2-40B4-BE49-F238E27FC236}">
-                <a16:creationId xmlns:a16="http://schemas.microsoft.com/office/drawing/2014/main" id="{8AED8453-8D7B-B83A-BB08-EF859B2CD0D1}"/>
-              </a:ext>
-            </a:extLst>
-          </p:cNvPr>
-          <p:cNvSpPr>
-            <a:spLocks noGrp="1"/>
-          </p:cNvSpPr>
-          <p:nvPr>
-            <p:ph idx="1"/>
-          </p:nvPr>
-        </p:nvSpPr>
-        <p:spPr/>
-        <p:txBody>
-          <a:bodyPr/>
-          <a:lstStyle/>
-          <a:p>
-            <a:endParaRPr lang="es-ES" dirty="0"/>
-          </a:p>
-        </p:txBody>
-      </p:sp>
-      <p:sp>
-        <p:nvSpPr>
-          <p:cNvPr id="4" name="Marcador de número de diapositiva 3">
-            <a:extLst>
-              <a:ext uri="{FF2B5EF4-FFF2-40B4-BE49-F238E27FC236}">
-                <a16:creationId xmlns:a16="http://schemas.microsoft.com/office/drawing/2014/main" id="{EC810E01-E273-D031-E8D9-D6E9739DA3A9}"/>
-              </a:ext>
-            </a:extLst>
-          </p:cNvPr>
-          <p:cNvSpPr>
-            <a:spLocks noGrp="1"/>
-          </p:cNvSpPr>
-          <p:nvPr>
-            <p:ph type="sldNum" sz="quarter" idx="12"/>
-          </p:nvPr>
-        </p:nvSpPr>
-        <p:spPr/>
-        <p:txBody>
-          <a:bodyPr/>
-          <a:lstStyle/>
-          <a:p>
-            <a:fld id="{E725A04B-6C01-430F-BBE6-0BFF217C666F}" type="slidenum">
-              <a:rPr lang="es-ES" smtClean="0"/>
-              <a:t>7</a:t>
-            </a:fld>
-            <a:endParaRPr lang="es-ES"/>
-          </a:p>
-        </p:txBody>
-      </p:sp>
-      <p:sp>
-        <p:nvSpPr>
-          <p:cNvPr id="5" name="Marcador de pie de página 4">
-            <a:extLst>
-              <a:ext uri="{FF2B5EF4-FFF2-40B4-BE49-F238E27FC236}">
-                <a16:creationId xmlns:a16="http://schemas.microsoft.com/office/drawing/2014/main" id="{DE3324A9-4C25-B8EB-AEC0-4E2E18C5BD1C}"/>
-              </a:ext>
-            </a:extLst>
-          </p:cNvPr>
-          <p:cNvSpPr>
-            <a:spLocks noGrp="1"/>
-          </p:cNvSpPr>
-          <p:nvPr>
-            <p:ph type="ftr" sz="quarter" idx="11"/>
-          </p:nvPr>
-        </p:nvSpPr>
-        <p:spPr/>
-        <p:txBody>
-          <a:bodyPr/>
-          <a:lstStyle/>
-          <a:p>
-            <a:endParaRPr lang="es-ES"/>
-          </a:p>
-        </p:txBody>
-      </p:sp>
-    </p:spTree>
-    <p:extLst>
-      <p:ext uri="{BB962C8B-B14F-4D97-AF65-F5344CB8AC3E}">
-        <p14:creationId xmlns:p14="http://schemas.microsoft.com/office/powerpoint/2010/main" val="505603952"/>
-      </p:ext>
-    </p:extLst>
-  </p:cSld>
-  <p:clrMapOvr>
-    <a:masterClrMapping/>
-  </p:clrMapOvr>
-</p:sld>
-</file>
-
-<file path=ppt/slides/slide8.xml><?xml version="1.0" encoding="utf-8"?>
-<p:sld xmlns:a="http://schemas.openxmlformats.org/drawingml/2006/main" xmlns:r="http://schemas.openxmlformats.org/officeDocument/2006/relationships" xmlns:p="http://schemas.openxmlformats.org/presentationml/2006/main">
-  <p:cSld>
-    <p:spTree>
-      <p:nvGrpSpPr>
-        <p:cNvPr id="1" name=""/>
-        <p:cNvGrpSpPr/>
-        <p:nvPr/>
-      </p:nvGrpSpPr>
-      <p:grpSpPr>
-        <a:xfrm>
-          <a:off x="0" y="0"/>
-          <a:ext cx="0" cy="0"/>
-          <a:chOff x="0" y="0"/>
-          <a:chExt cx="0" cy="0"/>
-        </a:xfrm>
-      </p:grpSpPr>
-      <p:sp>
-        <p:nvSpPr>
-          <p:cNvPr id="2" name="Título 1">
-            <a:extLst>
-              <a:ext uri="{FF2B5EF4-FFF2-40B4-BE49-F238E27FC236}">
-                <a16:creationId xmlns:a16="http://schemas.microsoft.com/office/drawing/2014/main" id="{982FD4D4-1630-BD6B-986B-4139BF3626BA}"/>
-              </a:ext>
-            </a:extLst>
-          </p:cNvPr>
-          <p:cNvSpPr>
-            <a:spLocks noGrp="1"/>
-          </p:cNvSpPr>
-          <p:nvPr>
-            <p:ph type="title"/>
-          </p:nvPr>
-        </p:nvSpPr>
-        <p:spPr/>
-        <p:txBody>
-          <a:bodyPr/>
-          <a:lstStyle/>
-          <a:p>
-            <a:r>
-              <a:rPr lang="es-ES" dirty="0"/>
-              <a:t>STM32 L476RG</a:t>
-            </a:r>
-          </a:p>
-        </p:txBody>
-      </p:sp>
-      <p:sp>
-        <p:nvSpPr>
-          <p:cNvPr id="3" name="Marcador de contenido 2">
-            <a:extLst>
-              <a:ext uri="{FF2B5EF4-FFF2-40B4-BE49-F238E27FC236}">
-                <a16:creationId xmlns:a16="http://schemas.microsoft.com/office/drawing/2014/main" id="{CE3E2757-F2D6-69A2-97E1-A2E35FB650B3}"/>
-              </a:ext>
-            </a:extLst>
-          </p:cNvPr>
-          <p:cNvSpPr>
-            <a:spLocks noGrp="1"/>
-          </p:cNvSpPr>
-          <p:nvPr>
-            <p:ph idx="1"/>
-          </p:nvPr>
-        </p:nvSpPr>
-        <p:spPr/>
-        <p:txBody>
-          <a:bodyPr/>
-          <a:lstStyle/>
-          <a:p>
-            <a:r>
-              <a:rPr lang="es-ES" dirty="0"/>
-              <a:t>No se lograron obtener las métricas esta semana debido a un error en la tarjeta</a:t>
-            </a:r>
-          </a:p>
-          <a:p>
-            <a:pPr lvl="1"/>
-            <a:r>
-              <a:rPr lang="es-ES" dirty="0"/>
-              <a:t>Se cree que es debido a la modificación accidental del </a:t>
-            </a:r>
-            <a:r>
-              <a:rPr lang="es-ES" dirty="0" err="1"/>
-              <a:t>bootloader</a:t>
-            </a:r>
-            <a:endParaRPr lang="es-ES" dirty="0"/>
-          </a:p>
-          <a:p>
-            <a:pPr lvl="1"/>
-            <a:r>
-              <a:rPr lang="es-ES" dirty="0"/>
-              <a:t>Se probó con código que previamente funcionaba y las interrupciones no funcionaban</a:t>
-            </a:r>
-          </a:p>
-          <a:p>
-            <a:r>
-              <a:rPr lang="es-ES" dirty="0"/>
-              <a:t>De todas formas, para el ADC se hizo código para obtener métricas de ADC y DAC</a:t>
-            </a:r>
-          </a:p>
-        </p:txBody>
-      </p:sp>
-      <p:sp>
-        <p:nvSpPr>
-          <p:cNvPr id="4" name="Marcador de número de diapositiva 3">
-            <a:extLst>
-              <a:ext uri="{FF2B5EF4-FFF2-40B4-BE49-F238E27FC236}">
-                <a16:creationId xmlns:a16="http://schemas.microsoft.com/office/drawing/2014/main" id="{40594688-77A8-CF7D-B7E6-86304696C97D}"/>
-              </a:ext>
-            </a:extLst>
-          </p:cNvPr>
-          <p:cNvSpPr>
-            <a:spLocks noGrp="1"/>
-          </p:cNvSpPr>
-          <p:nvPr>
-            <p:ph type="sldNum" sz="quarter" idx="12"/>
-          </p:nvPr>
-        </p:nvSpPr>
-        <p:spPr/>
-        <p:txBody>
-          <a:bodyPr/>
-          <a:lstStyle/>
-          <a:p>
-            <a:fld id="{E725A04B-6C01-430F-BBE6-0BFF217C666F}" type="slidenum">
-              <a:rPr lang="es-ES" smtClean="0"/>
-              <a:t>8</a:t>
-            </a:fld>
-            <a:endParaRPr lang="es-ES"/>
-          </a:p>
-        </p:txBody>
-      </p:sp>
-      <p:sp>
-        <p:nvSpPr>
-          <p:cNvPr id="5" name="Marcador de pie de página 4">
-            <a:extLst>
-              <a:ext uri="{FF2B5EF4-FFF2-40B4-BE49-F238E27FC236}">
-                <a16:creationId xmlns:a16="http://schemas.microsoft.com/office/drawing/2014/main" id="{EEB44F07-3C2A-B0E4-FB53-62549C39DFE9}"/>
-              </a:ext>
-            </a:extLst>
-          </p:cNvPr>
-          <p:cNvSpPr>
-            <a:spLocks noGrp="1"/>
-          </p:cNvSpPr>
-          <p:nvPr>
-            <p:ph type="ftr" sz="quarter" idx="11"/>
-          </p:nvPr>
-        </p:nvSpPr>
-        <p:spPr/>
-        <p:txBody>
-          <a:bodyPr/>
-          <a:lstStyle/>
-          <a:p>
-            <a:endParaRPr lang="es-ES"/>
-          </a:p>
-        </p:txBody>
-      </p:sp>
-    </p:spTree>
-    <p:extLst>
-      <p:ext uri="{BB962C8B-B14F-4D97-AF65-F5344CB8AC3E}">
-        <p14:creationId xmlns:p14="http://schemas.microsoft.com/office/powerpoint/2010/main" val="3666413951"/>
-      </p:ext>
-    </p:extLst>
-  </p:cSld>
-  <p:clrMapOvr>
-    <a:masterClrMapping/>
-  </p:clrMapOvr>
-</p:sld>
-</file>
-
-<file path=ppt/slides/slide9.xml><?xml version="1.0" encoding="utf-8"?>
 <p:sld xmlns:a="http://schemas.openxmlformats.org/drawingml/2006/main" xmlns:r="http://schemas.openxmlformats.org/officeDocument/2006/relationships" xmlns:p="http://schemas.openxmlformats.org/presentationml/2006/main">
   <p:cSld>
     <p:bg>
       <p:bgPr>
-        <a:solidFill>
-          <a:schemeClr val="bg2"/>
-        </a:solidFill>
+        <a:blipFill rotWithShape="1">
+          <a:blip r:embed="rId2">
+            <a:duotone>
+              <a:schemeClr val="bg2">
+                <a:shade val="69000"/>
+                <a:hueMod val="108000"/>
+                <a:satMod val="164000"/>
+                <a:lumMod val="74000"/>
+              </a:schemeClr>
+              <a:schemeClr val="bg2">
+                <a:tint val="96000"/>
+                <a:hueMod val="88000"/>
+                <a:satMod val="140000"/>
+                <a:lumMod val="132000"/>
+              </a:schemeClr>
+            </a:duotone>
+          </a:blip>
+          <a:stretch/>
+        </a:blipFill>
         <a:effectLst/>
       </p:bgPr>
     </p:bg>
@@ -8930,12 +8626,96 @@
           <a:chExt cx="0" cy="0"/>
         </a:xfrm>
       </p:grpSpPr>
-      <p:sp useBgFill="1">
-        <p:nvSpPr>
-          <p:cNvPr id="9" name="Rectangle 8">
+      <p:sp>
+        <p:nvSpPr>
+          <p:cNvPr id="2" name="Título 1">
             <a:extLst>
               <a:ext uri="{FF2B5EF4-FFF2-40B4-BE49-F238E27FC236}">
-                <a16:creationId xmlns:a16="http://schemas.microsoft.com/office/drawing/2014/main" id="{052BEFF1-896C-45B1-B02C-96A6A1BC389A}"/>
+                <a16:creationId xmlns:a16="http://schemas.microsoft.com/office/drawing/2014/main" id="{9878FCEF-8711-DFBA-306F-BB3C84E7AE82}"/>
+              </a:ext>
+            </a:extLst>
+          </p:cNvPr>
+          <p:cNvSpPr>
+            <a:spLocks noGrp="1"/>
+          </p:cNvSpPr>
+          <p:nvPr>
+            <p:ph type="title"/>
+          </p:nvPr>
+        </p:nvSpPr>
+        <p:spPr>
+          <a:xfrm>
+            <a:off x="648930" y="629266"/>
+            <a:ext cx="3322912" cy="1641987"/>
+          </a:xfrm>
+        </p:spPr>
+        <p:txBody>
+          <a:bodyPr>
+            <a:normAutofit/>
+          </a:bodyPr>
+          <a:lstStyle/>
+          <a:p>
+            <a:pPr>
+              <a:lnSpc>
+                <a:spcPct val="90000"/>
+              </a:lnSpc>
+            </a:pPr>
+            <a:r>
+              <a:rPr lang="es-ES" sz="3600"/>
+              <a:t>Métricas obtenidas ADC STM</a:t>
+            </a:r>
+          </a:p>
+        </p:txBody>
+      </p:sp>
+      <p:pic>
+        <p:nvPicPr>
+          <p:cNvPr id="9" name="Imagen 8">
+            <a:extLst>
+              <a:ext uri="{FF2B5EF4-FFF2-40B4-BE49-F238E27FC236}">
+                <a16:creationId xmlns:a16="http://schemas.microsoft.com/office/drawing/2014/main" id="{35216302-18B6-184F-A745-6FC857675E10}"/>
+              </a:ext>
+            </a:extLst>
+          </p:cNvPr>
+          <p:cNvPicPr>
+            <a:picLocks noChangeAspect="1"/>
+          </p:cNvPicPr>
+          <p:nvPr/>
+        </p:nvPicPr>
+        <p:blipFill>
+          <a:blip r:embed="rId3">
+            <a:extLst>
+              <a:ext uri="{28A0092B-C50C-407E-A947-70E740481C1C}">
+                <a14:useLocalDpi xmlns:a14="http://schemas.microsoft.com/office/drawing/2010/main" val="0"/>
+              </a:ext>
+            </a:extLst>
+          </a:blip>
+          <a:srcRect l="1561" r="6335"/>
+          <a:stretch>
+            <a:fillRect/>
+          </a:stretch>
+        </p:blipFill>
+        <p:spPr>
+          <a:xfrm>
+            <a:off x="4619544" y="609601"/>
+            <a:ext cx="6924756" cy="5638797"/>
+          </a:xfrm>
+          <a:prstGeom prst="rect">
+            <a:avLst/>
+          </a:prstGeom>
+          <a:effectLst>
+            <a:outerShdw blurRad="50800" dist="38100" dir="5400000" algn="t" rotWithShape="0">
+              <a:prstClr val="black">
+                <a:alpha val="43000"/>
+              </a:prstClr>
+            </a:outerShdw>
+          </a:effectLst>
+        </p:spPr>
+      </p:pic>
+      <p:sp>
+        <p:nvSpPr>
+          <p:cNvPr id="30" name="Rectangle 29">
+            <a:extLst>
+              <a:ext uri="{FF2B5EF4-FFF2-40B4-BE49-F238E27FC236}">
+                <a16:creationId xmlns:a16="http://schemas.microsoft.com/office/drawing/2014/main" id="{A93A089E-0A16-452C-B341-0F769780D262}"/>
               </a:ext>
               <a:ext uri="{C183D7F6-B498-43B3-948B-1728B52AA6E4}">
                 <adec:decorative xmlns:adec="http://schemas.microsoft.com/office/drawing/2017/decorative" val="1"/>
@@ -8955,7 +8735,769 @@
         </p:nvSpPr>
         <p:spPr>
           <a:xfrm>
-            <a:off x="1" y="0"/>
+            <a:off x="10442448" y="0"/>
+            <a:ext cx="685800" cy="1143000"/>
+          </a:xfrm>
+          <a:prstGeom prst="rect">
+            <a:avLst/>
+          </a:prstGeom>
+          <a:solidFill>
+            <a:schemeClr val="accent1"/>
+          </a:solidFill>
+          <a:ln>
+            <a:noFill/>
+          </a:ln>
+        </p:spPr>
+        <p:style>
+          <a:lnRef idx="1">
+            <a:schemeClr val="accent1"/>
+          </a:lnRef>
+          <a:fillRef idx="3">
+            <a:schemeClr val="accent1"/>
+          </a:fillRef>
+          <a:effectRef idx="2">
+            <a:schemeClr val="accent1"/>
+          </a:effectRef>
+          <a:fontRef idx="minor">
+            <a:schemeClr val="lt1"/>
+          </a:fontRef>
+        </p:style>
+        <p:txBody>
+          <a:bodyPr/>
+          <a:lstStyle/>
+          <a:p>
+            <a:endParaRPr lang="es-ES"/>
+          </a:p>
+        </p:txBody>
+      </p:sp>
+      <p:sp>
+        <p:nvSpPr>
+          <p:cNvPr id="4" name="Marcador de número de diapositiva 3">
+            <a:extLst>
+              <a:ext uri="{FF2B5EF4-FFF2-40B4-BE49-F238E27FC236}">
+                <a16:creationId xmlns:a16="http://schemas.microsoft.com/office/drawing/2014/main" id="{BC0CD45E-B865-011A-79FE-D62613981CAA}"/>
+              </a:ext>
+            </a:extLst>
+          </p:cNvPr>
+          <p:cNvSpPr>
+            <a:spLocks noGrp="1"/>
+          </p:cNvSpPr>
+          <p:nvPr>
+            <p:ph type="sldNum" sz="quarter" idx="12"/>
+          </p:nvPr>
+        </p:nvSpPr>
+        <p:spPr>
+          <a:xfrm>
+            <a:off x="10352540" y="295729"/>
+            <a:ext cx="838199" cy="767687"/>
+          </a:xfrm>
+        </p:spPr>
+        <p:txBody>
+          <a:bodyPr>
+            <a:normAutofit/>
+          </a:bodyPr>
+          <a:lstStyle/>
+          <a:p>
+            <a:pPr>
+              <a:spcAft>
+                <a:spcPts val="600"/>
+              </a:spcAft>
+            </a:pPr>
+            <a:fld id="{E725A04B-6C01-430F-BBE6-0BFF217C666F}" type="slidenum">
+              <a:rPr lang="es-ES"/>
+              <a:pPr>
+                <a:spcAft>
+                  <a:spcPts val="600"/>
+                </a:spcAft>
+              </a:pPr>
+              <a:t>5</a:t>
+            </a:fld>
+            <a:endParaRPr lang="es-ES"/>
+          </a:p>
+        </p:txBody>
+      </p:sp>
+      <p:sp>
+        <p:nvSpPr>
+          <p:cNvPr id="3" name="Marcador de contenido 2">
+            <a:extLst>
+              <a:ext uri="{FF2B5EF4-FFF2-40B4-BE49-F238E27FC236}">
+                <a16:creationId xmlns:a16="http://schemas.microsoft.com/office/drawing/2014/main" id="{49002DD3-36D8-B9EF-BBA6-EB66D322B7A1}"/>
+              </a:ext>
+            </a:extLst>
+          </p:cNvPr>
+          <p:cNvSpPr>
+            <a:spLocks noGrp="1"/>
+          </p:cNvSpPr>
+          <p:nvPr>
+            <p:ph idx="1"/>
+          </p:nvPr>
+        </p:nvSpPr>
+        <p:spPr>
+          <a:xfrm>
+            <a:off x="647701" y="2438401"/>
+            <a:ext cx="3324141" cy="3809998"/>
+          </a:xfrm>
+        </p:spPr>
+        <p:txBody>
+          <a:bodyPr>
+            <a:normAutofit/>
+          </a:bodyPr>
+          <a:lstStyle/>
+          <a:p>
+            <a:pPr marL="0" indent="0">
+              <a:buNone/>
+            </a:pPr>
+            <a:r>
+              <a:rPr lang="es-ES" dirty="0"/>
+              <a:t>Obtención mediante histograma y regresión lineal en Python.</a:t>
+            </a:r>
+          </a:p>
+          <a:p>
+            <a:pPr marL="0" indent="0">
+              <a:buNone/>
+            </a:pPr>
+            <a:r>
+              <a:rPr lang="es-ES" dirty="0"/>
+              <a:t>Se utiliza señal de </a:t>
+            </a:r>
+            <a:r>
+              <a:rPr lang="es-ES" dirty="0" err="1"/>
+              <a:t>trigger</a:t>
+            </a:r>
+            <a:r>
+              <a:rPr lang="es-ES" dirty="0"/>
+              <a:t> para iniciar rampa de frecuencia 0.1Hz</a:t>
+            </a:r>
+          </a:p>
+          <a:p>
+            <a:pPr marL="0" indent="0">
+              <a:buNone/>
+            </a:pPr>
+            <a:r>
+              <a:rPr lang="es-ES" dirty="0"/>
+              <a:t>Frecuencia de muestreo utilizada del ADC = 4kHz</a:t>
+            </a:r>
+          </a:p>
+          <a:p>
+            <a:pPr marL="0" indent="0">
+              <a:buNone/>
+            </a:pPr>
+            <a:endParaRPr lang="es-ES" dirty="0"/>
+          </a:p>
+          <a:p>
+            <a:pPr marL="0" indent="0">
+              <a:buNone/>
+            </a:pPr>
+            <a:endParaRPr lang="es-ES" dirty="0"/>
+          </a:p>
+        </p:txBody>
+      </p:sp>
+      <p:sp>
+        <p:nvSpPr>
+          <p:cNvPr id="5" name="Marcador de pie de página 4">
+            <a:extLst>
+              <a:ext uri="{FF2B5EF4-FFF2-40B4-BE49-F238E27FC236}">
+                <a16:creationId xmlns:a16="http://schemas.microsoft.com/office/drawing/2014/main" id="{C7DE88F8-6861-FB79-C79A-BF4E78215D2E}"/>
+              </a:ext>
+            </a:extLst>
+          </p:cNvPr>
+          <p:cNvSpPr>
+            <a:spLocks noGrp="1"/>
+          </p:cNvSpPr>
+          <p:nvPr>
+            <p:ph type="ftr" sz="quarter" idx="11"/>
+          </p:nvPr>
+        </p:nvSpPr>
+        <p:spPr>
+          <a:xfrm>
+            <a:off x="636915" y="6355080"/>
+            <a:ext cx="3859795" cy="304801"/>
+          </a:xfrm>
+        </p:spPr>
+        <p:txBody>
+          <a:bodyPr>
+            <a:normAutofit/>
+          </a:bodyPr>
+          <a:lstStyle/>
+          <a:p>
+            <a:endParaRPr lang="es-ES"/>
+          </a:p>
+        </p:txBody>
+      </p:sp>
+    </p:spTree>
+    <p:extLst>
+      <p:ext uri="{BB962C8B-B14F-4D97-AF65-F5344CB8AC3E}">
+        <p14:creationId xmlns:p14="http://schemas.microsoft.com/office/powerpoint/2010/main" val="2699555877"/>
+      </p:ext>
+    </p:extLst>
+  </p:cSld>
+  <p:clrMapOvr>
+    <a:masterClrMapping/>
+  </p:clrMapOvr>
+</p:sld>
+</file>
+
+<file path=ppt/slides/slide6.xml><?xml version="1.0" encoding="utf-8"?>
+<p:sld xmlns:a="http://schemas.openxmlformats.org/drawingml/2006/main" xmlns:r="http://schemas.openxmlformats.org/officeDocument/2006/relationships" xmlns:p="http://schemas.openxmlformats.org/presentationml/2006/main">
+  <p:cSld>
+    <p:spTree>
+      <p:nvGrpSpPr>
+        <p:cNvPr id="1" name="">
+          <a:extLst>
+            <a:ext uri="{FF2B5EF4-FFF2-40B4-BE49-F238E27FC236}">
+              <a16:creationId xmlns:a16="http://schemas.microsoft.com/office/drawing/2014/main" id="{6DA55AB8-75E2-D3D1-B2C2-2307EFB62D98}"/>
+            </a:ext>
+          </a:extLst>
+        </p:cNvPr>
+        <p:cNvGrpSpPr/>
+        <p:nvPr/>
+      </p:nvGrpSpPr>
+      <p:grpSpPr>
+        <a:xfrm>
+          <a:off x="0" y="0"/>
+          <a:ext cx="0" cy="0"/>
+          <a:chOff x="0" y="0"/>
+          <a:chExt cx="0" cy="0"/>
+        </a:xfrm>
+      </p:grpSpPr>
+      <p:sp>
+        <p:nvSpPr>
+          <p:cNvPr id="2" name="Título 1">
+            <a:extLst>
+              <a:ext uri="{FF2B5EF4-FFF2-40B4-BE49-F238E27FC236}">
+                <a16:creationId xmlns:a16="http://schemas.microsoft.com/office/drawing/2014/main" id="{CCBCCCF5-D31D-F16D-2489-F18E65873648}"/>
+              </a:ext>
+            </a:extLst>
+          </p:cNvPr>
+          <p:cNvSpPr>
+            <a:spLocks noGrp="1"/>
+          </p:cNvSpPr>
+          <p:nvPr>
+            <p:ph type="title"/>
+          </p:nvPr>
+        </p:nvSpPr>
+        <p:spPr/>
+        <p:txBody>
+          <a:bodyPr/>
+          <a:lstStyle/>
+          <a:p>
+            <a:r>
+              <a:rPr lang="es-ES" dirty="0"/>
+              <a:t>Métricas obtenidas ADC STM</a:t>
+            </a:r>
+          </a:p>
+        </p:txBody>
+      </p:sp>
+      <p:sp>
+        <p:nvSpPr>
+          <p:cNvPr id="3" name="Marcador de contenido 2">
+            <a:extLst>
+              <a:ext uri="{FF2B5EF4-FFF2-40B4-BE49-F238E27FC236}">
+                <a16:creationId xmlns:a16="http://schemas.microsoft.com/office/drawing/2014/main" id="{0ACF9751-1D18-50D5-1205-FF50F4F5CEBA}"/>
+              </a:ext>
+            </a:extLst>
+          </p:cNvPr>
+          <p:cNvSpPr>
+            <a:spLocks noGrp="1"/>
+          </p:cNvSpPr>
+          <p:nvPr>
+            <p:ph idx="1"/>
+          </p:nvPr>
+        </p:nvSpPr>
+        <p:spPr>
+          <a:xfrm>
+            <a:off x="1027112" y="2010585"/>
+            <a:ext cx="8946541" cy="4195481"/>
+          </a:xfrm>
+        </p:spPr>
+        <p:txBody>
+          <a:bodyPr/>
+          <a:lstStyle/>
+          <a:p>
+            <a:pPr marL="0" indent="0">
+              <a:buNone/>
+            </a:pPr>
+            <a:r>
+              <a:rPr lang="es-ES" dirty="0"/>
+              <a:t>Se especula la posibilidad de que el AD2 no sea una fuente apta para la tarea.</a:t>
+            </a:r>
+          </a:p>
+        </p:txBody>
+      </p:sp>
+      <p:sp>
+        <p:nvSpPr>
+          <p:cNvPr id="4" name="Marcador de número de diapositiva 3">
+            <a:extLst>
+              <a:ext uri="{FF2B5EF4-FFF2-40B4-BE49-F238E27FC236}">
+                <a16:creationId xmlns:a16="http://schemas.microsoft.com/office/drawing/2014/main" id="{AF8E396A-5F18-47B7-9FE3-D337CD5DF225}"/>
+              </a:ext>
+            </a:extLst>
+          </p:cNvPr>
+          <p:cNvSpPr>
+            <a:spLocks noGrp="1"/>
+          </p:cNvSpPr>
+          <p:nvPr>
+            <p:ph type="sldNum" sz="quarter" idx="12"/>
+          </p:nvPr>
+        </p:nvSpPr>
+        <p:spPr/>
+        <p:txBody>
+          <a:bodyPr/>
+          <a:lstStyle/>
+          <a:p>
+            <a:fld id="{E725A04B-6C01-430F-BBE6-0BFF217C666F}" type="slidenum">
+              <a:rPr lang="es-ES" smtClean="0"/>
+              <a:t>6</a:t>
+            </a:fld>
+            <a:endParaRPr lang="es-ES"/>
+          </a:p>
+        </p:txBody>
+      </p:sp>
+      <p:sp>
+        <p:nvSpPr>
+          <p:cNvPr id="5" name="Marcador de pie de página 4">
+            <a:extLst>
+              <a:ext uri="{FF2B5EF4-FFF2-40B4-BE49-F238E27FC236}">
+                <a16:creationId xmlns:a16="http://schemas.microsoft.com/office/drawing/2014/main" id="{28245697-1D5C-A433-C899-47E00C244397}"/>
+              </a:ext>
+            </a:extLst>
+          </p:cNvPr>
+          <p:cNvSpPr>
+            <a:spLocks noGrp="1"/>
+          </p:cNvSpPr>
+          <p:nvPr>
+            <p:ph type="ftr" sz="quarter" idx="11"/>
+          </p:nvPr>
+        </p:nvSpPr>
+        <p:spPr/>
+        <p:txBody>
+          <a:bodyPr/>
+          <a:lstStyle/>
+          <a:p>
+            <a:endParaRPr lang="es-ES"/>
+          </a:p>
+        </p:txBody>
+      </p:sp>
+      <p:graphicFrame>
+        <p:nvGraphicFramePr>
+          <p:cNvPr id="7" name="Tabla 6">
+            <a:extLst>
+              <a:ext uri="{FF2B5EF4-FFF2-40B4-BE49-F238E27FC236}">
+                <a16:creationId xmlns:a16="http://schemas.microsoft.com/office/drawing/2014/main" id="{0C657BB7-243D-5C2B-5EBC-2C82B79BC5ED}"/>
+              </a:ext>
+            </a:extLst>
+          </p:cNvPr>
+          <p:cNvGraphicFramePr>
+            <a:graphicFrameLocks noGrp="1"/>
+          </p:cNvGraphicFramePr>
+          <p:nvPr>
+            <p:extLst>
+              <p:ext uri="{D42A27DB-BD31-4B8C-83A1-F6EECF244321}">
+                <p14:modId xmlns:p14="http://schemas.microsoft.com/office/powerpoint/2010/main" val="2478977210"/>
+              </p:ext>
+            </p:extLst>
+          </p:nvPr>
+        </p:nvGraphicFramePr>
+        <p:xfrm>
+          <a:off x="1284472" y="3606799"/>
+          <a:ext cx="8127999" cy="1854200"/>
+        </p:xfrm>
+        <a:graphic>
+          <a:graphicData uri="http://schemas.openxmlformats.org/drawingml/2006/table">
+            <a:tbl>
+              <a:tblPr firstRow="1" bandRow="1">
+                <a:tableStyleId>{5C22544A-7EE6-4342-B048-85BDC9FD1C3A}</a:tableStyleId>
+              </a:tblPr>
+              <a:tblGrid>
+                <a:gridCol w="2709333">
+                  <a:extLst>
+                    <a:ext uri="{9D8B030D-6E8A-4147-A177-3AD203B41FA5}">
+                      <a16:colId xmlns:a16="http://schemas.microsoft.com/office/drawing/2014/main" val="2866946604"/>
+                    </a:ext>
+                  </a:extLst>
+                </a:gridCol>
+                <a:gridCol w="2709333">
+                  <a:extLst>
+                    <a:ext uri="{9D8B030D-6E8A-4147-A177-3AD203B41FA5}">
+                      <a16:colId xmlns:a16="http://schemas.microsoft.com/office/drawing/2014/main" val="1519659291"/>
+                    </a:ext>
+                  </a:extLst>
+                </a:gridCol>
+                <a:gridCol w="2709333">
+                  <a:extLst>
+                    <a:ext uri="{9D8B030D-6E8A-4147-A177-3AD203B41FA5}">
+                      <a16:colId xmlns:a16="http://schemas.microsoft.com/office/drawing/2014/main" val="2689968238"/>
+                    </a:ext>
+                  </a:extLst>
+                </a:gridCol>
+              </a:tblGrid>
+              <a:tr h="370840">
+                <a:tc>
+                  <a:txBody>
+                    <a:bodyPr/>
+                    <a:lstStyle/>
+                    <a:p>
+                      <a:r>
+                        <a:rPr lang="es-ES" dirty="0"/>
+                        <a:t>Dato (LSB)</a:t>
+                      </a:r>
+                    </a:p>
+                  </a:txBody>
+                  <a:tcPr/>
+                </a:tc>
+                <a:tc>
+                  <a:txBody>
+                    <a:bodyPr/>
+                    <a:lstStyle/>
+                    <a:p>
+                      <a:r>
+                        <a:rPr lang="es-ES" dirty="0"/>
+                        <a:t>Medido</a:t>
+                      </a:r>
+                    </a:p>
+                  </a:txBody>
+                  <a:tcPr/>
+                </a:tc>
+                <a:tc>
+                  <a:txBody>
+                    <a:bodyPr/>
+                    <a:lstStyle/>
+                    <a:p>
+                      <a:r>
+                        <a:rPr lang="es-ES" dirty="0" err="1"/>
+                        <a:t>Datasheet</a:t>
+                      </a:r>
+                      <a:endParaRPr lang="es-ES" dirty="0"/>
+                    </a:p>
+                  </a:txBody>
+                  <a:tcPr/>
+                </a:tc>
+                <a:extLst>
+                  <a:ext uri="{0D108BD9-81ED-4DB2-BD59-A6C34878D82A}">
+                    <a16:rowId xmlns:a16="http://schemas.microsoft.com/office/drawing/2014/main" val="3147083577"/>
+                  </a:ext>
+                </a:extLst>
+              </a:tr>
+              <a:tr h="370840">
+                <a:tc>
+                  <a:txBody>
+                    <a:bodyPr/>
+                    <a:lstStyle/>
+                    <a:p>
+                      <a:r>
+                        <a:rPr lang="es-ES" dirty="0"/>
+                        <a:t>Ganancia </a:t>
+                      </a:r>
+                    </a:p>
+                  </a:txBody>
+                  <a:tcPr/>
+                </a:tc>
+                <a:tc>
+                  <a:txBody>
+                    <a:bodyPr/>
+                    <a:lstStyle/>
+                    <a:p>
+                      <a:r>
+                        <a:rPr lang="es-ES" dirty="0"/>
+                        <a:t>&lt;1</a:t>
+                      </a:r>
+                    </a:p>
+                  </a:txBody>
+                  <a:tcPr/>
+                </a:tc>
+                <a:tc>
+                  <a:txBody>
+                    <a:bodyPr/>
+                    <a:lstStyle/>
+                    <a:p>
+                      <a:r>
+                        <a:rPr lang="es-ES" dirty="0"/>
+                        <a:t>4 - 4.5</a:t>
+                      </a:r>
+                      <a:r>
+                        <a:rPr lang="es-ES" sz="1800" dirty="0"/>
+                        <a:t>*</a:t>
+                      </a:r>
+                      <a:endParaRPr lang="es-ES" dirty="0"/>
+                    </a:p>
+                  </a:txBody>
+                  <a:tcPr/>
+                </a:tc>
+                <a:extLst>
+                  <a:ext uri="{0D108BD9-81ED-4DB2-BD59-A6C34878D82A}">
+                    <a16:rowId xmlns:a16="http://schemas.microsoft.com/office/drawing/2014/main" val="1725001828"/>
+                  </a:ext>
+                </a:extLst>
+              </a:tr>
+              <a:tr h="370840">
+                <a:tc>
+                  <a:txBody>
+                    <a:bodyPr/>
+                    <a:lstStyle/>
+                    <a:p>
+                      <a:r>
+                        <a:rPr lang="es-ES" dirty="0"/>
+                        <a:t>Offset </a:t>
+                      </a:r>
+                    </a:p>
+                  </a:txBody>
+                  <a:tcPr/>
+                </a:tc>
+                <a:tc>
+                  <a:txBody>
+                    <a:bodyPr/>
+                    <a:lstStyle/>
+                    <a:p>
+                      <a:r>
+                        <a:rPr lang="es-ES" dirty="0"/>
+                        <a:t>-25**</a:t>
+                      </a:r>
+                    </a:p>
+                  </a:txBody>
+                  <a:tcPr/>
+                </a:tc>
+                <a:tc>
+                  <a:txBody>
+                    <a:bodyPr/>
+                    <a:lstStyle/>
+                    <a:p>
+                      <a:r>
+                        <a:rPr lang="es-ES" dirty="0"/>
+                        <a:t>2 – 4</a:t>
+                      </a:r>
+                    </a:p>
+                  </a:txBody>
+                  <a:tcPr/>
+                </a:tc>
+                <a:extLst>
+                  <a:ext uri="{0D108BD9-81ED-4DB2-BD59-A6C34878D82A}">
+                    <a16:rowId xmlns:a16="http://schemas.microsoft.com/office/drawing/2014/main" val="4081098935"/>
+                  </a:ext>
+                </a:extLst>
+              </a:tr>
+              <a:tr h="370840">
+                <a:tc>
+                  <a:txBody>
+                    <a:bodyPr/>
+                    <a:lstStyle/>
+                    <a:p>
+                      <a:r>
+                        <a:rPr lang="es-ES" dirty="0"/>
+                        <a:t>INL</a:t>
+                      </a:r>
+                    </a:p>
+                  </a:txBody>
+                  <a:tcPr/>
+                </a:tc>
+                <a:tc>
+                  <a:txBody>
+                    <a:bodyPr/>
+                    <a:lstStyle/>
+                    <a:p>
+                      <a:r>
+                        <a:rPr lang="es-ES" dirty="0"/>
+                        <a:t>4 – 8</a:t>
+                      </a:r>
+                    </a:p>
+                  </a:txBody>
+                  <a:tcPr/>
+                </a:tc>
+                <a:tc>
+                  <a:txBody>
+                    <a:bodyPr/>
+                    <a:lstStyle/>
+                    <a:p>
+                      <a:r>
+                        <a:rPr lang="es-ES" dirty="0"/>
+                        <a:t>2.5 – 3</a:t>
+                      </a:r>
+                    </a:p>
+                  </a:txBody>
+                  <a:tcPr/>
+                </a:tc>
+                <a:extLst>
+                  <a:ext uri="{0D108BD9-81ED-4DB2-BD59-A6C34878D82A}">
+                    <a16:rowId xmlns:a16="http://schemas.microsoft.com/office/drawing/2014/main" val="3688062468"/>
+                  </a:ext>
+                </a:extLst>
+              </a:tr>
+              <a:tr h="370840">
+                <a:tc>
+                  <a:txBody>
+                    <a:bodyPr/>
+                    <a:lstStyle/>
+                    <a:p>
+                      <a:r>
+                        <a:rPr lang="es-ES" dirty="0"/>
+                        <a:t>DNL</a:t>
+                      </a:r>
+                    </a:p>
+                  </a:txBody>
+                  <a:tcPr/>
+                </a:tc>
+                <a:tc>
+                  <a:txBody>
+                    <a:bodyPr/>
+                    <a:lstStyle/>
+                    <a:p>
+                      <a:r>
+                        <a:rPr lang="es-ES" dirty="0"/>
+                        <a:t>1 – 1.8</a:t>
+                      </a:r>
+                    </a:p>
+                  </a:txBody>
+                  <a:tcPr/>
+                </a:tc>
+                <a:tc>
+                  <a:txBody>
+                    <a:bodyPr/>
+                    <a:lstStyle/>
+                    <a:p>
+                      <a:r>
+                        <a:rPr lang="es-ES" dirty="0"/>
+                        <a:t>1 – 1.5</a:t>
+                      </a:r>
+                    </a:p>
+                  </a:txBody>
+                  <a:tcPr/>
+                </a:tc>
+                <a:extLst>
+                  <a:ext uri="{0D108BD9-81ED-4DB2-BD59-A6C34878D82A}">
+                    <a16:rowId xmlns:a16="http://schemas.microsoft.com/office/drawing/2014/main" val="4282505861"/>
+                  </a:ext>
+                </a:extLst>
+              </a:tr>
+            </a:tbl>
+          </a:graphicData>
+        </a:graphic>
+      </p:graphicFrame>
+      <p:sp>
+        <p:nvSpPr>
+          <p:cNvPr id="6" name="CuadroTexto 5">
+            <a:extLst>
+              <a:ext uri="{FF2B5EF4-FFF2-40B4-BE49-F238E27FC236}">
+                <a16:creationId xmlns:a16="http://schemas.microsoft.com/office/drawing/2014/main" id="{A50F3708-8EAB-DBEE-39B9-BD07FADEEB36}"/>
+              </a:ext>
+            </a:extLst>
+          </p:cNvPr>
+          <p:cNvSpPr txBox="1"/>
+          <p:nvPr/>
+        </p:nvSpPr>
+        <p:spPr>
+          <a:xfrm>
+            <a:off x="905933" y="5850467"/>
+            <a:ext cx="7272867" cy="461665"/>
+          </a:xfrm>
+          <a:prstGeom prst="rect">
+            <a:avLst/>
+          </a:prstGeom>
+          <a:noFill/>
+        </p:spPr>
+        <p:txBody>
+          <a:bodyPr wrap="square" rtlCol="0">
+            <a:spAutoFit/>
+          </a:bodyPr>
+          <a:lstStyle/>
+          <a:p>
+            <a:r>
+              <a:rPr lang="es-ES" sz="1200" dirty="0"/>
+              <a:t>*Se sospecha que este es el valor máximo que se puede encontrar entre un </a:t>
+            </a:r>
+            <a:r>
+              <a:rPr lang="es-ES" sz="1200" dirty="0" err="1"/>
+              <a:t>code</a:t>
+            </a:r>
+            <a:r>
+              <a:rPr lang="es-ES" sz="1200" dirty="0"/>
+              <a:t> </a:t>
+            </a:r>
+            <a:r>
+              <a:rPr lang="es-ES" sz="1200" dirty="0" err="1"/>
+              <a:t>bin</a:t>
+            </a:r>
+            <a:r>
+              <a:rPr lang="es-ES" sz="1200" dirty="0"/>
+              <a:t> y otro</a:t>
+            </a:r>
+          </a:p>
+          <a:p>
+            <a:r>
+              <a:rPr lang="es-ES" sz="1200" dirty="0"/>
+              <a:t>** Se sospecha que el offset del AD2 en el rango utilizado pueda ser la fuente del problema</a:t>
+            </a:r>
+          </a:p>
+        </p:txBody>
+      </p:sp>
+    </p:spTree>
+    <p:extLst>
+      <p:ext uri="{BB962C8B-B14F-4D97-AF65-F5344CB8AC3E}">
+        <p14:creationId xmlns:p14="http://schemas.microsoft.com/office/powerpoint/2010/main" val="2615745540"/>
+      </p:ext>
+    </p:extLst>
+  </p:cSld>
+  <p:clrMapOvr>
+    <a:masterClrMapping/>
+  </p:clrMapOvr>
+</p:sld>
+</file>
+
+<file path=ppt/slides/slide7.xml><?xml version="1.0" encoding="utf-8"?>
+<p:sld xmlns:a="http://schemas.openxmlformats.org/drawingml/2006/main" xmlns:r="http://schemas.openxmlformats.org/officeDocument/2006/relationships" xmlns:p="http://schemas.openxmlformats.org/presentationml/2006/main">
+  <p:cSld>
+    <p:bg>
+      <p:bgPr>
+        <a:solidFill>
+          <a:schemeClr val="bg1"/>
+        </a:solidFill>
+        <a:effectLst/>
+      </p:bgPr>
+    </p:bg>
+    <p:spTree>
+      <p:nvGrpSpPr>
+        <p:cNvPr id="1" name="">
+          <a:extLst>
+            <a:ext uri="{FF2B5EF4-FFF2-40B4-BE49-F238E27FC236}">
+              <a16:creationId xmlns:a16="http://schemas.microsoft.com/office/drawing/2014/main" id="{2D2DCDC6-9B2E-EEF6-0113-3FBD4C7450FB}"/>
+            </a:ext>
+          </a:extLst>
+        </p:cNvPr>
+        <p:cNvGrpSpPr/>
+        <p:nvPr/>
+      </p:nvGrpSpPr>
+      <p:grpSpPr>
+        <a:xfrm>
+          <a:off x="0" y="0"/>
+          <a:ext cx="0" cy="0"/>
+          <a:chOff x="0" y="0"/>
+          <a:chExt cx="0" cy="0"/>
+        </a:xfrm>
+      </p:grpSpPr>
+      <p:sp>
+        <p:nvSpPr>
+          <p:cNvPr id="46" name="Rectangle 37">
+            <a:extLst>
+              <a:ext uri="{FF2B5EF4-FFF2-40B4-BE49-F238E27FC236}">
+                <a16:creationId xmlns:a16="http://schemas.microsoft.com/office/drawing/2014/main" id="{C8A3C342-1D03-412F-8DD3-BF519E8E0AE9}"/>
+              </a:ext>
+              <a:ext uri="{C183D7F6-B498-43B3-948B-1728B52AA6E4}">
+                <adec:decorative xmlns:adec="http://schemas.microsoft.com/office/drawing/2017/decorative" val="1"/>
+              </a:ext>
+            </a:extLst>
+          </p:cNvPr>
+          <p:cNvSpPr>
+            <a:spLocks noGrp="1" noRot="1" noChangeAspect="1" noMove="1" noResize="1" noEditPoints="1" noAdjustHandles="1" noChangeArrowheads="1" noChangeShapeType="1" noTextEdit="1"/>
+          </p:cNvSpPr>
+          <p:nvPr>
+            <p:extLst>
+              <p:ext uri="{386F3935-93C4-4BCD-93E2-E3B085C9AB24}">
+                <p16:designElem xmlns:p16="http://schemas.microsoft.com/office/powerpoint/2015/main" val="1"/>
+              </p:ext>
+            </p:extLst>
+          </p:nvPr>
+        </p:nvSpPr>
+        <p:spPr>
+          <a:xfrm>
+            <a:off x="0" y="0"/>
             <a:ext cx="12192000" cy="6858000"/>
           </a:xfrm>
           <a:prstGeom prst="rect">
@@ -8992,10 +9534,49 @@
       </p:sp>
       <p:sp>
         <p:nvSpPr>
-          <p:cNvPr id="11" name="Freeform 36">
+          <p:cNvPr id="2" name="Título 1">
             <a:extLst>
               <a:ext uri="{FF2B5EF4-FFF2-40B4-BE49-F238E27FC236}">
-                <a16:creationId xmlns:a16="http://schemas.microsoft.com/office/drawing/2014/main" id="{BB237A14-61B1-4C00-A670-5D8D68A8668E}"/>
+                <a16:creationId xmlns:a16="http://schemas.microsoft.com/office/drawing/2014/main" id="{4FA66D91-FA67-C303-A8FB-691B3CEE9808}"/>
+              </a:ext>
+            </a:extLst>
+          </p:cNvPr>
+          <p:cNvSpPr>
+            <a:spLocks noGrp="1"/>
+          </p:cNvSpPr>
+          <p:nvPr>
+            <p:ph type="title"/>
+          </p:nvPr>
+        </p:nvSpPr>
+        <p:spPr>
+          <a:xfrm>
+            <a:off x="648930" y="629266"/>
+            <a:ext cx="6188190" cy="1622321"/>
+          </a:xfrm>
+        </p:spPr>
+        <p:txBody>
+          <a:bodyPr>
+            <a:normAutofit/>
+          </a:bodyPr>
+          <a:lstStyle/>
+          <a:p>
+            <a:r>
+              <a:rPr lang="es-ES" dirty="0">
+                <a:solidFill>
+                  <a:srgbClr val="EBEBEB"/>
+                </a:solidFill>
+              </a:rPr>
+              <a:t>Entorno de trabajo DAC</a:t>
+            </a:r>
+          </a:p>
+        </p:txBody>
+      </p:sp>
+      <p:sp>
+        <p:nvSpPr>
+          <p:cNvPr id="47" name="Freeform 31">
+            <a:extLst>
+              <a:ext uri="{FF2B5EF4-FFF2-40B4-BE49-F238E27FC236}">
+                <a16:creationId xmlns:a16="http://schemas.microsoft.com/office/drawing/2014/main" id="{81CC9B02-E087-4350-AEBD-2C3CF001AF01}"/>
               </a:ext>
               <a:ext uri="{C183D7F6-B498-43B3-948B-1728B52AA6E4}">
                 <adec:decorative xmlns:adec="http://schemas.microsoft.com/office/drawing/2017/decorative" val="1"/>
@@ -9014,8 +9595,8 @@
           </p:nvPr>
         </p:nvSpPr>
         <p:spPr>
-          <a:xfrm flipH="1">
-            <a:off x="4644637" y="0"/>
+          <a:xfrm>
+            <a:off x="7015974" y="-1"/>
             <a:ext cx="559472" cy="3709642"/>
           </a:xfrm>
           <a:custGeom>
@@ -9325,7 +9906,7 @@
             </a:pathLst>
           </a:custGeom>
           <a:solidFill>
-            <a:schemeClr val="tx2">
+            <a:schemeClr val="bg1">
               <a:alpha val="20000"/>
             </a:schemeClr>
           </a:solidFill>
@@ -9342,12 +9923,12 @@
           </a:p>
         </p:txBody>
       </p:sp>
-      <p:sp>
-        <p:nvSpPr>
-          <p:cNvPr id="13" name="Freeform: Shape 12">
+      <p:sp useBgFill="1">
+        <p:nvSpPr>
+          <p:cNvPr id="48" name="Freeform: Shape 41">
             <a:extLst>
               <a:ext uri="{FF2B5EF4-FFF2-40B4-BE49-F238E27FC236}">
-                <a16:creationId xmlns:a16="http://schemas.microsoft.com/office/drawing/2014/main" id="{8598F259-6F54-47A3-8D13-1603D786A328}"/>
+                <a16:creationId xmlns:a16="http://schemas.microsoft.com/office/drawing/2014/main" id="{AC3BF0FA-36FA-4CE9-840E-F7C3A8F168B5}"/>
               </a:ext>
               <a:ext uri="{C183D7F6-B498-43B3-948B-1728B52AA6E4}">
                 <adec:decorative xmlns:adec="http://schemas.microsoft.com/office/drawing/2017/decorative" val="1"/>
@@ -9365,118 +9946,118 @@
             </p:extLst>
           </p:nvPr>
         </p:nvSpPr>
-        <p:spPr>
-          <a:xfrm>
-            <a:off x="1" y="1"/>
-            <a:ext cx="4990911" cy="6858001"/>
+        <p:spPr bwMode="gray">
+          <a:xfrm rot="16200000">
+            <a:off x="6281796" y="947378"/>
+            <a:ext cx="6858001" cy="4963245"/>
           </a:xfrm>
           <a:custGeom>
             <a:avLst/>
             <a:gdLst>
-              <a:gd name="connsiteX0" fmla="*/ 3646196 w 4990911"/>
-              <a:gd name="connsiteY0" fmla="*/ 0 h 6858001"/>
-              <a:gd name="connsiteX1" fmla="*/ 4989734 w 4990911"/>
-              <a:gd name="connsiteY1" fmla="*/ 0 h 6858001"/>
-              <a:gd name="connsiteX2" fmla="*/ 4964689 w 4990911"/>
-              <a:gd name="connsiteY2" fmla="*/ 155677 h 6858001"/>
-              <a:gd name="connsiteX3" fmla="*/ 4940820 w 4990911"/>
-              <a:gd name="connsiteY3" fmla="*/ 310668 h 6858001"/>
-              <a:gd name="connsiteX4" fmla="*/ 4917456 w 4990911"/>
-              <a:gd name="connsiteY4" fmla="*/ 466344 h 6858001"/>
-              <a:gd name="connsiteX5" fmla="*/ 4897453 w 4990911"/>
-              <a:gd name="connsiteY5" fmla="*/ 622707 h 6858001"/>
-              <a:gd name="connsiteX6" fmla="*/ 4877282 w 4990911"/>
-              <a:gd name="connsiteY6" fmla="*/ 778383 h 6858001"/>
-              <a:gd name="connsiteX7" fmla="*/ 4858456 w 4990911"/>
-              <a:gd name="connsiteY7" fmla="*/ 934746 h 6858001"/>
-              <a:gd name="connsiteX8" fmla="*/ 4842320 w 4990911"/>
-              <a:gd name="connsiteY8" fmla="*/ 1089051 h 6858001"/>
-              <a:gd name="connsiteX9" fmla="*/ 4827024 w 4990911"/>
-              <a:gd name="connsiteY9" fmla="*/ 1245413 h 6858001"/>
-              <a:gd name="connsiteX10" fmla="*/ 4813072 w 4990911"/>
-              <a:gd name="connsiteY10" fmla="*/ 1401090 h 6858001"/>
-              <a:gd name="connsiteX11" fmla="*/ 4800970 w 4990911"/>
-              <a:gd name="connsiteY11" fmla="*/ 1554023 h 6858001"/>
-              <a:gd name="connsiteX12" fmla="*/ 4788867 w 4990911"/>
-              <a:gd name="connsiteY12" fmla="*/ 1709014 h 6858001"/>
-              <a:gd name="connsiteX13" fmla="*/ 4778782 w 4990911"/>
-              <a:gd name="connsiteY13" fmla="*/ 1861947 h 6858001"/>
-              <a:gd name="connsiteX14" fmla="*/ 4770882 w 4990911"/>
-              <a:gd name="connsiteY14" fmla="*/ 2014881 h 6858001"/>
-              <a:gd name="connsiteX15" fmla="*/ 4762645 w 4990911"/>
-              <a:gd name="connsiteY15" fmla="*/ 2167128 h 6858001"/>
-              <a:gd name="connsiteX16" fmla="*/ 4755754 w 4990911"/>
-              <a:gd name="connsiteY16" fmla="*/ 2318004 h 6858001"/>
-              <a:gd name="connsiteX17" fmla="*/ 4750879 w 4990911"/>
-              <a:gd name="connsiteY17" fmla="*/ 2467509 h 6858001"/>
-              <a:gd name="connsiteX18" fmla="*/ 4746677 w 4990911"/>
-              <a:gd name="connsiteY18" fmla="*/ 2617013 h 6858001"/>
-              <a:gd name="connsiteX19" fmla="*/ 4742643 w 4990911"/>
-              <a:gd name="connsiteY19" fmla="*/ 2765146 h 6858001"/>
-              <a:gd name="connsiteX20" fmla="*/ 4740794 w 4990911"/>
-              <a:gd name="connsiteY20" fmla="*/ 2911221 h 6858001"/>
-              <a:gd name="connsiteX21" fmla="*/ 4738777 w 4990911"/>
-              <a:gd name="connsiteY21" fmla="*/ 3057297 h 6858001"/>
-              <a:gd name="connsiteX22" fmla="*/ 4737768 w 4990911"/>
-              <a:gd name="connsiteY22" fmla="*/ 3201315 h 6858001"/>
-              <a:gd name="connsiteX23" fmla="*/ 4738777 w 4990911"/>
-              <a:gd name="connsiteY23" fmla="*/ 3343961 h 6858001"/>
-              <a:gd name="connsiteX24" fmla="*/ 4738777 w 4990911"/>
-              <a:gd name="connsiteY24" fmla="*/ 3485236 h 6858001"/>
-              <a:gd name="connsiteX25" fmla="*/ 4740794 w 4990911"/>
-              <a:gd name="connsiteY25" fmla="*/ 3625139 h 6858001"/>
-              <a:gd name="connsiteX26" fmla="*/ 4743819 w 4990911"/>
-              <a:gd name="connsiteY26" fmla="*/ 3762299 h 6858001"/>
-              <a:gd name="connsiteX27" fmla="*/ 4746677 w 4990911"/>
-              <a:gd name="connsiteY27" fmla="*/ 3898087 h 6858001"/>
-              <a:gd name="connsiteX28" fmla="*/ 4749871 w 4990911"/>
-              <a:gd name="connsiteY28" fmla="*/ 4031133 h 6858001"/>
-              <a:gd name="connsiteX29" fmla="*/ 4754745 w 4990911"/>
-              <a:gd name="connsiteY29" fmla="*/ 4163492 h 6858001"/>
-              <a:gd name="connsiteX30" fmla="*/ 4759956 w 4990911"/>
-              <a:gd name="connsiteY30" fmla="*/ 4293793 h 6858001"/>
-              <a:gd name="connsiteX31" fmla="*/ 4764662 w 4990911"/>
-              <a:gd name="connsiteY31" fmla="*/ 4421352 h 6858001"/>
-              <a:gd name="connsiteX32" fmla="*/ 4777942 w 4990911"/>
-              <a:gd name="connsiteY32" fmla="*/ 4670298 h 6858001"/>
-              <a:gd name="connsiteX33" fmla="*/ 4792061 w 4990911"/>
-              <a:gd name="connsiteY33" fmla="*/ 4908956 h 6858001"/>
-              <a:gd name="connsiteX34" fmla="*/ 4806853 w 4990911"/>
-              <a:gd name="connsiteY34" fmla="*/ 5138013 h 6858001"/>
-              <a:gd name="connsiteX35" fmla="*/ 4823158 w 4990911"/>
-              <a:gd name="connsiteY35" fmla="*/ 5354726 h 6858001"/>
-              <a:gd name="connsiteX36" fmla="*/ 4840135 w 4990911"/>
-              <a:gd name="connsiteY36" fmla="*/ 5561838 h 6858001"/>
-              <a:gd name="connsiteX37" fmla="*/ 4858456 w 4990911"/>
-              <a:gd name="connsiteY37" fmla="*/ 5753862 h 6858001"/>
-              <a:gd name="connsiteX38" fmla="*/ 4876442 w 4990911"/>
-              <a:gd name="connsiteY38" fmla="*/ 5934227 h 6858001"/>
-              <a:gd name="connsiteX39" fmla="*/ 4894427 w 4990911"/>
-              <a:gd name="connsiteY39" fmla="*/ 6100191 h 6858001"/>
-              <a:gd name="connsiteX40" fmla="*/ 4911404 w 4990911"/>
-              <a:gd name="connsiteY40" fmla="*/ 6252438 h 6858001"/>
-              <a:gd name="connsiteX41" fmla="*/ 4927541 w 4990911"/>
-              <a:gd name="connsiteY41" fmla="*/ 6387541 h 6858001"/>
-              <a:gd name="connsiteX42" fmla="*/ 4942837 w 4990911"/>
-              <a:gd name="connsiteY42" fmla="*/ 6509613 h 6858001"/>
-              <a:gd name="connsiteX43" fmla="*/ 4955612 w 4990911"/>
-              <a:gd name="connsiteY43" fmla="*/ 6612483 h 6858001"/>
-              <a:gd name="connsiteX44" fmla="*/ 4967714 w 4990911"/>
-              <a:gd name="connsiteY44" fmla="*/ 6698894 h 6858001"/>
-              <a:gd name="connsiteX45" fmla="*/ 4985028 w 4990911"/>
-              <a:gd name="connsiteY45" fmla="*/ 6817538 h 6858001"/>
-              <a:gd name="connsiteX46" fmla="*/ 4990911 w 4990911"/>
-              <a:gd name="connsiteY46" fmla="*/ 6858000 h 6858001"/>
-              <a:gd name="connsiteX47" fmla="*/ 4085557 w 4990911"/>
-              <a:gd name="connsiteY47" fmla="*/ 6858000 h 6858001"/>
-              <a:gd name="connsiteX48" fmla="*/ 4085557 w 4990911"/>
-              <a:gd name="connsiteY48" fmla="*/ 6858001 h 6858001"/>
-              <a:gd name="connsiteX49" fmla="*/ 0 w 4990911"/>
-              <a:gd name="connsiteY49" fmla="*/ 6858001 h 6858001"/>
-              <a:gd name="connsiteX50" fmla="*/ 0 w 4990911"/>
-              <a:gd name="connsiteY50" fmla="*/ 1 h 6858001"/>
-              <a:gd name="connsiteX51" fmla="*/ 3646196 w 4990911"/>
-              <a:gd name="connsiteY51" fmla="*/ 1 h 6858001"/>
+              <a:gd name="connsiteX0" fmla="*/ 6858001 w 6858001"/>
+              <a:gd name="connsiteY0" fmla="*/ 1177 h 4963245"/>
+              <a:gd name="connsiteX1" fmla="*/ 6858001 w 6858001"/>
+              <a:gd name="connsiteY1" fmla="*/ 1344715 h 4963245"/>
+              <a:gd name="connsiteX2" fmla="*/ 6858000 w 6858001"/>
+              <a:gd name="connsiteY2" fmla="*/ 1344715 h 4963245"/>
+              <a:gd name="connsiteX3" fmla="*/ 6858000 w 6858001"/>
+              <a:gd name="connsiteY3" fmla="*/ 4963245 h 4963245"/>
+              <a:gd name="connsiteX4" fmla="*/ 0 w 6858001"/>
+              <a:gd name="connsiteY4" fmla="*/ 4963244 h 4963245"/>
+              <a:gd name="connsiteX5" fmla="*/ 0 w 6858001"/>
+              <a:gd name="connsiteY5" fmla="*/ 900697 h 4963245"/>
+              <a:gd name="connsiteX6" fmla="*/ 1 w 6858001"/>
+              <a:gd name="connsiteY6" fmla="*/ 900697 h 4963245"/>
+              <a:gd name="connsiteX7" fmla="*/ 1 w 6858001"/>
+              <a:gd name="connsiteY7" fmla="*/ 0 h 4963245"/>
+              <a:gd name="connsiteX8" fmla="*/ 40463 w 6858001"/>
+              <a:gd name="connsiteY8" fmla="*/ 5883 h 4963245"/>
+              <a:gd name="connsiteX9" fmla="*/ 159107 w 6858001"/>
+              <a:gd name="connsiteY9" fmla="*/ 23196 h 4963245"/>
+              <a:gd name="connsiteX10" fmla="*/ 245518 w 6858001"/>
+              <a:gd name="connsiteY10" fmla="*/ 35299 h 4963245"/>
+              <a:gd name="connsiteX11" fmla="*/ 348388 w 6858001"/>
+              <a:gd name="connsiteY11" fmla="*/ 48073 h 4963245"/>
+              <a:gd name="connsiteX12" fmla="*/ 470460 w 6858001"/>
+              <a:gd name="connsiteY12" fmla="*/ 63369 h 4963245"/>
+              <a:gd name="connsiteX13" fmla="*/ 605563 w 6858001"/>
+              <a:gd name="connsiteY13" fmla="*/ 79506 h 4963245"/>
+              <a:gd name="connsiteX14" fmla="*/ 757810 w 6858001"/>
+              <a:gd name="connsiteY14" fmla="*/ 96483 h 4963245"/>
+              <a:gd name="connsiteX15" fmla="*/ 923774 w 6858001"/>
+              <a:gd name="connsiteY15" fmla="*/ 114469 h 4963245"/>
+              <a:gd name="connsiteX16" fmla="*/ 1104139 w 6858001"/>
+              <a:gd name="connsiteY16" fmla="*/ 132454 h 4963245"/>
+              <a:gd name="connsiteX17" fmla="*/ 1296163 w 6858001"/>
+              <a:gd name="connsiteY17" fmla="*/ 150776 h 4963245"/>
+              <a:gd name="connsiteX18" fmla="*/ 1503275 w 6858001"/>
+              <a:gd name="connsiteY18" fmla="*/ 167753 h 4963245"/>
+              <a:gd name="connsiteX19" fmla="*/ 1719988 w 6858001"/>
+              <a:gd name="connsiteY19" fmla="*/ 184058 h 4963245"/>
+              <a:gd name="connsiteX20" fmla="*/ 1949045 w 6858001"/>
+              <a:gd name="connsiteY20" fmla="*/ 198849 h 4963245"/>
+              <a:gd name="connsiteX21" fmla="*/ 2187703 w 6858001"/>
+              <a:gd name="connsiteY21" fmla="*/ 212969 h 4963245"/>
+              <a:gd name="connsiteX22" fmla="*/ 2436649 w 6858001"/>
+              <a:gd name="connsiteY22" fmla="*/ 226248 h 4963245"/>
+              <a:gd name="connsiteX23" fmla="*/ 2564208 w 6858001"/>
+              <a:gd name="connsiteY23" fmla="*/ 230955 h 4963245"/>
+              <a:gd name="connsiteX24" fmla="*/ 2694509 w 6858001"/>
+              <a:gd name="connsiteY24" fmla="*/ 236165 h 4963245"/>
+              <a:gd name="connsiteX25" fmla="*/ 2826868 w 6858001"/>
+              <a:gd name="connsiteY25" fmla="*/ 241040 h 4963245"/>
+              <a:gd name="connsiteX26" fmla="*/ 2959914 w 6858001"/>
+              <a:gd name="connsiteY26" fmla="*/ 244234 h 4963245"/>
+              <a:gd name="connsiteX27" fmla="*/ 3095702 w 6858001"/>
+              <a:gd name="connsiteY27" fmla="*/ 247091 h 4963245"/>
+              <a:gd name="connsiteX28" fmla="*/ 3232862 w 6858001"/>
+              <a:gd name="connsiteY28" fmla="*/ 250117 h 4963245"/>
+              <a:gd name="connsiteX29" fmla="*/ 3372765 w 6858001"/>
+              <a:gd name="connsiteY29" fmla="*/ 252134 h 4963245"/>
+              <a:gd name="connsiteX30" fmla="*/ 3514040 w 6858001"/>
+              <a:gd name="connsiteY30" fmla="*/ 252134 h 4963245"/>
+              <a:gd name="connsiteX31" fmla="*/ 3656686 w 6858001"/>
+              <a:gd name="connsiteY31" fmla="*/ 253142 h 4963245"/>
+              <a:gd name="connsiteX32" fmla="*/ 3800704 w 6858001"/>
+              <a:gd name="connsiteY32" fmla="*/ 252134 h 4963245"/>
+              <a:gd name="connsiteX33" fmla="*/ 3946780 w 6858001"/>
+              <a:gd name="connsiteY33" fmla="*/ 250117 h 4963245"/>
+              <a:gd name="connsiteX34" fmla="*/ 4092855 w 6858001"/>
+              <a:gd name="connsiteY34" fmla="*/ 248268 h 4963245"/>
+              <a:gd name="connsiteX35" fmla="*/ 4240988 w 6858001"/>
+              <a:gd name="connsiteY35" fmla="*/ 244234 h 4963245"/>
+              <a:gd name="connsiteX36" fmla="*/ 4390492 w 6858001"/>
+              <a:gd name="connsiteY36" fmla="*/ 240032 h 4963245"/>
+              <a:gd name="connsiteX37" fmla="*/ 4539997 w 6858001"/>
+              <a:gd name="connsiteY37" fmla="*/ 235157 h 4963245"/>
+              <a:gd name="connsiteX38" fmla="*/ 4690873 w 6858001"/>
+              <a:gd name="connsiteY38" fmla="*/ 228266 h 4963245"/>
+              <a:gd name="connsiteX39" fmla="*/ 4843120 w 6858001"/>
+              <a:gd name="connsiteY39" fmla="*/ 220029 h 4963245"/>
+              <a:gd name="connsiteX40" fmla="*/ 4996054 w 6858001"/>
+              <a:gd name="connsiteY40" fmla="*/ 212129 h 4963245"/>
+              <a:gd name="connsiteX41" fmla="*/ 5148987 w 6858001"/>
+              <a:gd name="connsiteY41" fmla="*/ 202044 h 4963245"/>
+              <a:gd name="connsiteX42" fmla="*/ 5303978 w 6858001"/>
+              <a:gd name="connsiteY42" fmla="*/ 189941 h 4963245"/>
+              <a:gd name="connsiteX43" fmla="*/ 5456911 w 6858001"/>
+              <a:gd name="connsiteY43" fmla="*/ 177839 h 4963245"/>
+              <a:gd name="connsiteX44" fmla="*/ 5612588 w 6858001"/>
+              <a:gd name="connsiteY44" fmla="*/ 163887 h 4963245"/>
+              <a:gd name="connsiteX45" fmla="*/ 5768950 w 6858001"/>
+              <a:gd name="connsiteY45" fmla="*/ 148591 h 4963245"/>
+              <a:gd name="connsiteX46" fmla="*/ 5923255 w 6858001"/>
+              <a:gd name="connsiteY46" fmla="*/ 132455 h 4963245"/>
+              <a:gd name="connsiteX47" fmla="*/ 6079618 w 6858001"/>
+              <a:gd name="connsiteY47" fmla="*/ 113629 h 4963245"/>
+              <a:gd name="connsiteX48" fmla="*/ 6235294 w 6858001"/>
+              <a:gd name="connsiteY48" fmla="*/ 93458 h 4963245"/>
+              <a:gd name="connsiteX49" fmla="*/ 6391657 w 6858001"/>
+              <a:gd name="connsiteY49" fmla="*/ 73455 h 4963245"/>
+              <a:gd name="connsiteX50" fmla="*/ 6547333 w 6858001"/>
+              <a:gd name="connsiteY50" fmla="*/ 50091 h 4963245"/>
+              <a:gd name="connsiteX51" fmla="*/ 6702324 w 6858001"/>
+              <a:gd name="connsiteY51" fmla="*/ 26222 h 4963245"/>
             </a:gdLst>
             <a:ahLst/>
             <a:cxnLst>
@@ -9639,162 +10220,162 @@
             </a:cxnLst>
             <a:rect l="l" t="t" r="r" b="b"/>
             <a:pathLst>
-              <a:path w="4990911" h="6858001">
+              <a:path w="6858001" h="4963245">
                 <a:moveTo>
-                  <a:pt x="3646196" y="0"/>
+                  <a:pt x="6858001" y="1177"/>
                 </a:moveTo>
                 <a:lnTo>
-                  <a:pt x="4989734" y="0"/>
-                </a:lnTo>
-                <a:lnTo>
-                  <a:pt x="4964689" y="155677"/>
-                </a:lnTo>
-                <a:lnTo>
-                  <a:pt x="4940820" y="310668"/>
-                </a:lnTo>
-                <a:lnTo>
-                  <a:pt x="4917456" y="466344"/>
-                </a:lnTo>
-                <a:lnTo>
-                  <a:pt x="4897453" y="622707"/>
-                </a:lnTo>
-                <a:lnTo>
-                  <a:pt x="4877282" y="778383"/>
-                </a:lnTo>
-                <a:lnTo>
-                  <a:pt x="4858456" y="934746"/>
-                </a:lnTo>
-                <a:lnTo>
-                  <a:pt x="4842320" y="1089051"/>
-                </a:lnTo>
-                <a:lnTo>
-                  <a:pt x="4827024" y="1245413"/>
-                </a:lnTo>
-                <a:lnTo>
-                  <a:pt x="4813072" y="1401090"/>
-                </a:lnTo>
-                <a:lnTo>
-                  <a:pt x="4800970" y="1554023"/>
-                </a:lnTo>
-                <a:lnTo>
-                  <a:pt x="4788867" y="1709014"/>
-                </a:lnTo>
-                <a:lnTo>
-                  <a:pt x="4778782" y="1861947"/>
-                </a:lnTo>
-                <a:lnTo>
-                  <a:pt x="4770882" y="2014881"/>
-                </a:lnTo>
-                <a:lnTo>
-                  <a:pt x="4762645" y="2167128"/>
-                </a:lnTo>
-                <a:lnTo>
-                  <a:pt x="4755754" y="2318004"/>
-                </a:lnTo>
-                <a:lnTo>
-                  <a:pt x="4750879" y="2467509"/>
-                </a:lnTo>
-                <a:lnTo>
-                  <a:pt x="4746677" y="2617013"/>
-                </a:lnTo>
-                <a:lnTo>
-                  <a:pt x="4742643" y="2765146"/>
-                </a:lnTo>
-                <a:lnTo>
-                  <a:pt x="4740794" y="2911221"/>
-                </a:lnTo>
-                <a:lnTo>
-                  <a:pt x="4738777" y="3057297"/>
-                </a:lnTo>
-                <a:lnTo>
-                  <a:pt x="4737768" y="3201315"/>
-                </a:lnTo>
-                <a:lnTo>
-                  <a:pt x="4738777" y="3343961"/>
-                </a:lnTo>
-                <a:lnTo>
-                  <a:pt x="4738777" y="3485236"/>
-                </a:lnTo>
-                <a:lnTo>
-                  <a:pt x="4740794" y="3625139"/>
-                </a:lnTo>
-                <a:lnTo>
-                  <a:pt x="4743819" y="3762299"/>
-                </a:lnTo>
-                <a:lnTo>
-                  <a:pt x="4746677" y="3898087"/>
-                </a:lnTo>
-                <a:lnTo>
-                  <a:pt x="4749871" y="4031133"/>
-                </a:lnTo>
-                <a:lnTo>
-                  <a:pt x="4754745" y="4163492"/>
-                </a:lnTo>
-                <a:lnTo>
-                  <a:pt x="4759956" y="4293793"/>
-                </a:lnTo>
-                <a:lnTo>
-                  <a:pt x="4764662" y="4421352"/>
-                </a:lnTo>
-                <a:lnTo>
-                  <a:pt x="4777942" y="4670298"/>
-                </a:lnTo>
-                <a:lnTo>
-                  <a:pt x="4792061" y="4908956"/>
-                </a:lnTo>
-                <a:lnTo>
-                  <a:pt x="4806853" y="5138013"/>
-                </a:lnTo>
-                <a:lnTo>
-                  <a:pt x="4823158" y="5354726"/>
-                </a:lnTo>
-                <a:lnTo>
-                  <a:pt x="4840135" y="5561838"/>
-                </a:lnTo>
-                <a:lnTo>
-                  <a:pt x="4858456" y="5753862"/>
-                </a:lnTo>
-                <a:lnTo>
-                  <a:pt x="4876442" y="5934227"/>
-                </a:lnTo>
-                <a:lnTo>
-                  <a:pt x="4894427" y="6100191"/>
-                </a:lnTo>
-                <a:lnTo>
-                  <a:pt x="4911404" y="6252438"/>
-                </a:lnTo>
-                <a:lnTo>
-                  <a:pt x="4927541" y="6387541"/>
-                </a:lnTo>
-                <a:lnTo>
-                  <a:pt x="4942837" y="6509613"/>
-                </a:lnTo>
-                <a:lnTo>
-                  <a:pt x="4955612" y="6612483"/>
-                </a:lnTo>
-                <a:lnTo>
-                  <a:pt x="4967714" y="6698894"/>
-                </a:lnTo>
-                <a:lnTo>
-                  <a:pt x="4985028" y="6817538"/>
-                </a:lnTo>
-                <a:lnTo>
-                  <a:pt x="4990911" y="6858000"/>
-                </a:lnTo>
-                <a:lnTo>
-                  <a:pt x="4085557" y="6858000"/>
-                </a:lnTo>
-                <a:lnTo>
-                  <a:pt x="4085557" y="6858001"/>
-                </a:lnTo>
-                <a:lnTo>
-                  <a:pt x="0" y="6858001"/>
-                </a:lnTo>
-                <a:lnTo>
-                  <a:pt x="0" y="1"/>
-                </a:lnTo>
-                <a:lnTo>
-                  <a:pt x="3646196" y="1"/>
+                  <a:pt x="6858001" y="1344715"/>
+                </a:lnTo>
+                <a:lnTo>
+                  <a:pt x="6858000" y="1344715"/>
+                </a:lnTo>
+                <a:lnTo>
+                  <a:pt x="6858000" y="4963245"/>
+                </a:lnTo>
+                <a:lnTo>
+                  <a:pt x="0" y="4963244"/>
+                </a:lnTo>
+                <a:lnTo>
+                  <a:pt x="0" y="900697"/>
+                </a:lnTo>
+                <a:lnTo>
+                  <a:pt x="1" y="900697"/>
+                </a:lnTo>
+                <a:lnTo>
+                  <a:pt x="1" y="0"/>
+                </a:lnTo>
+                <a:lnTo>
+                  <a:pt x="40463" y="5883"/>
+                </a:lnTo>
+                <a:lnTo>
+                  <a:pt x="159107" y="23196"/>
+                </a:lnTo>
+                <a:lnTo>
+                  <a:pt x="245518" y="35299"/>
+                </a:lnTo>
+                <a:lnTo>
+                  <a:pt x="348388" y="48073"/>
+                </a:lnTo>
+                <a:lnTo>
+                  <a:pt x="470460" y="63369"/>
+                </a:lnTo>
+                <a:lnTo>
+                  <a:pt x="605563" y="79506"/>
+                </a:lnTo>
+                <a:lnTo>
+                  <a:pt x="757810" y="96483"/>
+                </a:lnTo>
+                <a:lnTo>
+                  <a:pt x="923774" y="114469"/>
+                </a:lnTo>
+                <a:lnTo>
+                  <a:pt x="1104139" y="132454"/>
+                </a:lnTo>
+                <a:lnTo>
+                  <a:pt x="1296163" y="150776"/>
+                </a:lnTo>
+                <a:lnTo>
+                  <a:pt x="1503275" y="167753"/>
+                </a:lnTo>
+                <a:lnTo>
+                  <a:pt x="1719988" y="184058"/>
+                </a:lnTo>
+                <a:lnTo>
+                  <a:pt x="1949045" y="198849"/>
+                </a:lnTo>
+                <a:lnTo>
+                  <a:pt x="2187703" y="212969"/>
+                </a:lnTo>
+                <a:lnTo>
+                  <a:pt x="2436649" y="226248"/>
+                </a:lnTo>
+                <a:lnTo>
+                  <a:pt x="2564208" y="230955"/>
+                </a:lnTo>
+                <a:lnTo>
+                  <a:pt x="2694509" y="236165"/>
+                </a:lnTo>
+                <a:lnTo>
+                  <a:pt x="2826868" y="241040"/>
+                </a:lnTo>
+                <a:lnTo>
+                  <a:pt x="2959914" y="244234"/>
+                </a:lnTo>
+                <a:lnTo>
+                  <a:pt x="3095702" y="247091"/>
+                </a:lnTo>
+                <a:lnTo>
+                  <a:pt x="3232862" y="250117"/>
+                </a:lnTo>
+                <a:lnTo>
+                  <a:pt x="3372765" y="252134"/>
+                </a:lnTo>
+                <a:lnTo>
+                  <a:pt x="3514040" y="252134"/>
+                </a:lnTo>
+                <a:lnTo>
+                  <a:pt x="3656686" y="253142"/>
+                </a:lnTo>
+                <a:lnTo>
+                  <a:pt x="3800704" y="252134"/>
+                </a:lnTo>
+                <a:lnTo>
+                  <a:pt x="3946780" y="250117"/>
+                </a:lnTo>
+                <a:lnTo>
+                  <a:pt x="4092855" y="248268"/>
+                </a:lnTo>
+                <a:lnTo>
+                  <a:pt x="4240988" y="244234"/>
+                </a:lnTo>
+                <a:lnTo>
+                  <a:pt x="4390492" y="240032"/>
+                </a:lnTo>
+                <a:lnTo>
+                  <a:pt x="4539997" y="235157"/>
+                </a:lnTo>
+                <a:lnTo>
+                  <a:pt x="4690873" y="228266"/>
+                </a:lnTo>
+                <a:lnTo>
+                  <a:pt x="4843120" y="220029"/>
+                </a:lnTo>
+                <a:lnTo>
+                  <a:pt x="4996054" y="212129"/>
+                </a:lnTo>
+                <a:lnTo>
+                  <a:pt x="5148987" y="202044"/>
+                </a:lnTo>
+                <a:lnTo>
+                  <a:pt x="5303978" y="189941"/>
+                </a:lnTo>
+                <a:lnTo>
+                  <a:pt x="5456911" y="177839"/>
+                </a:lnTo>
+                <a:lnTo>
+                  <a:pt x="5612588" y="163887"/>
+                </a:lnTo>
+                <a:lnTo>
+                  <a:pt x="5768950" y="148591"/>
+                </a:lnTo>
+                <a:lnTo>
+                  <a:pt x="5923255" y="132455"/>
+                </a:lnTo>
+                <a:lnTo>
+                  <a:pt x="6079618" y="113629"/>
+                </a:lnTo>
+                <a:lnTo>
+                  <a:pt x="6235294" y="93458"/>
+                </a:lnTo>
+                <a:lnTo>
+                  <a:pt x="6391657" y="73455"/>
+                </a:lnTo>
+                <a:lnTo>
+                  <a:pt x="6547333" y="50091"/>
+                </a:lnTo>
+                <a:lnTo>
+                  <a:pt x="6702324" y="26222"/>
                 </a:lnTo>
                 <a:close/>
               </a:path>
@@ -9804,37 +10385,57 @@
             <a:noFill/>
           </a:ln>
         </p:spPr>
-        <p:style>
-          <a:lnRef idx="2">
-            <a:schemeClr val="accent1">
-              <a:shade val="50000"/>
-            </a:schemeClr>
-          </a:lnRef>
-          <a:fillRef idx="1003">
-            <a:schemeClr val="dk2"/>
-          </a:fillRef>
-          <a:effectRef idx="0">
-            <a:schemeClr val="accent1"/>
-          </a:effectRef>
-          <a:fontRef idx="minor">
-            <a:schemeClr val="lt1"/>
-          </a:fontRef>
-        </p:style>
-        <p:txBody>
-          <a:bodyPr rtlCol="0" anchor="ctr"/>
+        <p:txBody>
+          <a:bodyPr/>
           <a:lstStyle/>
           <a:p>
-            <a:pPr algn="ctr"/>
-            <a:endParaRPr lang="en-US"/>
-          </a:p>
-        </p:txBody>
-      </p:sp>
-      <p:sp>
-        <p:nvSpPr>
-          <p:cNvPr id="15" name="Rectangle 14">
+            <a:endParaRPr lang="es-ES"/>
+          </a:p>
+        </p:txBody>
+      </p:sp>
+      <p:pic>
+        <p:nvPicPr>
+          <p:cNvPr id="9" name="Imagen 8">
             <a:extLst>
               <a:ext uri="{FF2B5EF4-FFF2-40B4-BE49-F238E27FC236}">
-                <a16:creationId xmlns:a16="http://schemas.microsoft.com/office/drawing/2014/main" id="{0BA768A8-4FED-4ED8-9E46-6BE72188ECD2}"/>
+                <a16:creationId xmlns:a16="http://schemas.microsoft.com/office/drawing/2014/main" id="{ACAC6109-B282-0038-3B7F-91547C0C285B}"/>
+              </a:ext>
+            </a:extLst>
+          </p:cNvPr>
+          <p:cNvPicPr>
+            <a:picLocks noChangeAspect="1"/>
+          </p:cNvPicPr>
+          <p:nvPr/>
+        </p:nvPicPr>
+        <p:blipFill>
+          <a:blip r:embed="rId2">
+            <a:extLst>
+              <a:ext uri="{28A0092B-C50C-407E-A947-70E740481C1C}">
+                <a14:useLocalDpi xmlns:a14="http://schemas.microsoft.com/office/drawing/2010/main" val="0"/>
+              </a:ext>
+            </a:extLst>
+          </a:blip>
+          <a:stretch>
+            <a:fillRect/>
+          </a:stretch>
+        </p:blipFill>
+        <p:spPr>
+          <a:xfrm>
+            <a:off x="8129871" y="1408874"/>
+            <a:ext cx="3414010" cy="4040249"/>
+          </a:xfrm>
+          <a:prstGeom prst="rect">
+            <a:avLst/>
+          </a:prstGeom>
+          <a:effectLst/>
+        </p:spPr>
+      </p:pic>
+      <p:sp>
+        <p:nvSpPr>
+          <p:cNvPr id="49" name="Rectangle 43">
+            <a:extLst>
+              <a:ext uri="{FF2B5EF4-FFF2-40B4-BE49-F238E27FC236}">
+                <a16:creationId xmlns:a16="http://schemas.microsoft.com/office/drawing/2014/main" id="{D6F18ACE-6E82-4ADC-8A2F-A1771B309B16}"/>
               </a:ext>
               <a:ext uri="{C183D7F6-B498-43B3-948B-1728B52AA6E4}">
                 <adec:decorative xmlns:adec="http://schemas.microsoft.com/office/drawing/2017/decorative" val="1"/>
@@ -9854,7 +10455,7 @@
         </p:nvSpPr>
         <p:spPr>
           <a:xfrm>
-            <a:off x="10437812" y="0"/>
+            <a:off x="10442448" y="0"/>
             <a:ext cx="685800" cy="1143000"/>
           </a:xfrm>
           <a:prstGeom prst="rect">
@@ -9891,10 +10492,10 @@
       </p:sp>
       <p:sp>
         <p:nvSpPr>
-          <p:cNvPr id="4" name="Marcador de número de diapositiva 3">
+          <p:cNvPr id="5" name="Marcador de número de diapositiva 4">
             <a:extLst>
               <a:ext uri="{FF2B5EF4-FFF2-40B4-BE49-F238E27FC236}">
-                <a16:creationId xmlns:a16="http://schemas.microsoft.com/office/drawing/2014/main" id="{36089CE1-7F4A-AEAD-89E8-07F0D14B96A0}"/>
+                <a16:creationId xmlns:a16="http://schemas.microsoft.com/office/drawing/2014/main" id="{5FBEE138-6590-61F4-A136-14C32637B395}"/>
               </a:ext>
             </a:extLst>
           </p:cNvPr>
@@ -9933,7 +10534,7 @@
                   <a:spcPts val="600"/>
                 </a:spcAft>
               </a:pPr>
-              <a:t>9</a:t>
+              <a:t>7</a:t>
             </a:fld>
             <a:endParaRPr lang="es-ES">
               <a:solidFill>
@@ -9945,10 +10546,10 @@
       </p:sp>
       <p:sp>
         <p:nvSpPr>
-          <p:cNvPr id="2" name="Título 1">
+          <p:cNvPr id="11" name="Content Placeholder 10">
             <a:extLst>
               <a:ext uri="{FF2B5EF4-FFF2-40B4-BE49-F238E27FC236}">
-                <a16:creationId xmlns:a16="http://schemas.microsoft.com/office/drawing/2014/main" id="{31C6C596-1CDC-0C5F-B922-103566C5136C}"/>
+                <a16:creationId xmlns:a16="http://schemas.microsoft.com/office/drawing/2014/main" id="{9149F0CF-8629-F187-DFD2-4D950B2455C0}"/>
               </a:ext>
             </a:extLst>
           </p:cNvPr>
@@ -9956,13 +10557,13 @@
             <a:spLocks noGrp="1"/>
           </p:cNvSpPr>
           <p:nvPr>
-            <p:ph type="title"/>
+            <p:ph idx="1"/>
           </p:nvPr>
         </p:nvSpPr>
         <p:spPr>
           <a:xfrm>
-            <a:off x="653143" y="1645920"/>
-            <a:ext cx="3522879" cy="4470821"/>
+            <a:off x="648930" y="2438400"/>
+            <a:ext cx="6188189" cy="3785419"/>
           </a:xfrm>
         </p:spPr>
         <p:txBody>
@@ -9971,24 +10572,241 @@
           </a:bodyPr>
           <a:lstStyle/>
           <a:p>
-            <a:pPr algn="r"/>
-            <a:r>
-              <a:rPr lang="es-ES" dirty="0">
+            <a:pPr marL="457200" indent="-457200">
+              <a:buFont typeface="+mj-lt"/>
+              <a:buAutoNum type="arabicPeriod"/>
+            </a:pPr>
+            <a:r>
+              <a:rPr lang="en-US" dirty="0">
                 <a:solidFill>
                   <a:srgbClr val="FFFFFF"/>
                 </a:solidFill>
               </a:rPr>
-              <a:t>Código no probado DAC</a:t>
-            </a:r>
-          </a:p>
-        </p:txBody>
-      </p:sp>
-      <p:sp>
-        <p:nvSpPr>
-          <p:cNvPr id="3" name="Marcador de contenido 2">
+              <a:t>Envio de </a:t>
+            </a:r>
+            <a:r>
+              <a:rPr lang="en-US" dirty="0" err="1">
+                <a:solidFill>
+                  <a:srgbClr val="FFFFFF"/>
+                </a:solidFill>
+              </a:rPr>
+              <a:t>dato</a:t>
+            </a:r>
+            <a:r>
+              <a:rPr lang="en-US" dirty="0">
+                <a:solidFill>
+                  <a:srgbClr val="FFFFFF"/>
+                </a:solidFill>
+              </a:rPr>
+              <a:t> start </a:t>
+            </a:r>
+            <a:r>
+              <a:rPr lang="en-US" dirty="0" err="1">
+                <a:solidFill>
+                  <a:srgbClr val="FFFFFF"/>
+                </a:solidFill>
+              </a:rPr>
+              <a:t>por</a:t>
+            </a:r>
+            <a:r>
+              <a:rPr lang="en-US" dirty="0">
+                <a:solidFill>
+                  <a:srgbClr val="FFFFFF"/>
+                </a:solidFill>
+              </a:rPr>
+              <a:t> UART</a:t>
+            </a:r>
+          </a:p>
+          <a:p>
+            <a:pPr marL="457200" indent="-457200">
+              <a:buFont typeface="+mj-lt"/>
+              <a:buAutoNum type="arabicPeriod"/>
+            </a:pPr>
+            <a:r>
+              <a:rPr lang="en-US" dirty="0">
+                <a:solidFill>
+                  <a:srgbClr val="FFFFFF"/>
+                </a:solidFill>
+              </a:rPr>
+              <a:t>Timer </a:t>
+            </a:r>
+            <a:r>
+              <a:rPr lang="en-US" dirty="0" err="1">
+                <a:solidFill>
+                  <a:srgbClr val="FFFFFF"/>
+                </a:solidFill>
+              </a:rPr>
+              <a:t>inicia</a:t>
+            </a:r>
+            <a:r>
+              <a:rPr lang="en-US" dirty="0">
+                <a:solidFill>
+                  <a:srgbClr val="FFFFFF"/>
+                </a:solidFill>
+              </a:rPr>
+              <a:t> PC0, </a:t>
+            </a:r>
+            <a:r>
+              <a:rPr lang="en-US" dirty="0" err="1">
+                <a:solidFill>
+                  <a:srgbClr val="FFFFFF"/>
+                </a:solidFill>
+              </a:rPr>
+              <a:t>el</a:t>
+            </a:r>
+            <a:r>
+              <a:rPr lang="en-US" dirty="0">
+                <a:solidFill>
+                  <a:srgbClr val="FFFFFF"/>
+                </a:solidFill>
+              </a:rPr>
+              <a:t> </a:t>
+            </a:r>
+            <a:r>
+              <a:rPr lang="en-US" dirty="0" err="1">
+                <a:solidFill>
+                  <a:srgbClr val="FFFFFF"/>
+                </a:solidFill>
+              </a:rPr>
+              <a:t>cual</a:t>
+            </a:r>
+            <a:r>
+              <a:rPr lang="en-US" dirty="0">
+                <a:solidFill>
+                  <a:srgbClr val="FFFFFF"/>
+                </a:solidFill>
+              </a:rPr>
+              <a:t> </a:t>
+            </a:r>
+            <a:r>
+              <a:rPr lang="en-US" dirty="0" err="1">
+                <a:solidFill>
+                  <a:srgbClr val="FFFFFF"/>
+                </a:solidFill>
+              </a:rPr>
+              <a:t>actua</a:t>
+            </a:r>
+            <a:r>
+              <a:rPr lang="en-US" dirty="0">
+                <a:solidFill>
+                  <a:srgbClr val="FFFFFF"/>
+                </a:solidFill>
+              </a:rPr>
+              <a:t> de trigger para </a:t>
+            </a:r>
+            <a:r>
+              <a:rPr lang="en-US" dirty="0" err="1">
+                <a:solidFill>
+                  <a:srgbClr val="FFFFFF"/>
+                </a:solidFill>
+              </a:rPr>
+              <a:t>iniciar</a:t>
+            </a:r>
+            <a:r>
+              <a:rPr lang="en-US" dirty="0">
+                <a:solidFill>
+                  <a:srgbClr val="FFFFFF"/>
+                </a:solidFill>
+              </a:rPr>
+              <a:t> la </a:t>
+            </a:r>
+            <a:r>
+              <a:rPr lang="en-US" dirty="0" err="1">
+                <a:solidFill>
+                  <a:srgbClr val="FFFFFF"/>
+                </a:solidFill>
+              </a:rPr>
+              <a:t>medición</a:t>
+            </a:r>
+            <a:endParaRPr lang="en-US" dirty="0">
+              <a:solidFill>
+                <a:srgbClr val="FFFFFF"/>
+              </a:solidFill>
+            </a:endParaRPr>
+          </a:p>
+          <a:p>
+            <a:pPr marL="457200" indent="-457200">
+              <a:buFont typeface="+mj-lt"/>
+              <a:buAutoNum type="arabicPeriod"/>
+            </a:pPr>
+            <a:r>
+              <a:rPr lang="en-US" dirty="0">
+                <a:solidFill>
+                  <a:srgbClr val="FFFFFF"/>
+                </a:solidFill>
+              </a:rPr>
+              <a:t>Timer </a:t>
+            </a:r>
+            <a:r>
+              <a:rPr lang="en-US" dirty="0" err="1">
+                <a:solidFill>
+                  <a:srgbClr val="FFFFFF"/>
+                </a:solidFill>
+              </a:rPr>
+              <a:t>inicia</a:t>
+            </a:r>
+            <a:r>
+              <a:rPr lang="en-US" dirty="0">
+                <a:solidFill>
+                  <a:srgbClr val="FFFFFF"/>
+                </a:solidFill>
+              </a:rPr>
+              <a:t> DAC para </a:t>
+            </a:r>
+            <a:r>
+              <a:rPr lang="en-US" dirty="0" err="1">
+                <a:solidFill>
+                  <a:srgbClr val="FFFFFF"/>
+                </a:solidFill>
+              </a:rPr>
+              <a:t>empezar</a:t>
+            </a:r>
+            <a:r>
+              <a:rPr lang="en-US" dirty="0">
+                <a:solidFill>
+                  <a:srgbClr val="FFFFFF"/>
+                </a:solidFill>
+              </a:rPr>
+              <a:t> a </a:t>
+            </a:r>
+            <a:r>
+              <a:rPr lang="en-US" dirty="0" err="1">
+                <a:solidFill>
+                  <a:srgbClr val="FFFFFF"/>
+                </a:solidFill>
+              </a:rPr>
+              <a:t>capturar</a:t>
+            </a:r>
+            <a:r>
+              <a:rPr lang="en-US" dirty="0">
+                <a:solidFill>
+                  <a:srgbClr val="FFFFFF"/>
+                </a:solidFill>
+              </a:rPr>
+              <a:t> </a:t>
+            </a:r>
+            <a:r>
+              <a:rPr lang="en-US" dirty="0" err="1">
+                <a:solidFill>
+                  <a:srgbClr val="FFFFFF"/>
+                </a:solidFill>
+              </a:rPr>
+              <a:t>datos</a:t>
+            </a:r>
+            <a:endParaRPr lang="en-US" dirty="0">
+              <a:solidFill>
+                <a:srgbClr val="FFFFFF"/>
+              </a:solidFill>
+            </a:endParaRPr>
+          </a:p>
+        </p:txBody>
+      </p:sp>
+      <p:sp>
+        <p:nvSpPr>
+          <p:cNvPr id="4" name="Marcador de pie de página 3">
             <a:extLst>
               <a:ext uri="{FF2B5EF4-FFF2-40B4-BE49-F238E27FC236}">
-                <a16:creationId xmlns:a16="http://schemas.microsoft.com/office/drawing/2014/main" id="{F3AF099A-0569-2F23-8073-4E62BF8C305E}"/>
+                <a16:creationId xmlns:a16="http://schemas.microsoft.com/office/drawing/2014/main" id="{C59C2F42-C9E4-4860-C9D0-5C62FF71EF5A}"/>
               </a:ext>
             </a:extLst>
           </p:cNvPr>
@@ -9996,13 +10814,13 @@
             <a:spLocks noGrp="1"/>
           </p:cNvSpPr>
           <p:nvPr>
-            <p:ph idx="1"/>
+            <p:ph type="ftr" sz="quarter" idx="11"/>
           </p:nvPr>
         </p:nvSpPr>
         <p:spPr>
           <a:xfrm>
-            <a:off x="5204109" y="1645920"/>
-            <a:ext cx="5919503" cy="4470821"/>
+            <a:off x="636915" y="6355080"/>
+            <a:ext cx="3859795" cy="304801"/>
           </a:xfrm>
         </p:spPr>
         <p:txBody>
@@ -10011,120 +10829,586 @@
           </a:bodyPr>
           <a:lstStyle/>
           <a:p>
-            <a:pPr marL="0" indent="0">
-              <a:buNone/>
-            </a:pPr>
-            <a:endParaRPr lang="es-ES" dirty="0"/>
-          </a:p>
-        </p:txBody>
-      </p:sp>
-      <p:pic>
-        <p:nvPicPr>
-          <p:cNvPr id="6" name="Imagen 5">
-            <a:extLst>
-              <a:ext uri="{FF2B5EF4-FFF2-40B4-BE49-F238E27FC236}">
-                <a16:creationId xmlns:a16="http://schemas.microsoft.com/office/drawing/2014/main" id="{8136AC87-2637-6324-4432-BD2625B80E80}"/>
-              </a:ext>
-            </a:extLst>
-          </p:cNvPr>
-          <p:cNvPicPr>
-            <a:picLocks noChangeAspect="1"/>
-          </p:cNvPicPr>
-          <p:nvPr/>
-        </p:nvPicPr>
-        <p:blipFill>
-          <a:blip r:embed="rId2"/>
-          <a:stretch>
-            <a:fillRect/>
-          </a:stretch>
-        </p:blipFill>
-        <p:spPr>
-          <a:xfrm>
-            <a:off x="5200353" y="1261974"/>
-            <a:ext cx="6569009" cy="4610500"/>
-          </a:xfrm>
-          <a:prstGeom prst="rect">
-            <a:avLst/>
-          </a:prstGeom>
-        </p:spPr>
-      </p:pic>
-      <p:sp>
-        <p:nvSpPr>
-          <p:cNvPr id="7" name="CuadroTexto 6">
-            <a:extLst>
-              <a:ext uri="{FF2B5EF4-FFF2-40B4-BE49-F238E27FC236}">
-                <a16:creationId xmlns:a16="http://schemas.microsoft.com/office/drawing/2014/main" id="{ED4856CD-299A-5FB9-9F09-8B4E9E36E5BE}"/>
-              </a:ext>
-            </a:extLst>
-          </p:cNvPr>
-          <p:cNvSpPr txBox="1"/>
-          <p:nvPr/>
-        </p:nvSpPr>
-        <p:spPr>
-          <a:xfrm>
-            <a:off x="5200353" y="6116741"/>
-            <a:ext cx="5919503" cy="646331"/>
-          </a:xfrm>
-          <a:prstGeom prst="rect">
-            <a:avLst/>
-          </a:prstGeom>
-          <a:noFill/>
-        </p:spPr>
-        <p:txBody>
-          <a:bodyPr wrap="square" rtlCol="0">
-            <a:spAutoFit/>
-          </a:bodyPr>
-          <a:lstStyle/>
-          <a:p>
-            <a:r>
-              <a:rPr lang="es-ES" dirty="0"/>
-              <a:t> Falta mostrar interrupción de recepción de modo por UART y en el </a:t>
-            </a:r>
-            <a:r>
-              <a:rPr lang="es-ES" dirty="0" err="1"/>
-              <a:t>main</a:t>
-            </a:r>
-            <a:r>
-              <a:rPr lang="es-ES" dirty="0"/>
-              <a:t> el envío de la estadística.</a:t>
-            </a:r>
-          </a:p>
-        </p:txBody>
-      </p:sp>
-      <p:sp>
-        <p:nvSpPr>
-          <p:cNvPr id="8" name="Marcador de pie de página 7">
-            <a:extLst>
-              <a:ext uri="{FF2B5EF4-FFF2-40B4-BE49-F238E27FC236}">
-                <a16:creationId xmlns:a16="http://schemas.microsoft.com/office/drawing/2014/main" id="{E190D3EF-012D-F2F3-43DF-1BC776B85972}"/>
-              </a:ext>
-            </a:extLst>
-          </p:cNvPr>
-          <p:cNvSpPr>
-            <a:spLocks noGrp="1"/>
-          </p:cNvSpPr>
-          <p:nvPr>
-            <p:ph type="ftr" sz="quarter" idx="11"/>
-          </p:nvPr>
-        </p:nvSpPr>
-        <p:spPr/>
-        <p:txBody>
-          <a:bodyPr/>
-          <a:lstStyle/>
-          <a:p>
-            <a:endParaRPr lang="es-ES"/>
+            <a:endParaRPr lang="es-ES">
+              <a:solidFill>
+                <a:srgbClr val="FFFFFF">
+                  <a:alpha val="60000"/>
+                </a:srgbClr>
+              </a:solidFill>
+            </a:endParaRPr>
           </a:p>
         </p:txBody>
       </p:sp>
     </p:spTree>
     <p:extLst>
       <p:ext uri="{BB962C8B-B14F-4D97-AF65-F5344CB8AC3E}">
-        <p14:creationId xmlns:p14="http://schemas.microsoft.com/office/powerpoint/2010/main" val="2095587043"/>
+        <p14:creationId xmlns:p14="http://schemas.microsoft.com/office/powerpoint/2010/main" val="1239791016"/>
       </p:ext>
     </p:extLst>
   </p:cSld>
   <p:clrMapOvr>
     <a:overrideClrMapping bg1="lt1" tx1="dk1" bg2="lt2" tx2="dk2" accent1="accent1" accent2="accent2" accent3="accent3" accent4="accent4" accent5="accent5" accent6="accent6" hlink="hlink" folHlink="folHlink"/>
+  </p:clrMapOvr>
+</p:sld>
+</file>
+
+<file path=ppt/slides/slide8.xml><?xml version="1.0" encoding="utf-8"?>
+<p:sld xmlns:a="http://schemas.openxmlformats.org/drawingml/2006/main" xmlns:r="http://schemas.openxmlformats.org/officeDocument/2006/relationships" xmlns:p="http://schemas.openxmlformats.org/presentationml/2006/main">
+  <p:cSld>
+    <p:spTree>
+      <p:nvGrpSpPr>
+        <p:cNvPr id="1" name="">
+          <a:extLst>
+            <a:ext uri="{FF2B5EF4-FFF2-40B4-BE49-F238E27FC236}">
+              <a16:creationId xmlns:a16="http://schemas.microsoft.com/office/drawing/2014/main" id="{F6BE8514-14C1-4CBA-FAA4-E3B42AC18732}"/>
+            </a:ext>
+          </a:extLst>
+        </p:cNvPr>
+        <p:cNvGrpSpPr/>
+        <p:nvPr/>
+      </p:nvGrpSpPr>
+      <p:grpSpPr>
+        <a:xfrm>
+          <a:off x="0" y="0"/>
+          <a:ext cx="0" cy="0"/>
+          <a:chOff x="0" y="0"/>
+          <a:chExt cx="0" cy="0"/>
+        </a:xfrm>
+      </p:grpSpPr>
+      <p:sp>
+        <p:nvSpPr>
+          <p:cNvPr id="2" name="Título 1">
+            <a:extLst>
+              <a:ext uri="{FF2B5EF4-FFF2-40B4-BE49-F238E27FC236}">
+                <a16:creationId xmlns:a16="http://schemas.microsoft.com/office/drawing/2014/main" id="{2FD0BDBA-5890-A0BC-2553-9CF6CC3FCC88}"/>
+              </a:ext>
+            </a:extLst>
+          </p:cNvPr>
+          <p:cNvSpPr>
+            <a:spLocks noGrp="1"/>
+          </p:cNvSpPr>
+          <p:nvPr>
+            <p:ph type="title"/>
+          </p:nvPr>
+        </p:nvSpPr>
+        <p:spPr/>
+        <p:txBody>
+          <a:bodyPr/>
+          <a:lstStyle/>
+          <a:p>
+            <a:r>
+              <a:rPr lang="es-ES" dirty="0"/>
+              <a:t>Métricas obtenidas DAC STM</a:t>
+            </a:r>
+          </a:p>
+        </p:txBody>
+      </p:sp>
+      <p:sp>
+        <p:nvSpPr>
+          <p:cNvPr id="3" name="Marcador de contenido 2">
+            <a:extLst>
+              <a:ext uri="{FF2B5EF4-FFF2-40B4-BE49-F238E27FC236}">
+                <a16:creationId xmlns:a16="http://schemas.microsoft.com/office/drawing/2014/main" id="{15C495AF-F986-1ACE-6D5E-23DFF25B35B0}"/>
+              </a:ext>
+            </a:extLst>
+          </p:cNvPr>
+          <p:cNvSpPr>
+            <a:spLocks noGrp="1"/>
+          </p:cNvSpPr>
+          <p:nvPr>
+            <p:ph idx="1"/>
+          </p:nvPr>
+        </p:nvSpPr>
+        <p:spPr>
+          <a:xfrm>
+            <a:off x="1027112" y="2010585"/>
+            <a:ext cx="8946541" cy="4195481"/>
+          </a:xfrm>
+        </p:spPr>
+        <p:txBody>
+          <a:bodyPr/>
+          <a:lstStyle/>
+          <a:p>
+            <a:pPr marL="0" indent="0">
+              <a:buNone/>
+            </a:pPr>
+            <a:endParaRPr lang="es-ES" dirty="0"/>
+          </a:p>
+        </p:txBody>
+      </p:sp>
+      <p:sp>
+        <p:nvSpPr>
+          <p:cNvPr id="4" name="Marcador de número de diapositiva 3">
+            <a:extLst>
+              <a:ext uri="{FF2B5EF4-FFF2-40B4-BE49-F238E27FC236}">
+                <a16:creationId xmlns:a16="http://schemas.microsoft.com/office/drawing/2014/main" id="{DA380CE7-6F75-ED91-3BAA-3887D03C0F43}"/>
+              </a:ext>
+            </a:extLst>
+          </p:cNvPr>
+          <p:cNvSpPr>
+            <a:spLocks noGrp="1"/>
+          </p:cNvSpPr>
+          <p:nvPr>
+            <p:ph type="sldNum" sz="quarter" idx="12"/>
+          </p:nvPr>
+        </p:nvSpPr>
+        <p:spPr/>
+        <p:txBody>
+          <a:bodyPr/>
+          <a:lstStyle/>
+          <a:p>
+            <a:fld id="{E725A04B-6C01-430F-BBE6-0BFF217C666F}" type="slidenum">
+              <a:rPr lang="es-ES" smtClean="0"/>
+              <a:t>8</a:t>
+            </a:fld>
+            <a:endParaRPr lang="es-ES"/>
+          </a:p>
+        </p:txBody>
+      </p:sp>
+      <p:sp>
+        <p:nvSpPr>
+          <p:cNvPr id="5" name="Marcador de pie de página 4">
+            <a:extLst>
+              <a:ext uri="{FF2B5EF4-FFF2-40B4-BE49-F238E27FC236}">
+                <a16:creationId xmlns:a16="http://schemas.microsoft.com/office/drawing/2014/main" id="{D8857B0D-D624-9E97-57F3-9B81CA9B6552}"/>
+              </a:ext>
+            </a:extLst>
+          </p:cNvPr>
+          <p:cNvSpPr>
+            <a:spLocks noGrp="1"/>
+          </p:cNvSpPr>
+          <p:nvPr>
+            <p:ph type="ftr" sz="quarter" idx="11"/>
+          </p:nvPr>
+        </p:nvSpPr>
+        <p:spPr/>
+        <p:txBody>
+          <a:bodyPr/>
+          <a:lstStyle/>
+          <a:p>
+            <a:endParaRPr lang="es-ES"/>
+          </a:p>
+        </p:txBody>
+      </p:sp>
+      <p:graphicFrame>
+        <p:nvGraphicFramePr>
+          <p:cNvPr id="7" name="Tabla 6">
+            <a:extLst>
+              <a:ext uri="{FF2B5EF4-FFF2-40B4-BE49-F238E27FC236}">
+                <a16:creationId xmlns:a16="http://schemas.microsoft.com/office/drawing/2014/main" id="{73C12B4D-F81A-829A-474D-C46D06AEE566}"/>
+              </a:ext>
+            </a:extLst>
+          </p:cNvPr>
+          <p:cNvGraphicFramePr>
+            <a:graphicFrameLocks noGrp="1"/>
+          </p:cNvGraphicFramePr>
+          <p:nvPr>
+            <p:extLst>
+              <p:ext uri="{D42A27DB-BD31-4B8C-83A1-F6EECF244321}">
+                <p14:modId xmlns:p14="http://schemas.microsoft.com/office/powerpoint/2010/main" val="1917554112"/>
+              </p:ext>
+            </p:extLst>
+          </p:nvPr>
+        </p:nvGraphicFramePr>
+        <p:xfrm>
+          <a:off x="1284472" y="2954866"/>
+          <a:ext cx="8127999" cy="1483360"/>
+        </p:xfrm>
+        <a:graphic>
+          <a:graphicData uri="http://schemas.openxmlformats.org/drawingml/2006/table">
+            <a:tbl>
+              <a:tblPr firstRow="1" bandRow="1">
+                <a:tableStyleId>{5C22544A-7EE6-4342-B048-85BDC9FD1C3A}</a:tableStyleId>
+              </a:tblPr>
+              <a:tblGrid>
+                <a:gridCol w="2709333">
+                  <a:extLst>
+                    <a:ext uri="{9D8B030D-6E8A-4147-A177-3AD203B41FA5}">
+                      <a16:colId xmlns:a16="http://schemas.microsoft.com/office/drawing/2014/main" val="2866946604"/>
+                    </a:ext>
+                  </a:extLst>
+                </a:gridCol>
+                <a:gridCol w="2709333">
+                  <a:extLst>
+                    <a:ext uri="{9D8B030D-6E8A-4147-A177-3AD203B41FA5}">
+                      <a16:colId xmlns:a16="http://schemas.microsoft.com/office/drawing/2014/main" val="1519659291"/>
+                    </a:ext>
+                  </a:extLst>
+                </a:gridCol>
+                <a:gridCol w="2709333">
+                  <a:extLst>
+                    <a:ext uri="{9D8B030D-6E8A-4147-A177-3AD203B41FA5}">
+                      <a16:colId xmlns:a16="http://schemas.microsoft.com/office/drawing/2014/main" val="2689968238"/>
+                    </a:ext>
+                  </a:extLst>
+                </a:gridCol>
+              </a:tblGrid>
+              <a:tr h="370840">
+                <a:tc>
+                  <a:txBody>
+                    <a:bodyPr/>
+                    <a:lstStyle/>
+                    <a:p>
+                      <a:r>
+                        <a:rPr lang="es-ES" dirty="0"/>
+                        <a:t>Datos</a:t>
+                      </a:r>
+                    </a:p>
+                  </a:txBody>
+                  <a:tcPr/>
+                </a:tc>
+                <a:tc>
+                  <a:txBody>
+                    <a:bodyPr/>
+                    <a:lstStyle/>
+                    <a:p>
+                      <a:r>
+                        <a:rPr lang="es-ES" dirty="0"/>
+                        <a:t>Medido</a:t>
+                      </a:r>
+                    </a:p>
+                  </a:txBody>
+                  <a:tcPr/>
+                </a:tc>
+                <a:tc>
+                  <a:txBody>
+                    <a:bodyPr/>
+                    <a:lstStyle/>
+                    <a:p>
+                      <a:r>
+                        <a:rPr lang="es-ES" dirty="0" err="1"/>
+                        <a:t>Datasheet</a:t>
+                      </a:r>
+                      <a:endParaRPr lang="es-ES" dirty="0"/>
+                    </a:p>
+                  </a:txBody>
+                  <a:tcPr/>
+                </a:tc>
+                <a:extLst>
+                  <a:ext uri="{0D108BD9-81ED-4DB2-BD59-A6C34878D82A}">
+                    <a16:rowId xmlns:a16="http://schemas.microsoft.com/office/drawing/2014/main" val="3147083577"/>
+                  </a:ext>
+                </a:extLst>
+              </a:tr>
+              <a:tr h="370840">
+                <a:tc>
+                  <a:txBody>
+                    <a:bodyPr/>
+                    <a:lstStyle/>
+                    <a:p>
+                      <a:r>
+                        <a:rPr lang="es-ES" dirty="0"/>
+                        <a:t>Ganancia (%)</a:t>
+                      </a:r>
+                    </a:p>
+                  </a:txBody>
+                  <a:tcPr/>
+                </a:tc>
+                <a:tc>
+                  <a:txBody>
+                    <a:bodyPr/>
+                    <a:lstStyle/>
+                    <a:p>
+                      <a:r>
+                        <a:rPr lang="es-ES" dirty="0"/>
+                        <a:t>0.479</a:t>
+                      </a:r>
+                    </a:p>
+                  </a:txBody>
+                  <a:tcPr/>
+                </a:tc>
+                <a:tc>
+                  <a:txBody>
+                    <a:bodyPr/>
+                    <a:lstStyle/>
+                    <a:p>
+                      <a:r>
+                        <a:rPr lang="es-ES" dirty="0"/>
+                        <a:t>0.5</a:t>
+                      </a:r>
+                    </a:p>
+                  </a:txBody>
+                  <a:tcPr/>
+                </a:tc>
+                <a:extLst>
+                  <a:ext uri="{0D108BD9-81ED-4DB2-BD59-A6C34878D82A}">
+                    <a16:rowId xmlns:a16="http://schemas.microsoft.com/office/drawing/2014/main" val="1725001828"/>
+                  </a:ext>
+                </a:extLst>
+              </a:tr>
+              <a:tr h="370840">
+                <a:tc>
+                  <a:txBody>
+                    <a:bodyPr/>
+                    <a:lstStyle/>
+                    <a:p>
+                      <a:r>
+                        <a:rPr lang="es-ES" dirty="0"/>
+                        <a:t>Offset en 0x800</a:t>
+                      </a:r>
+                    </a:p>
+                  </a:txBody>
+                  <a:tcPr/>
+                </a:tc>
+                <a:tc>
+                  <a:txBody>
+                    <a:bodyPr/>
+                    <a:lstStyle/>
+                    <a:p>
+                      <a:r>
+                        <a:rPr lang="es-ES" dirty="0"/>
+                        <a:t>~1</a:t>
+                      </a:r>
+                    </a:p>
+                  </a:txBody>
+                  <a:tcPr/>
+                </a:tc>
+                <a:tc>
+                  <a:txBody>
+                    <a:bodyPr/>
+                    <a:lstStyle/>
+                    <a:p>
+                      <a:r>
+                        <a:rPr lang="es-ES" dirty="0"/>
+                        <a:t>8</a:t>
+                      </a:r>
+                    </a:p>
+                  </a:txBody>
+                  <a:tcPr/>
+                </a:tc>
+                <a:extLst>
+                  <a:ext uri="{0D108BD9-81ED-4DB2-BD59-A6C34878D82A}">
+                    <a16:rowId xmlns:a16="http://schemas.microsoft.com/office/drawing/2014/main" val="4081098935"/>
+                  </a:ext>
+                </a:extLst>
+              </a:tr>
+              <a:tr h="370840">
+                <a:tc>
+                  <a:txBody>
+                    <a:bodyPr/>
+                    <a:lstStyle/>
+                    <a:p>
+                      <a:r>
+                        <a:rPr lang="es-ES" dirty="0"/>
+                        <a:t>Offset en 0x001</a:t>
+                      </a:r>
+                    </a:p>
+                  </a:txBody>
+                  <a:tcPr/>
+                </a:tc>
+                <a:tc>
+                  <a:txBody>
+                    <a:bodyPr/>
+                    <a:lstStyle/>
+                    <a:p>
+                      <a:r>
+                        <a:rPr lang="es-ES" dirty="0"/>
+                        <a:t>1 – 2 </a:t>
+                      </a:r>
+                    </a:p>
+                  </a:txBody>
+                  <a:tcPr/>
+                </a:tc>
+                <a:tc>
+                  <a:txBody>
+                    <a:bodyPr/>
+                    <a:lstStyle/>
+                    <a:p>
+                      <a:r>
+                        <a:rPr lang="es-ES" dirty="0"/>
+                        <a:t>5</a:t>
+                      </a:r>
+                    </a:p>
+                  </a:txBody>
+                  <a:tcPr/>
+                </a:tc>
+                <a:extLst>
+                  <a:ext uri="{0D108BD9-81ED-4DB2-BD59-A6C34878D82A}">
+                    <a16:rowId xmlns:a16="http://schemas.microsoft.com/office/drawing/2014/main" val="3688062468"/>
+                  </a:ext>
+                </a:extLst>
+              </a:tr>
+            </a:tbl>
+          </a:graphicData>
+        </a:graphic>
+      </p:graphicFrame>
+    </p:spTree>
+    <p:extLst>
+      <p:ext uri="{BB962C8B-B14F-4D97-AF65-F5344CB8AC3E}">
+        <p14:creationId xmlns:p14="http://schemas.microsoft.com/office/powerpoint/2010/main" val="332561338"/>
+      </p:ext>
+    </p:extLst>
+  </p:cSld>
+  <p:clrMapOvr>
+    <a:masterClrMapping/>
+  </p:clrMapOvr>
+</p:sld>
+</file>
+
+<file path=ppt/slides/slide9.xml><?xml version="1.0" encoding="utf-8"?>
+<p:sld xmlns:a="http://schemas.openxmlformats.org/drawingml/2006/main" xmlns:r="http://schemas.openxmlformats.org/officeDocument/2006/relationships" xmlns:p="http://schemas.openxmlformats.org/presentationml/2006/main">
+  <p:cSld>
+    <p:spTree>
+      <p:nvGrpSpPr>
+        <p:cNvPr id="1" name=""/>
+        <p:cNvGrpSpPr/>
+        <p:nvPr/>
+      </p:nvGrpSpPr>
+      <p:grpSpPr>
+        <a:xfrm>
+          <a:off x="0" y="0"/>
+          <a:ext cx="0" cy="0"/>
+          <a:chOff x="0" y="0"/>
+          <a:chExt cx="0" cy="0"/>
+        </a:xfrm>
+      </p:grpSpPr>
+      <p:sp>
+        <p:nvSpPr>
+          <p:cNvPr id="2" name="Título 1">
+            <a:extLst>
+              <a:ext uri="{FF2B5EF4-FFF2-40B4-BE49-F238E27FC236}">
+                <a16:creationId xmlns:a16="http://schemas.microsoft.com/office/drawing/2014/main" id="{4B9C531D-9FB3-F33E-2597-DF8C8F3134C4}"/>
+              </a:ext>
+            </a:extLst>
+          </p:cNvPr>
+          <p:cNvSpPr>
+            <a:spLocks noGrp="1"/>
+          </p:cNvSpPr>
+          <p:nvPr>
+            <p:ph type="title"/>
+          </p:nvPr>
+        </p:nvSpPr>
+        <p:spPr/>
+        <p:txBody>
+          <a:bodyPr/>
+          <a:lstStyle/>
+          <a:p>
+            <a:r>
+              <a:rPr lang="es-ES" dirty="0" err="1"/>
+              <a:t>Analog</a:t>
+            </a:r>
+            <a:r>
+              <a:rPr lang="es-ES" dirty="0"/>
+              <a:t> Discovery 2</a:t>
+            </a:r>
+          </a:p>
+        </p:txBody>
+      </p:sp>
+      <p:sp>
+        <p:nvSpPr>
+          <p:cNvPr id="3" name="Marcador de contenido 2">
+            <a:extLst>
+              <a:ext uri="{FF2B5EF4-FFF2-40B4-BE49-F238E27FC236}">
+                <a16:creationId xmlns:a16="http://schemas.microsoft.com/office/drawing/2014/main" id="{56B49FC1-71E8-C158-8CBC-1BB1859E75B4}"/>
+              </a:ext>
+            </a:extLst>
+          </p:cNvPr>
+          <p:cNvSpPr>
+            <a:spLocks noGrp="1"/>
+          </p:cNvSpPr>
+          <p:nvPr>
+            <p:ph idx="1"/>
+          </p:nvPr>
+        </p:nvSpPr>
+        <p:spPr/>
+        <p:txBody>
+          <a:bodyPr/>
+          <a:lstStyle/>
+          <a:p>
+            <a:r>
+              <a:rPr lang="es-ES" dirty="0" err="1"/>
+              <a:t>Wavegen</a:t>
+            </a:r>
+            <a:r>
+              <a:rPr lang="es-ES" dirty="0"/>
+              <a:t> offset =  4,6mV (sin considerar offset del </a:t>
+            </a:r>
+            <a:r>
+              <a:rPr lang="es-ES" dirty="0" err="1"/>
+              <a:t>scope</a:t>
+            </a:r>
+            <a:r>
+              <a:rPr lang="es-ES" dirty="0"/>
+              <a:t>)</a:t>
+            </a:r>
+          </a:p>
+          <a:p>
+            <a:r>
+              <a:rPr lang="es-ES" dirty="0"/>
+              <a:t>Scope offset = -900µV (4LSB de sus 14  bits)</a:t>
+            </a:r>
+          </a:p>
+          <a:p>
+            <a:r>
+              <a:rPr lang="es-ES" dirty="0"/>
+              <a:t>Métricas variables dependiendo de la amplitud de la entrada o salida</a:t>
+            </a:r>
+          </a:p>
+        </p:txBody>
+      </p:sp>
+      <p:sp>
+        <p:nvSpPr>
+          <p:cNvPr id="4" name="Marcador de pie de página 3">
+            <a:extLst>
+              <a:ext uri="{FF2B5EF4-FFF2-40B4-BE49-F238E27FC236}">
+                <a16:creationId xmlns:a16="http://schemas.microsoft.com/office/drawing/2014/main" id="{4CADADBA-9CE7-A1F7-ED29-28977AC112E6}"/>
+              </a:ext>
+            </a:extLst>
+          </p:cNvPr>
+          <p:cNvSpPr>
+            <a:spLocks noGrp="1"/>
+          </p:cNvSpPr>
+          <p:nvPr>
+            <p:ph type="ftr" sz="quarter" idx="11"/>
+          </p:nvPr>
+        </p:nvSpPr>
+        <p:spPr/>
+        <p:txBody>
+          <a:bodyPr/>
+          <a:lstStyle/>
+          <a:p>
+            <a:endParaRPr lang="es-ES"/>
+          </a:p>
+        </p:txBody>
+      </p:sp>
+      <p:sp>
+        <p:nvSpPr>
+          <p:cNvPr id="5" name="Marcador de número de diapositiva 4">
+            <a:extLst>
+              <a:ext uri="{FF2B5EF4-FFF2-40B4-BE49-F238E27FC236}">
+                <a16:creationId xmlns:a16="http://schemas.microsoft.com/office/drawing/2014/main" id="{91DAA484-DA2D-536E-C9ED-2ECB3D2543D2}"/>
+              </a:ext>
+            </a:extLst>
+          </p:cNvPr>
+          <p:cNvSpPr>
+            <a:spLocks noGrp="1"/>
+          </p:cNvSpPr>
+          <p:nvPr>
+            <p:ph type="sldNum" sz="quarter" idx="12"/>
+          </p:nvPr>
+        </p:nvSpPr>
+        <p:spPr/>
+        <p:txBody>
+          <a:bodyPr/>
+          <a:lstStyle/>
+          <a:p>
+            <a:fld id="{E725A04B-6C01-430F-BBE6-0BFF217C666F}" type="slidenum">
+              <a:rPr lang="es-ES" smtClean="0"/>
+              <a:t>9</a:t>
+            </a:fld>
+            <a:endParaRPr lang="es-ES"/>
+          </a:p>
+        </p:txBody>
+      </p:sp>
+    </p:spTree>
+    <p:extLst>
+      <p:ext uri="{BB962C8B-B14F-4D97-AF65-F5344CB8AC3E}">
+        <p14:creationId xmlns:p14="http://schemas.microsoft.com/office/powerpoint/2010/main" val="775836065"/>
+      </p:ext>
+    </p:extLst>
+  </p:cSld>
+  <p:clrMapOvr>
+    <a:masterClrMapping/>
   </p:clrMapOvr>
 </p:sld>
 </file>
